--- a/Презентация_ЛВС.pptx
+++ b/Презентация_ЛВС.pptx
@@ -18,9 +18,10 @@
     <p:sldId id="266" r:id="rId12"/>
     <p:sldId id="267" r:id="rId13"/>
     <p:sldId id="268" r:id="rId14"/>
+    <p:sldId id="269" r:id="rId15"/>
   </p:sldIdLst>
   <p:notesMasterIdLst>
-    <p:notesMasterId r:id="rId15"/>
+    <p:notesMasterId r:id="rId16"/>
   </p:notesMasterIdLst>
   <p:sldSz cx="9144000" cy="5143500"/>
   <p:notesSz cx="5143500" cy="9144000"/>
@@ -1299,6 +1300,94 @@
             <a:fld id="{F7021451-1387-4CA6-816F-3879F97B5CBC}" type="slidenum">
               <a:rPr lang="en-US"/>
               <a:t>13</a:t>
+            </a:fld>
+            <a:endParaRPr lang="en-US"/>
+          </a:p>
+        </p:txBody>
+      </p:sp>
+    </p:spTree>
+    <p:extLst>
+      <p:ext uri="{BB962C8B-B14F-4D97-AF65-F5344CB8AC3E}">
+        <p14:creationId xmlns:p14="http://schemas.microsoft.com/office/powerpoint/2010/main" val="1024086991"/>
+      </p:ext>
+    </p:extLst>
+  </p:cSld>
+  <p:clrMapOvr>
+    <a:masterClrMapping/>
+  </p:clrMapOvr>
+</p:notes>
+</file>
+
+<file path=ppt/notesSlides/notesSlide14.xml><?xml version="1.0" encoding="utf-8"?>
+<p:notes xmlns:a="http://schemas.openxmlformats.org/drawingml/2006/main" xmlns:r="http://schemas.openxmlformats.org/officeDocument/2006/relationships" xmlns:p="http://schemas.openxmlformats.org/presentationml/2006/main">
+  <p:cSld>
+    <p:spTree>
+      <p:nvGrpSpPr>
+        <p:cNvPr id="1" name=""/>
+        <p:cNvGrpSpPr/>
+        <p:nvPr/>
+      </p:nvGrpSpPr>
+      <p:grpSpPr>
+        <a:xfrm>
+          <a:off x="0" y="0"/>
+          <a:ext cx="0" cy="0"/>
+          <a:chOff x="0" y="0"/>
+          <a:chExt cx="0" cy="0"/>
+        </a:xfrm>
+      </p:grpSpPr>
+      <p:sp>
+        <p:nvSpPr>
+          <p:cNvPr id="2" name="Slide Image Placeholder 1"/>
+          <p:cNvSpPr>
+            <a:spLocks noGrp="1" noRot="1" noChangeAspect="1"/>
+          </p:cNvSpPr>
+          <p:nvPr>
+            <p:ph type="sldImg"/>
+          </p:nvPr>
+        </p:nvSpPr>
+        <p:spPr/>
+      </p:sp>
+      <p:sp>
+        <p:nvSpPr>
+          <p:cNvPr id="3" name="Notes Placeholder 2"/>
+          <p:cNvSpPr>
+            <a:spLocks noGrp="1"/>
+          </p:cNvSpPr>
+          <p:nvPr>
+            <p:ph type="body" idx="1"/>
+          </p:nvPr>
+        </p:nvSpPr>
+        <p:spPr/>
+        <p:txBody>
+          <a:bodyPr/>
+          <a:lstStyle/>
+          <a:p>
+            <a:r>
+              <a:rPr lang="en-US" dirty="0"/>
+              <a:t/>
+            </a:r>
+            <a:endParaRPr lang="en-US" dirty="0"/>
+          </a:p>
+        </p:txBody>
+      </p:sp>
+      <p:sp>
+        <p:nvSpPr>
+          <p:cNvPr id="4" name="Slide Number Placeholder 3"/>
+          <p:cNvSpPr>
+            <a:spLocks noGrp="1"/>
+          </p:cNvSpPr>
+          <p:nvPr>
+            <p:ph type="sldNum" sz="quarter" idx="10"/>
+          </p:nvPr>
+        </p:nvSpPr>
+        <p:spPr/>
+        <p:txBody>
+          <a:bodyPr/>
+          <a:lstStyle/>
+          <a:p>
+            <a:fld id="{F7021451-1387-4CA6-816F-3879F97B5CBC}" type="slidenum">
+              <a:rPr lang="en-US"/>
+              <a:t>14</a:t>
             </a:fld>
             <a:endParaRPr lang="en-US"/>
           </a:p>
@@ -2841,3196 +2930,1611 @@
           </a:p>
         </p:txBody>
       </p:sp>
-      <p:graphicFrame>
-        <p:nvGraphicFramePr>
-          <p:cNvPr id="11" name="Table 0"/>
-          <p:cNvGraphicFramePr>
-            <a:graphicFrameLocks noGrp="1"/>
-          </p:cNvGraphicFramePr>
-          <p:nvPr>
-            <p:extLst>
-              <p:ext uri="{D42A27DB-BD31-4B8C-83A1-F6EECF244321}">
-                <p14:modId xmlns:p14="http://schemas.microsoft.com/office/powerpoint/2010/main" val="1579011935"/>
-              </p:ext>
-            </p:extLst>
-          </p:nvPr>
-        </p:nvGraphicFramePr>
-        <p:xfrm>
-          <a:off x="457200" y="1188720"/>
-          <a:ext cx="8229600" cy="914400"/>
-        </p:xfrm>
-        <a:graphic>
-          <a:graphicData uri="http://schemas.openxmlformats.org/drawingml/2006/table">
-            <a:tbl>
-              <a:tblPr/>
-              <a:tblGrid>
-                <a:gridCol w="4846320"/>
-                <a:gridCol w="822960"/>
-                <a:gridCol w="1188720"/>
-                <a:gridCol w="1371600"/>
-              </a:tblGrid>
-              <a:tr h="283464">
-                <a:tc>
-                  <a:txBody>
-                    <a:bodyPr/>
-                    <a:lstStyle/>
-                    <a:p>
-                      <a:pPr algn="l" indent="0" marL="0">
-                        <a:buNone/>
-                      </a:pPr>
-                      <a:r>
-                        <a:rPr lang="en-US" sz="1100" b="1" dirty="0">
-                          <a:solidFill>
-                            <a:srgbClr val="FFFFFF"/>
-                          </a:solidFill>
-                          <a:latin typeface="Calibri" pitchFamily="34" charset="0"/>
-                          <a:ea typeface="Calibri" pitchFamily="34" charset="-122"/>
-                          <a:cs typeface="Calibri" pitchFamily="34" charset="-120"/>
-                        </a:rPr>
-                        <a:t>Наименование</a:t>
-                      </a:r>
-                      <a:endParaRPr lang="en-US" sz="1100" dirty="0">
-                        <a:latin typeface="Calibri" charset="0"/>
-                        <a:ea typeface="Calibri" charset="0"/>
-                        <a:cs typeface="Calibri" charset="0"/>
-                      </a:endParaRPr>
-                    </a:p>
-                  </a:txBody>
-                  <a:tcPr marL="91440" marR="91440" marT="45720" marB="45720" anchor="ctr">
-                    <a:lnL w="6350" cap="flat" cmpd="sng" algn="ctr">
-                      <a:solidFill>
-                        <a:srgbClr val="C9D3E0"/>
-                      </a:solidFill>
-                      <a:prstDash val="solid"/>
-                      <a:round/>
-                      <a:headEnd type="none" w="med" len="med"/>
-                      <a:tailEnd type="none" w="med" len="med"/>
-                    </a:lnL>
-                    <a:lnR w="6350" cap="flat" cmpd="sng" algn="ctr">
-                      <a:solidFill>
-                        <a:srgbClr val="C9D3E0"/>
-                      </a:solidFill>
-                      <a:prstDash val="solid"/>
-                      <a:round/>
-                      <a:headEnd type="none" w="med" len="med"/>
-                      <a:tailEnd type="none" w="med" len="med"/>
-                    </a:lnR>
-                    <a:lnT w="6350" cap="flat" cmpd="sng" algn="ctr">
-                      <a:solidFill>
-                        <a:srgbClr val="C9D3E0"/>
-                      </a:solidFill>
-                      <a:prstDash val="solid"/>
-                      <a:round/>
-                      <a:headEnd type="none" w="med" len="med"/>
-                      <a:tailEnd type="none" w="med" len="med"/>
-                    </a:lnT>
-                    <a:lnB w="6350" cap="flat" cmpd="sng" algn="ctr">
-                      <a:solidFill>
-                        <a:srgbClr val="C9D3E0"/>
-                      </a:solidFill>
-                      <a:prstDash val="solid"/>
-                      <a:round/>
-                      <a:headEnd type="none" w="med" len="med"/>
-                      <a:tailEnd type="none" w="med" len="med"/>
-                    </a:lnB>
-                    <a:solidFill>
-                      <a:srgbClr val="22B573"/>
-                    </a:solidFill>
-                  </a:tcPr>
-                </a:tc>
-                <a:tc>
-                  <a:txBody>
-                    <a:bodyPr/>
-                    <a:lstStyle/>
-                    <a:p>
-                      <a:pPr algn="r" indent="0" marL="0">
-                        <a:buNone/>
-                      </a:pPr>
-                      <a:r>
-                        <a:rPr lang="en-US" sz="1100" b="1" dirty="0">
-                          <a:solidFill>
-                            <a:srgbClr val="FFFFFF"/>
-                          </a:solidFill>
-                          <a:latin typeface="Calibri" pitchFamily="34" charset="0"/>
-                          <a:ea typeface="Calibri" pitchFamily="34" charset="-122"/>
-                          <a:cs typeface="Calibri" pitchFamily="34" charset="-120"/>
-                        </a:rPr>
-                        <a:t>Кол-во</a:t>
-                      </a:r>
-                      <a:endParaRPr lang="en-US" sz="1100" dirty="0">
-                        <a:latin typeface="Calibri" charset="0"/>
-                        <a:ea typeface="Calibri" charset="0"/>
-                        <a:cs typeface="Calibri" charset="0"/>
-                      </a:endParaRPr>
-                    </a:p>
-                  </a:txBody>
-                  <a:tcPr marL="91440" marR="91440" marT="45720" marB="45720" anchor="ctr">
-                    <a:lnL w="6350" cap="flat" cmpd="sng" algn="ctr">
-                      <a:solidFill>
-                        <a:srgbClr val="C9D3E0"/>
-                      </a:solidFill>
-                      <a:prstDash val="solid"/>
-                      <a:round/>
-                      <a:headEnd type="none" w="med" len="med"/>
-                      <a:tailEnd type="none" w="med" len="med"/>
-                    </a:lnL>
-                    <a:lnR w="6350" cap="flat" cmpd="sng" algn="ctr">
-                      <a:solidFill>
-                        <a:srgbClr val="C9D3E0"/>
-                      </a:solidFill>
-                      <a:prstDash val="solid"/>
-                      <a:round/>
-                      <a:headEnd type="none" w="med" len="med"/>
-                      <a:tailEnd type="none" w="med" len="med"/>
-                    </a:lnR>
-                    <a:lnT w="6350" cap="flat" cmpd="sng" algn="ctr">
-                      <a:solidFill>
-                        <a:srgbClr val="C9D3E0"/>
-                      </a:solidFill>
-                      <a:prstDash val="solid"/>
-                      <a:round/>
-                      <a:headEnd type="none" w="med" len="med"/>
-                      <a:tailEnd type="none" w="med" len="med"/>
-                    </a:lnT>
-                    <a:lnB w="6350" cap="flat" cmpd="sng" algn="ctr">
-                      <a:solidFill>
-                        <a:srgbClr val="C9D3E0"/>
-                      </a:solidFill>
-                      <a:prstDash val="solid"/>
-                      <a:round/>
-                      <a:headEnd type="none" w="med" len="med"/>
-                      <a:tailEnd type="none" w="med" len="med"/>
-                    </a:lnB>
-                    <a:solidFill>
-                      <a:srgbClr val="22B573"/>
-                    </a:solidFill>
-                  </a:tcPr>
-                </a:tc>
-                <a:tc>
-                  <a:txBody>
-                    <a:bodyPr/>
-                    <a:lstStyle/>
-                    <a:p>
-                      <a:pPr algn="r" indent="0" marL="0">
-                        <a:buNone/>
-                      </a:pPr>
-                      <a:r>
-                        <a:rPr lang="en-US" sz="1100" b="1" dirty="0">
-                          <a:solidFill>
-                            <a:srgbClr val="FFFFFF"/>
-                          </a:solidFill>
-                          <a:latin typeface="Calibri" pitchFamily="34" charset="0"/>
-                          <a:ea typeface="Calibri" pitchFamily="34" charset="-122"/>
-                          <a:cs typeface="Calibri" pitchFamily="34" charset="-120"/>
-                        </a:rPr>
-                        <a:t>Цена</a:t>
-                      </a:r>
-                      <a:endParaRPr lang="en-US" sz="1100" dirty="0">
-                        <a:latin typeface="Calibri" charset="0"/>
-                        <a:ea typeface="Calibri" charset="0"/>
-                        <a:cs typeface="Calibri" charset="0"/>
-                      </a:endParaRPr>
-                    </a:p>
-                  </a:txBody>
-                  <a:tcPr marL="91440" marR="91440" marT="45720" marB="45720" anchor="ctr">
-                    <a:lnL w="6350" cap="flat" cmpd="sng" algn="ctr">
-                      <a:solidFill>
-                        <a:srgbClr val="C9D3E0"/>
-                      </a:solidFill>
-                      <a:prstDash val="solid"/>
-                      <a:round/>
-                      <a:headEnd type="none" w="med" len="med"/>
-                      <a:tailEnd type="none" w="med" len="med"/>
-                    </a:lnL>
-                    <a:lnR w="6350" cap="flat" cmpd="sng" algn="ctr">
-                      <a:solidFill>
-                        <a:srgbClr val="C9D3E0"/>
-                      </a:solidFill>
-                      <a:prstDash val="solid"/>
-                      <a:round/>
-                      <a:headEnd type="none" w="med" len="med"/>
-                      <a:tailEnd type="none" w="med" len="med"/>
-                    </a:lnR>
-                    <a:lnT w="6350" cap="flat" cmpd="sng" algn="ctr">
-                      <a:solidFill>
-                        <a:srgbClr val="C9D3E0"/>
-                      </a:solidFill>
-                      <a:prstDash val="solid"/>
-                      <a:round/>
-                      <a:headEnd type="none" w="med" len="med"/>
-                      <a:tailEnd type="none" w="med" len="med"/>
-                    </a:lnT>
-                    <a:lnB w="6350" cap="flat" cmpd="sng" algn="ctr">
-                      <a:solidFill>
-                        <a:srgbClr val="C9D3E0"/>
-                      </a:solidFill>
-                      <a:prstDash val="solid"/>
-                      <a:round/>
-                      <a:headEnd type="none" w="med" len="med"/>
-                      <a:tailEnd type="none" w="med" len="med"/>
-                    </a:lnB>
-                    <a:solidFill>
-                      <a:srgbClr val="22B573"/>
-                    </a:solidFill>
-                  </a:tcPr>
-                </a:tc>
-                <a:tc>
-                  <a:txBody>
-                    <a:bodyPr/>
-                    <a:lstStyle/>
-                    <a:p>
-                      <a:pPr algn="r" indent="0" marL="0">
-                        <a:buNone/>
-                      </a:pPr>
-                      <a:r>
-                        <a:rPr lang="en-US" sz="1100" b="1" dirty="0">
-                          <a:solidFill>
-                            <a:srgbClr val="FFFFFF"/>
-                          </a:solidFill>
-                          <a:latin typeface="Calibri" pitchFamily="34" charset="0"/>
-                          <a:ea typeface="Calibri" pitchFamily="34" charset="-122"/>
-                          <a:cs typeface="Calibri" pitchFamily="34" charset="-120"/>
-                        </a:rPr>
-                        <a:t>Сумма</a:t>
-                      </a:r>
-                      <a:endParaRPr lang="en-US" sz="1100" dirty="0">
-                        <a:latin typeface="Calibri" charset="0"/>
-                        <a:ea typeface="Calibri" charset="0"/>
-                        <a:cs typeface="Calibri" charset="0"/>
-                      </a:endParaRPr>
-                    </a:p>
-                  </a:txBody>
-                  <a:tcPr marL="91440" marR="91440" marT="45720" marB="45720" anchor="ctr">
-                    <a:lnL w="6350" cap="flat" cmpd="sng" algn="ctr">
-                      <a:solidFill>
-                        <a:srgbClr val="C9D3E0"/>
-                      </a:solidFill>
-                      <a:prstDash val="solid"/>
-                      <a:round/>
-                      <a:headEnd type="none" w="med" len="med"/>
-                      <a:tailEnd type="none" w="med" len="med"/>
-                    </a:lnL>
-                    <a:lnR w="6350" cap="flat" cmpd="sng" algn="ctr">
-                      <a:solidFill>
-                        <a:srgbClr val="C9D3E0"/>
-                      </a:solidFill>
-                      <a:prstDash val="solid"/>
-                      <a:round/>
-                      <a:headEnd type="none" w="med" len="med"/>
-                      <a:tailEnd type="none" w="med" len="med"/>
-                    </a:lnR>
-                    <a:lnT w="6350" cap="flat" cmpd="sng" algn="ctr">
-                      <a:solidFill>
-                        <a:srgbClr val="C9D3E0"/>
-                      </a:solidFill>
-                      <a:prstDash val="solid"/>
-                      <a:round/>
-                      <a:headEnd type="none" w="med" len="med"/>
-                      <a:tailEnd type="none" w="med" len="med"/>
-                    </a:lnT>
-                    <a:lnB w="6350" cap="flat" cmpd="sng" algn="ctr">
-                      <a:solidFill>
-                        <a:srgbClr val="C9D3E0"/>
-                      </a:solidFill>
-                      <a:prstDash val="solid"/>
-                      <a:round/>
-                      <a:headEnd type="none" w="med" len="med"/>
-                      <a:tailEnd type="none" w="med" len="med"/>
-                    </a:lnB>
-                    <a:solidFill>
-                      <a:srgbClr val="22B573"/>
-                    </a:solidFill>
-                  </a:tcPr>
-                </a:tc>
-              </a:tr>
-              <a:tr h="283464">
-                <a:tc>
-                  <a:txBody>
-                    <a:bodyPr/>
-                    <a:lstStyle/>
-                    <a:p>
-                      <a:pPr indent="0" marL="0">
-                        <a:buNone/>
-                      </a:pPr>
-                      <a:r>
-                        <a:rPr lang="en-US" sz="1100" dirty="0">
-                          <a:solidFill>
-                            <a:srgbClr val="1B2430"/>
-                          </a:solidFill>
-                          <a:latin typeface="Calibri" pitchFamily="34" charset="0"/>
-                          <a:ea typeface="Calibri" pitchFamily="34" charset="-122"/>
-                          <a:cs typeface="Calibri" pitchFamily="34" charset="-120"/>
-                        </a:rPr>
-                        <a:t>Кабель витая пара UTP Cat.5e, бухта 305 м</a:t>
-                      </a:r>
-                      <a:endParaRPr lang="en-US" sz="1100" dirty="0">
-                        <a:latin typeface="Calibri" charset="0"/>
-                        <a:ea typeface="Calibri" charset="0"/>
-                        <a:cs typeface="Calibri" charset="0"/>
-                      </a:endParaRPr>
-                    </a:p>
-                  </a:txBody>
-                  <a:tcPr marL="91440" marR="91440" marT="45720" marB="45720" anchor="ctr">
-                    <a:lnL w="6350" cap="flat" cmpd="sng" algn="ctr">
-                      <a:solidFill>
-                        <a:srgbClr val="C9D3E0"/>
-                      </a:solidFill>
-                      <a:prstDash val="solid"/>
-                      <a:round/>
-                      <a:headEnd type="none" w="med" len="med"/>
-                      <a:tailEnd type="none" w="med" len="med"/>
-                    </a:lnL>
-                    <a:lnR w="6350" cap="flat" cmpd="sng" algn="ctr">
-                      <a:solidFill>
-                        <a:srgbClr val="C9D3E0"/>
-                      </a:solidFill>
-                      <a:prstDash val="solid"/>
-                      <a:round/>
-                      <a:headEnd type="none" w="med" len="med"/>
-                      <a:tailEnd type="none" w="med" len="med"/>
-                    </a:lnR>
-                    <a:lnT w="6350" cap="flat" cmpd="sng" algn="ctr">
-                      <a:solidFill>
-                        <a:srgbClr val="C9D3E0"/>
-                      </a:solidFill>
-                      <a:prstDash val="solid"/>
-                      <a:round/>
-                      <a:headEnd type="none" w="med" len="med"/>
-                      <a:tailEnd type="none" w="med" len="med"/>
-                    </a:lnT>
-                    <a:lnB w="6350" cap="flat" cmpd="sng" algn="ctr">
-                      <a:solidFill>
-                        <a:srgbClr val="C9D3E0"/>
-                      </a:solidFill>
-                      <a:prstDash val="solid"/>
-                      <a:round/>
-                      <a:headEnd type="none" w="med" len="med"/>
-                      <a:tailEnd type="none" w="med" len="med"/>
-                    </a:lnB>
-                    <a:solidFill>
-                      <a:srgbClr val="F4F7FB"/>
-                    </a:solidFill>
-                  </a:tcPr>
-                </a:tc>
-                <a:tc>
-                  <a:txBody>
-                    <a:bodyPr/>
-                    <a:lstStyle/>
-                    <a:p>
-                      <a:pPr algn="r" indent="0" marL="0">
-                        <a:buNone/>
-                      </a:pPr>
-                      <a:r>
-                        <a:rPr lang="en-US" sz="1100" dirty="0">
-                          <a:solidFill>
-                            <a:srgbClr val="1B2430"/>
-                          </a:solidFill>
-                          <a:latin typeface="Calibri" pitchFamily="34" charset="0"/>
-                          <a:ea typeface="Calibri" pitchFamily="34" charset="-122"/>
-                          <a:cs typeface="Calibri" pitchFamily="34" charset="-120"/>
-                        </a:rPr>
-                        <a:t>2</a:t>
-                      </a:r>
-                      <a:endParaRPr lang="en-US" sz="1100" dirty="0">
-                        <a:latin typeface="Calibri" charset="0"/>
-                        <a:ea typeface="Calibri" charset="0"/>
-                        <a:cs typeface="Calibri" charset="0"/>
-                      </a:endParaRPr>
-                    </a:p>
-                  </a:txBody>
-                  <a:tcPr marL="91440" marR="91440" marT="45720" marB="45720" anchor="ctr">
-                    <a:lnL w="6350" cap="flat" cmpd="sng" algn="ctr">
-                      <a:solidFill>
-                        <a:srgbClr val="C9D3E0"/>
-                      </a:solidFill>
-                      <a:prstDash val="solid"/>
-                      <a:round/>
-                      <a:headEnd type="none" w="med" len="med"/>
-                      <a:tailEnd type="none" w="med" len="med"/>
-                    </a:lnL>
-                    <a:lnR w="6350" cap="flat" cmpd="sng" algn="ctr">
-                      <a:solidFill>
-                        <a:srgbClr val="C9D3E0"/>
-                      </a:solidFill>
-                      <a:prstDash val="solid"/>
-                      <a:round/>
-                      <a:headEnd type="none" w="med" len="med"/>
-                      <a:tailEnd type="none" w="med" len="med"/>
-                    </a:lnR>
-                    <a:lnT w="6350" cap="flat" cmpd="sng" algn="ctr">
-                      <a:solidFill>
-                        <a:srgbClr val="C9D3E0"/>
-                      </a:solidFill>
-                      <a:prstDash val="solid"/>
-                      <a:round/>
-                      <a:headEnd type="none" w="med" len="med"/>
-                      <a:tailEnd type="none" w="med" len="med"/>
-                    </a:lnT>
-                    <a:lnB w="6350" cap="flat" cmpd="sng" algn="ctr">
-                      <a:solidFill>
-                        <a:srgbClr val="C9D3E0"/>
-                      </a:solidFill>
-                      <a:prstDash val="solid"/>
-                      <a:round/>
-                      <a:headEnd type="none" w="med" len="med"/>
-                      <a:tailEnd type="none" w="med" len="med"/>
-                    </a:lnB>
-                    <a:solidFill>
-                      <a:srgbClr val="F4F7FB"/>
-                    </a:solidFill>
-                  </a:tcPr>
-                </a:tc>
-                <a:tc>
-                  <a:txBody>
-                    <a:bodyPr/>
-                    <a:lstStyle/>
-                    <a:p>
-                      <a:pPr algn="r" indent="0" marL="0">
-                        <a:buNone/>
-                      </a:pPr>
-                      <a:r>
-                        <a:rPr lang="en-US" sz="1100" dirty="0">
-                          <a:solidFill>
-                            <a:srgbClr val="1B2430"/>
-                          </a:solidFill>
-                          <a:latin typeface="Calibri" pitchFamily="34" charset="0"/>
-                          <a:ea typeface="Calibri" pitchFamily="34" charset="-122"/>
-                          <a:cs typeface="Calibri" pitchFamily="34" charset="-120"/>
-                        </a:rPr>
-                        <a:t>7 500 ₽</a:t>
-                      </a:r>
-                      <a:endParaRPr lang="en-US" sz="1100" dirty="0">
-                        <a:latin typeface="Calibri" charset="0"/>
-                        <a:ea typeface="Calibri" charset="0"/>
-                        <a:cs typeface="Calibri" charset="0"/>
-                      </a:endParaRPr>
-                    </a:p>
-                  </a:txBody>
-                  <a:tcPr marL="91440" marR="91440" marT="45720" marB="45720" anchor="ctr">
-                    <a:lnL w="6350" cap="flat" cmpd="sng" algn="ctr">
-                      <a:solidFill>
-                        <a:srgbClr val="C9D3E0"/>
-                      </a:solidFill>
-                      <a:prstDash val="solid"/>
-                      <a:round/>
-                      <a:headEnd type="none" w="med" len="med"/>
-                      <a:tailEnd type="none" w="med" len="med"/>
-                    </a:lnL>
-                    <a:lnR w="6350" cap="flat" cmpd="sng" algn="ctr">
-                      <a:solidFill>
-                        <a:srgbClr val="C9D3E0"/>
-                      </a:solidFill>
-                      <a:prstDash val="solid"/>
-                      <a:round/>
-                      <a:headEnd type="none" w="med" len="med"/>
-                      <a:tailEnd type="none" w="med" len="med"/>
-                    </a:lnR>
-                    <a:lnT w="6350" cap="flat" cmpd="sng" algn="ctr">
-                      <a:solidFill>
-                        <a:srgbClr val="C9D3E0"/>
-                      </a:solidFill>
-                      <a:prstDash val="solid"/>
-                      <a:round/>
-                      <a:headEnd type="none" w="med" len="med"/>
-                      <a:tailEnd type="none" w="med" len="med"/>
-                    </a:lnT>
-                    <a:lnB w="6350" cap="flat" cmpd="sng" algn="ctr">
-                      <a:solidFill>
-                        <a:srgbClr val="C9D3E0"/>
-                      </a:solidFill>
-                      <a:prstDash val="solid"/>
-                      <a:round/>
-                      <a:headEnd type="none" w="med" len="med"/>
-                      <a:tailEnd type="none" w="med" len="med"/>
-                    </a:lnB>
-                    <a:solidFill>
-                      <a:srgbClr val="F4F7FB"/>
-                    </a:solidFill>
-                  </a:tcPr>
-                </a:tc>
-                <a:tc>
-                  <a:txBody>
-                    <a:bodyPr/>
-                    <a:lstStyle/>
-                    <a:p>
-                      <a:pPr algn="r" indent="0" marL="0">
-                        <a:buNone/>
-                      </a:pPr>
-                      <a:r>
-                        <a:rPr lang="en-US" sz="1100" b="1" dirty="0">
-                          <a:solidFill>
-                            <a:srgbClr val="1B2430"/>
-                          </a:solidFill>
-                          <a:latin typeface="Calibri" pitchFamily="34" charset="0"/>
-                          <a:ea typeface="Calibri" pitchFamily="34" charset="-122"/>
-                          <a:cs typeface="Calibri" pitchFamily="34" charset="-120"/>
-                        </a:rPr>
-                        <a:t>15 000 ₽</a:t>
-                      </a:r>
-                      <a:endParaRPr lang="en-US" sz="1100" dirty="0">
-                        <a:latin typeface="Calibri" charset="0"/>
-                        <a:ea typeface="Calibri" charset="0"/>
-                        <a:cs typeface="Calibri" charset="0"/>
-                      </a:endParaRPr>
-                    </a:p>
-                  </a:txBody>
-                  <a:tcPr marL="91440" marR="91440" marT="45720" marB="45720" anchor="ctr">
-                    <a:lnL w="6350" cap="flat" cmpd="sng" algn="ctr">
-                      <a:solidFill>
-                        <a:srgbClr val="C9D3E0"/>
-                      </a:solidFill>
-                      <a:prstDash val="solid"/>
-                      <a:round/>
-                      <a:headEnd type="none" w="med" len="med"/>
-                      <a:tailEnd type="none" w="med" len="med"/>
-                    </a:lnL>
-                    <a:lnR w="6350" cap="flat" cmpd="sng" algn="ctr">
-                      <a:solidFill>
-                        <a:srgbClr val="C9D3E0"/>
-                      </a:solidFill>
-                      <a:prstDash val="solid"/>
-                      <a:round/>
-                      <a:headEnd type="none" w="med" len="med"/>
-                      <a:tailEnd type="none" w="med" len="med"/>
-                    </a:lnR>
-                    <a:lnT w="6350" cap="flat" cmpd="sng" algn="ctr">
-                      <a:solidFill>
-                        <a:srgbClr val="C9D3E0"/>
-                      </a:solidFill>
-                      <a:prstDash val="solid"/>
-                      <a:round/>
-                      <a:headEnd type="none" w="med" len="med"/>
-                      <a:tailEnd type="none" w="med" len="med"/>
-                    </a:lnT>
-                    <a:lnB w="6350" cap="flat" cmpd="sng" algn="ctr">
-                      <a:solidFill>
-                        <a:srgbClr val="C9D3E0"/>
-                      </a:solidFill>
-                      <a:prstDash val="solid"/>
-                      <a:round/>
-                      <a:headEnd type="none" w="med" len="med"/>
-                      <a:tailEnd type="none" w="med" len="med"/>
-                    </a:lnB>
-                    <a:solidFill>
-                      <a:srgbClr val="F4F7FB"/>
-                    </a:solidFill>
-                  </a:tcPr>
-                </a:tc>
-              </a:tr>
-              <a:tr h="283464">
-                <a:tc>
-                  <a:txBody>
-                    <a:bodyPr/>
-                    <a:lstStyle/>
-                    <a:p>
-                      <a:pPr indent="0" marL="0">
-                        <a:buNone/>
-                      </a:pPr>
-                      <a:r>
-                        <a:rPr lang="en-US" sz="1100" dirty="0">
-                          <a:solidFill>
-                            <a:srgbClr val="1B2430"/>
-                          </a:solidFill>
-                          <a:latin typeface="Calibri" pitchFamily="34" charset="0"/>
-                          <a:ea typeface="Calibri" pitchFamily="34" charset="-122"/>
-                          <a:cs typeface="Calibri" pitchFamily="34" charset="-120"/>
-                        </a:rPr>
-                        <a:t>Коннекторы RJ-45 8P8C (уп. 100 шт.)</a:t>
-                      </a:r>
-                      <a:endParaRPr lang="en-US" sz="1100" dirty="0">
-                        <a:latin typeface="Calibri" charset="0"/>
-                        <a:ea typeface="Calibri" charset="0"/>
-                        <a:cs typeface="Calibri" charset="0"/>
-                      </a:endParaRPr>
-                    </a:p>
-                  </a:txBody>
-                  <a:tcPr marL="91440" marR="91440" marT="45720" marB="45720" anchor="ctr">
-                    <a:lnL w="6350" cap="flat" cmpd="sng" algn="ctr">
-                      <a:solidFill>
-                        <a:srgbClr val="C9D3E0"/>
-                      </a:solidFill>
-                      <a:prstDash val="solid"/>
-                      <a:round/>
-                      <a:headEnd type="none" w="med" len="med"/>
-                      <a:tailEnd type="none" w="med" len="med"/>
-                    </a:lnL>
-                    <a:lnR w="6350" cap="flat" cmpd="sng" algn="ctr">
-                      <a:solidFill>
-                        <a:srgbClr val="C9D3E0"/>
-                      </a:solidFill>
-                      <a:prstDash val="solid"/>
-                      <a:round/>
-                      <a:headEnd type="none" w="med" len="med"/>
-                      <a:tailEnd type="none" w="med" len="med"/>
-                    </a:lnR>
-                    <a:lnT w="6350" cap="flat" cmpd="sng" algn="ctr">
-                      <a:solidFill>
-                        <a:srgbClr val="C9D3E0"/>
-                      </a:solidFill>
-                      <a:prstDash val="solid"/>
-                      <a:round/>
-                      <a:headEnd type="none" w="med" len="med"/>
-                      <a:tailEnd type="none" w="med" len="med"/>
-                    </a:lnT>
-                    <a:lnB w="6350" cap="flat" cmpd="sng" algn="ctr">
-                      <a:solidFill>
-                        <a:srgbClr val="C9D3E0"/>
-                      </a:solidFill>
-                      <a:prstDash val="solid"/>
-                      <a:round/>
-                      <a:headEnd type="none" w="med" len="med"/>
-                      <a:tailEnd type="none" w="med" len="med"/>
-                    </a:lnB>
-                    <a:solidFill>
-                      <a:srgbClr val="FFFFFF"/>
-                    </a:solidFill>
-                  </a:tcPr>
-                </a:tc>
-                <a:tc>
-                  <a:txBody>
-                    <a:bodyPr/>
-                    <a:lstStyle/>
-                    <a:p>
-                      <a:pPr algn="r" indent="0" marL="0">
-                        <a:buNone/>
-                      </a:pPr>
-                      <a:r>
-                        <a:rPr lang="en-US" sz="1100" dirty="0">
-                          <a:solidFill>
-                            <a:srgbClr val="1B2430"/>
-                          </a:solidFill>
-                          <a:latin typeface="Calibri" pitchFamily="34" charset="0"/>
-                          <a:ea typeface="Calibri" pitchFamily="34" charset="-122"/>
-                          <a:cs typeface="Calibri" pitchFamily="34" charset="-120"/>
-                        </a:rPr>
-                        <a:t>2</a:t>
-                      </a:r>
-                      <a:endParaRPr lang="en-US" sz="1100" dirty="0">
-                        <a:latin typeface="Calibri" charset="0"/>
-                        <a:ea typeface="Calibri" charset="0"/>
-                        <a:cs typeface="Calibri" charset="0"/>
-                      </a:endParaRPr>
-                    </a:p>
-                  </a:txBody>
-                  <a:tcPr marL="91440" marR="91440" marT="45720" marB="45720" anchor="ctr">
-                    <a:lnL w="6350" cap="flat" cmpd="sng" algn="ctr">
-                      <a:solidFill>
-                        <a:srgbClr val="C9D3E0"/>
-                      </a:solidFill>
-                      <a:prstDash val="solid"/>
-                      <a:round/>
-                      <a:headEnd type="none" w="med" len="med"/>
-                      <a:tailEnd type="none" w="med" len="med"/>
-                    </a:lnL>
-                    <a:lnR w="6350" cap="flat" cmpd="sng" algn="ctr">
-                      <a:solidFill>
-                        <a:srgbClr val="C9D3E0"/>
-                      </a:solidFill>
-                      <a:prstDash val="solid"/>
-                      <a:round/>
-                      <a:headEnd type="none" w="med" len="med"/>
-                      <a:tailEnd type="none" w="med" len="med"/>
-                    </a:lnR>
-                    <a:lnT w="6350" cap="flat" cmpd="sng" algn="ctr">
-                      <a:solidFill>
-                        <a:srgbClr val="C9D3E0"/>
-                      </a:solidFill>
-                      <a:prstDash val="solid"/>
-                      <a:round/>
-                      <a:headEnd type="none" w="med" len="med"/>
-                      <a:tailEnd type="none" w="med" len="med"/>
-                    </a:lnT>
-                    <a:lnB w="6350" cap="flat" cmpd="sng" algn="ctr">
-                      <a:solidFill>
-                        <a:srgbClr val="C9D3E0"/>
-                      </a:solidFill>
-                      <a:prstDash val="solid"/>
-                      <a:round/>
-                      <a:headEnd type="none" w="med" len="med"/>
-                      <a:tailEnd type="none" w="med" len="med"/>
-                    </a:lnB>
-                    <a:solidFill>
-                      <a:srgbClr val="FFFFFF"/>
-                    </a:solidFill>
-                  </a:tcPr>
-                </a:tc>
-                <a:tc>
-                  <a:txBody>
-                    <a:bodyPr/>
-                    <a:lstStyle/>
-                    <a:p>
-                      <a:pPr algn="r" indent="0" marL="0">
-                        <a:buNone/>
-                      </a:pPr>
-                      <a:r>
-                        <a:rPr lang="en-US" sz="1100" dirty="0">
-                          <a:solidFill>
-                            <a:srgbClr val="1B2430"/>
-                          </a:solidFill>
-                          <a:latin typeface="Calibri" pitchFamily="34" charset="0"/>
-                          <a:ea typeface="Calibri" pitchFamily="34" charset="-122"/>
-                          <a:cs typeface="Calibri" pitchFamily="34" charset="-120"/>
-                        </a:rPr>
-                        <a:t>900 ₽</a:t>
-                      </a:r>
-                      <a:endParaRPr lang="en-US" sz="1100" dirty="0">
-                        <a:latin typeface="Calibri" charset="0"/>
-                        <a:ea typeface="Calibri" charset="0"/>
-                        <a:cs typeface="Calibri" charset="0"/>
-                      </a:endParaRPr>
-                    </a:p>
-                  </a:txBody>
-                  <a:tcPr marL="91440" marR="91440" marT="45720" marB="45720" anchor="ctr">
-                    <a:lnL w="6350" cap="flat" cmpd="sng" algn="ctr">
-                      <a:solidFill>
-                        <a:srgbClr val="C9D3E0"/>
-                      </a:solidFill>
-                      <a:prstDash val="solid"/>
-                      <a:round/>
-                      <a:headEnd type="none" w="med" len="med"/>
-                      <a:tailEnd type="none" w="med" len="med"/>
-                    </a:lnL>
-                    <a:lnR w="6350" cap="flat" cmpd="sng" algn="ctr">
-                      <a:solidFill>
-                        <a:srgbClr val="C9D3E0"/>
-                      </a:solidFill>
-                      <a:prstDash val="solid"/>
-                      <a:round/>
-                      <a:headEnd type="none" w="med" len="med"/>
-                      <a:tailEnd type="none" w="med" len="med"/>
-                    </a:lnR>
-                    <a:lnT w="6350" cap="flat" cmpd="sng" algn="ctr">
-                      <a:solidFill>
-                        <a:srgbClr val="C9D3E0"/>
-                      </a:solidFill>
-                      <a:prstDash val="solid"/>
-                      <a:round/>
-                      <a:headEnd type="none" w="med" len="med"/>
-                      <a:tailEnd type="none" w="med" len="med"/>
-                    </a:lnT>
-                    <a:lnB w="6350" cap="flat" cmpd="sng" algn="ctr">
-                      <a:solidFill>
-                        <a:srgbClr val="C9D3E0"/>
-                      </a:solidFill>
-                      <a:prstDash val="solid"/>
-                      <a:round/>
-                      <a:headEnd type="none" w="med" len="med"/>
-                      <a:tailEnd type="none" w="med" len="med"/>
-                    </a:lnB>
-                    <a:solidFill>
-                      <a:srgbClr val="FFFFFF"/>
-                    </a:solidFill>
-                  </a:tcPr>
-                </a:tc>
-                <a:tc>
-                  <a:txBody>
-                    <a:bodyPr/>
-                    <a:lstStyle/>
-                    <a:p>
-                      <a:pPr algn="r" indent="0" marL="0">
-                        <a:buNone/>
-                      </a:pPr>
-                      <a:r>
-                        <a:rPr lang="en-US" sz="1100" b="1" dirty="0">
-                          <a:solidFill>
-                            <a:srgbClr val="1B2430"/>
-                          </a:solidFill>
-                          <a:latin typeface="Calibri" pitchFamily="34" charset="0"/>
-                          <a:ea typeface="Calibri" pitchFamily="34" charset="-122"/>
-                          <a:cs typeface="Calibri" pitchFamily="34" charset="-120"/>
-                        </a:rPr>
-                        <a:t>1 800 ₽</a:t>
-                      </a:r>
-                      <a:endParaRPr lang="en-US" sz="1100" dirty="0">
-                        <a:latin typeface="Calibri" charset="0"/>
-                        <a:ea typeface="Calibri" charset="0"/>
-                        <a:cs typeface="Calibri" charset="0"/>
-                      </a:endParaRPr>
-                    </a:p>
-                  </a:txBody>
-                  <a:tcPr marL="91440" marR="91440" marT="45720" marB="45720" anchor="ctr">
-                    <a:lnL w="6350" cap="flat" cmpd="sng" algn="ctr">
-                      <a:solidFill>
-                        <a:srgbClr val="C9D3E0"/>
-                      </a:solidFill>
-                      <a:prstDash val="solid"/>
-                      <a:round/>
-                      <a:headEnd type="none" w="med" len="med"/>
-                      <a:tailEnd type="none" w="med" len="med"/>
-                    </a:lnL>
-                    <a:lnR w="6350" cap="flat" cmpd="sng" algn="ctr">
-                      <a:solidFill>
-                        <a:srgbClr val="C9D3E0"/>
-                      </a:solidFill>
-                      <a:prstDash val="solid"/>
-                      <a:round/>
-                      <a:headEnd type="none" w="med" len="med"/>
-                      <a:tailEnd type="none" w="med" len="med"/>
-                    </a:lnR>
-                    <a:lnT w="6350" cap="flat" cmpd="sng" algn="ctr">
-                      <a:solidFill>
-                        <a:srgbClr val="C9D3E0"/>
-                      </a:solidFill>
-                      <a:prstDash val="solid"/>
-                      <a:round/>
-                      <a:headEnd type="none" w="med" len="med"/>
-                      <a:tailEnd type="none" w="med" len="med"/>
-                    </a:lnT>
-                    <a:lnB w="6350" cap="flat" cmpd="sng" algn="ctr">
-                      <a:solidFill>
-                        <a:srgbClr val="C9D3E0"/>
-                      </a:solidFill>
-                      <a:prstDash val="solid"/>
-                      <a:round/>
-                      <a:headEnd type="none" w="med" len="med"/>
-                      <a:tailEnd type="none" w="med" len="med"/>
-                    </a:lnB>
-                    <a:solidFill>
-                      <a:srgbClr val="FFFFFF"/>
-                    </a:solidFill>
-                  </a:tcPr>
-                </a:tc>
-              </a:tr>
-              <a:tr h="283464">
-                <a:tc>
-                  <a:txBody>
-                    <a:bodyPr/>
-                    <a:lstStyle/>
-                    <a:p>
-                      <a:pPr indent="0" marL="0">
-                        <a:buNone/>
-                      </a:pPr>
-                      <a:r>
-                        <a:rPr lang="en-US" sz="1100" dirty="0">
-                          <a:solidFill>
-                            <a:srgbClr val="1B2430"/>
-                          </a:solidFill>
-                          <a:latin typeface="Calibri" pitchFamily="34" charset="0"/>
-                          <a:ea typeface="Calibri" pitchFamily="34" charset="-122"/>
-                          <a:cs typeface="Calibri" pitchFamily="34" charset="-120"/>
-                        </a:rPr>
-                        <a:t>Изолирующие колпачки (уп. 100 шт.)</a:t>
-                      </a:r>
-                      <a:endParaRPr lang="en-US" sz="1100" dirty="0">
-                        <a:latin typeface="Calibri" charset="0"/>
-                        <a:ea typeface="Calibri" charset="0"/>
-                        <a:cs typeface="Calibri" charset="0"/>
-                      </a:endParaRPr>
-                    </a:p>
-                  </a:txBody>
-                  <a:tcPr marL="91440" marR="91440" marT="45720" marB="45720" anchor="ctr">
-                    <a:lnL w="6350" cap="flat" cmpd="sng" algn="ctr">
-                      <a:solidFill>
-                        <a:srgbClr val="C9D3E0"/>
-                      </a:solidFill>
-                      <a:prstDash val="solid"/>
-                      <a:round/>
-                      <a:headEnd type="none" w="med" len="med"/>
-                      <a:tailEnd type="none" w="med" len="med"/>
-                    </a:lnL>
-                    <a:lnR w="6350" cap="flat" cmpd="sng" algn="ctr">
-                      <a:solidFill>
-                        <a:srgbClr val="C9D3E0"/>
-                      </a:solidFill>
-                      <a:prstDash val="solid"/>
-                      <a:round/>
-                      <a:headEnd type="none" w="med" len="med"/>
-                      <a:tailEnd type="none" w="med" len="med"/>
-                    </a:lnR>
-                    <a:lnT w="6350" cap="flat" cmpd="sng" algn="ctr">
-                      <a:solidFill>
-                        <a:srgbClr val="C9D3E0"/>
-                      </a:solidFill>
-                      <a:prstDash val="solid"/>
-                      <a:round/>
-                      <a:headEnd type="none" w="med" len="med"/>
-                      <a:tailEnd type="none" w="med" len="med"/>
-                    </a:lnT>
-                    <a:lnB w="6350" cap="flat" cmpd="sng" algn="ctr">
-                      <a:solidFill>
-                        <a:srgbClr val="C9D3E0"/>
-                      </a:solidFill>
-                      <a:prstDash val="solid"/>
-                      <a:round/>
-                      <a:headEnd type="none" w="med" len="med"/>
-                      <a:tailEnd type="none" w="med" len="med"/>
-                    </a:lnB>
-                    <a:solidFill>
-                      <a:srgbClr val="F4F7FB"/>
-                    </a:solidFill>
-                  </a:tcPr>
-                </a:tc>
-                <a:tc>
-                  <a:txBody>
-                    <a:bodyPr/>
-                    <a:lstStyle/>
-                    <a:p>
-                      <a:pPr algn="r" indent="0" marL="0">
-                        <a:buNone/>
-                      </a:pPr>
-                      <a:r>
-                        <a:rPr lang="en-US" sz="1100" dirty="0">
-                          <a:solidFill>
-                            <a:srgbClr val="1B2430"/>
-                          </a:solidFill>
-                          <a:latin typeface="Calibri" pitchFamily="34" charset="0"/>
-                          <a:ea typeface="Calibri" pitchFamily="34" charset="-122"/>
-                          <a:cs typeface="Calibri" pitchFamily="34" charset="-120"/>
-                        </a:rPr>
-                        <a:t>2</a:t>
-                      </a:r>
-                      <a:endParaRPr lang="en-US" sz="1100" dirty="0">
-                        <a:latin typeface="Calibri" charset="0"/>
-                        <a:ea typeface="Calibri" charset="0"/>
-                        <a:cs typeface="Calibri" charset="0"/>
-                      </a:endParaRPr>
-                    </a:p>
-                  </a:txBody>
-                  <a:tcPr marL="91440" marR="91440" marT="45720" marB="45720" anchor="ctr">
-                    <a:lnL w="6350" cap="flat" cmpd="sng" algn="ctr">
-                      <a:solidFill>
-                        <a:srgbClr val="C9D3E0"/>
-                      </a:solidFill>
-                      <a:prstDash val="solid"/>
-                      <a:round/>
-                      <a:headEnd type="none" w="med" len="med"/>
-                      <a:tailEnd type="none" w="med" len="med"/>
-                    </a:lnL>
-                    <a:lnR w="6350" cap="flat" cmpd="sng" algn="ctr">
-                      <a:solidFill>
-                        <a:srgbClr val="C9D3E0"/>
-                      </a:solidFill>
-                      <a:prstDash val="solid"/>
-                      <a:round/>
-                      <a:headEnd type="none" w="med" len="med"/>
-                      <a:tailEnd type="none" w="med" len="med"/>
-                    </a:lnR>
-                    <a:lnT w="6350" cap="flat" cmpd="sng" algn="ctr">
-                      <a:solidFill>
-                        <a:srgbClr val="C9D3E0"/>
-                      </a:solidFill>
-                      <a:prstDash val="solid"/>
-                      <a:round/>
-                      <a:headEnd type="none" w="med" len="med"/>
-                      <a:tailEnd type="none" w="med" len="med"/>
-                    </a:lnT>
-                    <a:lnB w="6350" cap="flat" cmpd="sng" algn="ctr">
-                      <a:solidFill>
-                        <a:srgbClr val="C9D3E0"/>
-                      </a:solidFill>
-                      <a:prstDash val="solid"/>
-                      <a:round/>
-                      <a:headEnd type="none" w="med" len="med"/>
-                      <a:tailEnd type="none" w="med" len="med"/>
-                    </a:lnB>
-                    <a:solidFill>
-                      <a:srgbClr val="F4F7FB"/>
-                    </a:solidFill>
-                  </a:tcPr>
-                </a:tc>
-                <a:tc>
-                  <a:txBody>
-                    <a:bodyPr/>
-                    <a:lstStyle/>
-                    <a:p>
-                      <a:pPr algn="r" indent="0" marL="0">
-                        <a:buNone/>
-                      </a:pPr>
-                      <a:r>
-                        <a:rPr lang="en-US" sz="1100" dirty="0">
-                          <a:solidFill>
-                            <a:srgbClr val="1B2430"/>
-                          </a:solidFill>
-                          <a:latin typeface="Calibri" pitchFamily="34" charset="0"/>
-                          <a:ea typeface="Calibri" pitchFamily="34" charset="-122"/>
-                          <a:cs typeface="Calibri" pitchFamily="34" charset="-120"/>
-                        </a:rPr>
-                        <a:t>350 ₽</a:t>
-                      </a:r>
-                      <a:endParaRPr lang="en-US" sz="1100" dirty="0">
-                        <a:latin typeface="Calibri" charset="0"/>
-                        <a:ea typeface="Calibri" charset="0"/>
-                        <a:cs typeface="Calibri" charset="0"/>
-                      </a:endParaRPr>
-                    </a:p>
-                  </a:txBody>
-                  <a:tcPr marL="91440" marR="91440" marT="45720" marB="45720" anchor="ctr">
-                    <a:lnL w="6350" cap="flat" cmpd="sng" algn="ctr">
-                      <a:solidFill>
-                        <a:srgbClr val="C9D3E0"/>
-                      </a:solidFill>
-                      <a:prstDash val="solid"/>
-                      <a:round/>
-                      <a:headEnd type="none" w="med" len="med"/>
-                      <a:tailEnd type="none" w="med" len="med"/>
-                    </a:lnL>
-                    <a:lnR w="6350" cap="flat" cmpd="sng" algn="ctr">
-                      <a:solidFill>
-                        <a:srgbClr val="C9D3E0"/>
-                      </a:solidFill>
-                      <a:prstDash val="solid"/>
-                      <a:round/>
-                      <a:headEnd type="none" w="med" len="med"/>
-                      <a:tailEnd type="none" w="med" len="med"/>
-                    </a:lnR>
-                    <a:lnT w="6350" cap="flat" cmpd="sng" algn="ctr">
-                      <a:solidFill>
-                        <a:srgbClr val="C9D3E0"/>
-                      </a:solidFill>
-                      <a:prstDash val="solid"/>
-                      <a:round/>
-                      <a:headEnd type="none" w="med" len="med"/>
-                      <a:tailEnd type="none" w="med" len="med"/>
-                    </a:lnT>
-                    <a:lnB w="6350" cap="flat" cmpd="sng" algn="ctr">
-                      <a:solidFill>
-                        <a:srgbClr val="C9D3E0"/>
-                      </a:solidFill>
-                      <a:prstDash val="solid"/>
-                      <a:round/>
-                      <a:headEnd type="none" w="med" len="med"/>
-                      <a:tailEnd type="none" w="med" len="med"/>
-                    </a:lnB>
-                    <a:solidFill>
-                      <a:srgbClr val="F4F7FB"/>
-                    </a:solidFill>
-                  </a:tcPr>
-                </a:tc>
-                <a:tc>
-                  <a:txBody>
-                    <a:bodyPr/>
-                    <a:lstStyle/>
-                    <a:p>
-                      <a:pPr algn="r" indent="0" marL="0">
-                        <a:buNone/>
-                      </a:pPr>
-                      <a:r>
-                        <a:rPr lang="en-US" sz="1100" b="1" dirty="0">
-                          <a:solidFill>
-                            <a:srgbClr val="1B2430"/>
-                          </a:solidFill>
-                          <a:latin typeface="Calibri" pitchFamily="34" charset="0"/>
-                          <a:ea typeface="Calibri" pitchFamily="34" charset="-122"/>
-                          <a:cs typeface="Calibri" pitchFamily="34" charset="-120"/>
-                        </a:rPr>
-                        <a:t>700 ₽</a:t>
-                      </a:r>
-                      <a:endParaRPr lang="en-US" sz="1100" dirty="0">
-                        <a:latin typeface="Calibri" charset="0"/>
-                        <a:ea typeface="Calibri" charset="0"/>
-                        <a:cs typeface="Calibri" charset="0"/>
-                      </a:endParaRPr>
-                    </a:p>
-                  </a:txBody>
-                  <a:tcPr marL="91440" marR="91440" marT="45720" marB="45720" anchor="ctr">
-                    <a:lnL w="6350" cap="flat" cmpd="sng" algn="ctr">
-                      <a:solidFill>
-                        <a:srgbClr val="C9D3E0"/>
-                      </a:solidFill>
-                      <a:prstDash val="solid"/>
-                      <a:round/>
-                      <a:headEnd type="none" w="med" len="med"/>
-                      <a:tailEnd type="none" w="med" len="med"/>
-                    </a:lnL>
-                    <a:lnR w="6350" cap="flat" cmpd="sng" algn="ctr">
-                      <a:solidFill>
-                        <a:srgbClr val="C9D3E0"/>
-                      </a:solidFill>
-                      <a:prstDash val="solid"/>
-                      <a:round/>
-                      <a:headEnd type="none" w="med" len="med"/>
-                      <a:tailEnd type="none" w="med" len="med"/>
-                    </a:lnR>
-                    <a:lnT w="6350" cap="flat" cmpd="sng" algn="ctr">
-                      <a:solidFill>
-                        <a:srgbClr val="C9D3E0"/>
-                      </a:solidFill>
-                      <a:prstDash val="solid"/>
-                      <a:round/>
-                      <a:headEnd type="none" w="med" len="med"/>
-                      <a:tailEnd type="none" w="med" len="med"/>
-                    </a:lnT>
-                    <a:lnB w="6350" cap="flat" cmpd="sng" algn="ctr">
-                      <a:solidFill>
-                        <a:srgbClr val="C9D3E0"/>
-                      </a:solidFill>
-                      <a:prstDash val="solid"/>
-                      <a:round/>
-                      <a:headEnd type="none" w="med" len="med"/>
-                      <a:tailEnd type="none" w="med" len="med"/>
-                    </a:lnB>
-                    <a:solidFill>
-                      <a:srgbClr val="F4F7FB"/>
-                    </a:solidFill>
-                  </a:tcPr>
-                </a:tc>
-              </a:tr>
-              <a:tr h="283464">
-                <a:tc>
-                  <a:txBody>
-                    <a:bodyPr/>
-                    <a:lstStyle/>
-                    <a:p>
-                      <a:pPr indent="0" marL="0">
-                        <a:buNone/>
-                      </a:pPr>
-                      <a:r>
-                        <a:rPr lang="en-US" sz="1100" dirty="0">
-                          <a:solidFill>
-                            <a:srgbClr val="1B2430"/>
-                          </a:solidFill>
-                          <a:latin typeface="Calibri" pitchFamily="34" charset="0"/>
-                          <a:ea typeface="Calibri" pitchFamily="34" charset="-122"/>
-                          <a:cs typeface="Calibri" pitchFamily="34" charset="-120"/>
-                        </a:rPr>
-                        <a:t>Патч-панель 24 порта Cat.5e</a:t>
-                      </a:r>
-                      <a:endParaRPr lang="en-US" sz="1100" dirty="0">
-                        <a:latin typeface="Calibri" charset="0"/>
-                        <a:ea typeface="Calibri" charset="0"/>
-                        <a:cs typeface="Calibri" charset="0"/>
-                      </a:endParaRPr>
-                    </a:p>
-                  </a:txBody>
-                  <a:tcPr marL="91440" marR="91440" marT="45720" marB="45720" anchor="ctr">
-                    <a:lnL w="6350" cap="flat" cmpd="sng" algn="ctr">
-                      <a:solidFill>
-                        <a:srgbClr val="C9D3E0"/>
-                      </a:solidFill>
-                      <a:prstDash val="solid"/>
-                      <a:round/>
-                      <a:headEnd type="none" w="med" len="med"/>
-                      <a:tailEnd type="none" w="med" len="med"/>
-                    </a:lnL>
-                    <a:lnR w="6350" cap="flat" cmpd="sng" algn="ctr">
-                      <a:solidFill>
-                        <a:srgbClr val="C9D3E0"/>
-                      </a:solidFill>
-                      <a:prstDash val="solid"/>
-                      <a:round/>
-                      <a:headEnd type="none" w="med" len="med"/>
-                      <a:tailEnd type="none" w="med" len="med"/>
-                    </a:lnR>
-                    <a:lnT w="6350" cap="flat" cmpd="sng" algn="ctr">
-                      <a:solidFill>
-                        <a:srgbClr val="C9D3E0"/>
-                      </a:solidFill>
-                      <a:prstDash val="solid"/>
-                      <a:round/>
-                      <a:headEnd type="none" w="med" len="med"/>
-                      <a:tailEnd type="none" w="med" len="med"/>
-                    </a:lnT>
-                    <a:lnB w="6350" cap="flat" cmpd="sng" algn="ctr">
-                      <a:solidFill>
-                        <a:srgbClr val="C9D3E0"/>
-                      </a:solidFill>
-                      <a:prstDash val="solid"/>
-                      <a:round/>
-                      <a:headEnd type="none" w="med" len="med"/>
-                      <a:tailEnd type="none" w="med" len="med"/>
-                    </a:lnB>
-                    <a:solidFill>
-                      <a:srgbClr val="FFFFFF"/>
-                    </a:solidFill>
-                  </a:tcPr>
-                </a:tc>
-                <a:tc>
-                  <a:txBody>
-                    <a:bodyPr/>
-                    <a:lstStyle/>
-                    <a:p>
-                      <a:pPr algn="r" indent="0" marL="0">
-                        <a:buNone/>
-                      </a:pPr>
-                      <a:r>
-                        <a:rPr lang="en-US" sz="1100" dirty="0">
-                          <a:solidFill>
-                            <a:srgbClr val="1B2430"/>
-                          </a:solidFill>
-                          <a:latin typeface="Calibri" pitchFamily="34" charset="0"/>
-                          <a:ea typeface="Calibri" pitchFamily="34" charset="-122"/>
-                          <a:cs typeface="Calibri" pitchFamily="34" charset="-120"/>
-                        </a:rPr>
-                        <a:t>1</a:t>
-                      </a:r>
-                      <a:endParaRPr lang="en-US" sz="1100" dirty="0">
-                        <a:latin typeface="Calibri" charset="0"/>
-                        <a:ea typeface="Calibri" charset="0"/>
-                        <a:cs typeface="Calibri" charset="0"/>
-                      </a:endParaRPr>
-                    </a:p>
-                  </a:txBody>
-                  <a:tcPr marL="91440" marR="91440" marT="45720" marB="45720" anchor="ctr">
-                    <a:lnL w="6350" cap="flat" cmpd="sng" algn="ctr">
-                      <a:solidFill>
-                        <a:srgbClr val="C9D3E0"/>
-                      </a:solidFill>
-                      <a:prstDash val="solid"/>
-                      <a:round/>
-                      <a:headEnd type="none" w="med" len="med"/>
-                      <a:tailEnd type="none" w="med" len="med"/>
-                    </a:lnL>
-                    <a:lnR w="6350" cap="flat" cmpd="sng" algn="ctr">
-                      <a:solidFill>
-                        <a:srgbClr val="C9D3E0"/>
-                      </a:solidFill>
-                      <a:prstDash val="solid"/>
-                      <a:round/>
-                      <a:headEnd type="none" w="med" len="med"/>
-                      <a:tailEnd type="none" w="med" len="med"/>
-                    </a:lnR>
-                    <a:lnT w="6350" cap="flat" cmpd="sng" algn="ctr">
-                      <a:solidFill>
-                        <a:srgbClr val="C9D3E0"/>
-                      </a:solidFill>
-                      <a:prstDash val="solid"/>
-                      <a:round/>
-                      <a:headEnd type="none" w="med" len="med"/>
-                      <a:tailEnd type="none" w="med" len="med"/>
-                    </a:lnT>
-                    <a:lnB w="6350" cap="flat" cmpd="sng" algn="ctr">
-                      <a:solidFill>
-                        <a:srgbClr val="C9D3E0"/>
-                      </a:solidFill>
-                      <a:prstDash val="solid"/>
-                      <a:round/>
-                      <a:headEnd type="none" w="med" len="med"/>
-                      <a:tailEnd type="none" w="med" len="med"/>
-                    </a:lnB>
-                    <a:solidFill>
-                      <a:srgbClr val="FFFFFF"/>
-                    </a:solidFill>
-                  </a:tcPr>
-                </a:tc>
-                <a:tc>
-                  <a:txBody>
-                    <a:bodyPr/>
-                    <a:lstStyle/>
-                    <a:p>
-                      <a:pPr algn="r" indent="0" marL="0">
-                        <a:buNone/>
-                      </a:pPr>
-                      <a:r>
-                        <a:rPr lang="en-US" sz="1100" dirty="0">
-                          <a:solidFill>
-                            <a:srgbClr val="1B2430"/>
-                          </a:solidFill>
-                          <a:latin typeface="Calibri" pitchFamily="34" charset="0"/>
-                          <a:ea typeface="Calibri" pitchFamily="34" charset="-122"/>
-                          <a:cs typeface="Calibri" pitchFamily="34" charset="-120"/>
-                        </a:rPr>
-                        <a:t>3 200 ₽</a:t>
-                      </a:r>
-                      <a:endParaRPr lang="en-US" sz="1100" dirty="0">
-                        <a:latin typeface="Calibri" charset="0"/>
-                        <a:ea typeface="Calibri" charset="0"/>
-                        <a:cs typeface="Calibri" charset="0"/>
-                      </a:endParaRPr>
-                    </a:p>
-                  </a:txBody>
-                  <a:tcPr marL="91440" marR="91440" marT="45720" marB="45720" anchor="ctr">
-                    <a:lnL w="6350" cap="flat" cmpd="sng" algn="ctr">
-                      <a:solidFill>
-                        <a:srgbClr val="C9D3E0"/>
-                      </a:solidFill>
-                      <a:prstDash val="solid"/>
-                      <a:round/>
-                      <a:headEnd type="none" w="med" len="med"/>
-                      <a:tailEnd type="none" w="med" len="med"/>
-                    </a:lnL>
-                    <a:lnR w="6350" cap="flat" cmpd="sng" algn="ctr">
-                      <a:solidFill>
-                        <a:srgbClr val="C9D3E0"/>
-                      </a:solidFill>
-                      <a:prstDash val="solid"/>
-                      <a:round/>
-                      <a:headEnd type="none" w="med" len="med"/>
-                      <a:tailEnd type="none" w="med" len="med"/>
-                    </a:lnR>
-                    <a:lnT w="6350" cap="flat" cmpd="sng" algn="ctr">
-                      <a:solidFill>
-                        <a:srgbClr val="C9D3E0"/>
-                      </a:solidFill>
-                      <a:prstDash val="solid"/>
-                      <a:round/>
-                      <a:headEnd type="none" w="med" len="med"/>
-                      <a:tailEnd type="none" w="med" len="med"/>
-                    </a:lnT>
-                    <a:lnB w="6350" cap="flat" cmpd="sng" algn="ctr">
-                      <a:solidFill>
-                        <a:srgbClr val="C9D3E0"/>
-                      </a:solidFill>
-                      <a:prstDash val="solid"/>
-                      <a:round/>
-                      <a:headEnd type="none" w="med" len="med"/>
-                      <a:tailEnd type="none" w="med" len="med"/>
-                    </a:lnB>
-                    <a:solidFill>
-                      <a:srgbClr val="FFFFFF"/>
-                    </a:solidFill>
-                  </a:tcPr>
-                </a:tc>
-                <a:tc>
-                  <a:txBody>
-                    <a:bodyPr/>
-                    <a:lstStyle/>
-                    <a:p>
-                      <a:pPr algn="r" indent="0" marL="0">
-                        <a:buNone/>
-                      </a:pPr>
-                      <a:r>
-                        <a:rPr lang="en-US" sz="1100" b="1" dirty="0">
-                          <a:solidFill>
-                            <a:srgbClr val="1B2430"/>
-                          </a:solidFill>
-                          <a:latin typeface="Calibri" pitchFamily="34" charset="0"/>
-                          <a:ea typeface="Calibri" pitchFamily="34" charset="-122"/>
-                          <a:cs typeface="Calibri" pitchFamily="34" charset="-120"/>
-                        </a:rPr>
-                        <a:t>3 200 ₽</a:t>
-                      </a:r>
-                      <a:endParaRPr lang="en-US" sz="1100" dirty="0">
-                        <a:latin typeface="Calibri" charset="0"/>
-                        <a:ea typeface="Calibri" charset="0"/>
-                        <a:cs typeface="Calibri" charset="0"/>
-                      </a:endParaRPr>
-                    </a:p>
-                  </a:txBody>
-                  <a:tcPr marL="91440" marR="91440" marT="45720" marB="45720" anchor="ctr">
-                    <a:lnL w="6350" cap="flat" cmpd="sng" algn="ctr">
-                      <a:solidFill>
-                        <a:srgbClr val="C9D3E0"/>
-                      </a:solidFill>
-                      <a:prstDash val="solid"/>
-                      <a:round/>
-                      <a:headEnd type="none" w="med" len="med"/>
-                      <a:tailEnd type="none" w="med" len="med"/>
-                    </a:lnL>
-                    <a:lnR w="6350" cap="flat" cmpd="sng" algn="ctr">
-                      <a:solidFill>
-                        <a:srgbClr val="C9D3E0"/>
-                      </a:solidFill>
-                      <a:prstDash val="solid"/>
-                      <a:round/>
-                      <a:headEnd type="none" w="med" len="med"/>
-                      <a:tailEnd type="none" w="med" len="med"/>
-                    </a:lnR>
-                    <a:lnT w="6350" cap="flat" cmpd="sng" algn="ctr">
-                      <a:solidFill>
-                        <a:srgbClr val="C9D3E0"/>
-                      </a:solidFill>
-                      <a:prstDash val="solid"/>
-                      <a:round/>
-                      <a:headEnd type="none" w="med" len="med"/>
-                      <a:tailEnd type="none" w="med" len="med"/>
-                    </a:lnT>
-                    <a:lnB w="6350" cap="flat" cmpd="sng" algn="ctr">
-                      <a:solidFill>
-                        <a:srgbClr val="C9D3E0"/>
-                      </a:solidFill>
-                      <a:prstDash val="solid"/>
-                      <a:round/>
-                      <a:headEnd type="none" w="med" len="med"/>
-                      <a:tailEnd type="none" w="med" len="med"/>
-                    </a:lnB>
-                    <a:solidFill>
-                      <a:srgbClr val="FFFFFF"/>
-                    </a:solidFill>
-                  </a:tcPr>
-                </a:tc>
-              </a:tr>
-              <a:tr h="283464">
-                <a:tc>
-                  <a:txBody>
-                    <a:bodyPr/>
-                    <a:lstStyle/>
-                    <a:p>
-                      <a:pPr indent="0" marL="0">
-                        <a:buNone/>
-                      </a:pPr>
-                      <a:r>
-                        <a:rPr lang="en-US" sz="1100" dirty="0">
-                          <a:solidFill>
-                            <a:srgbClr val="1B2430"/>
-                          </a:solidFill>
-                          <a:latin typeface="Calibri" pitchFamily="34" charset="0"/>
-                          <a:ea typeface="Calibri" pitchFamily="34" charset="-122"/>
-                          <a:cs typeface="Calibri" pitchFamily="34" charset="-120"/>
-                        </a:rPr>
-                        <a:t>Розетка RJ-45 настенная</a:t>
-                      </a:r>
-                      <a:endParaRPr lang="en-US" sz="1100" dirty="0">
-                        <a:latin typeface="Calibri" charset="0"/>
-                        <a:ea typeface="Calibri" charset="0"/>
-                        <a:cs typeface="Calibri" charset="0"/>
-                      </a:endParaRPr>
-                    </a:p>
-                  </a:txBody>
-                  <a:tcPr marL="91440" marR="91440" marT="45720" marB="45720" anchor="ctr">
-                    <a:lnL w="6350" cap="flat" cmpd="sng" algn="ctr">
-                      <a:solidFill>
-                        <a:srgbClr val="C9D3E0"/>
-                      </a:solidFill>
-                      <a:prstDash val="solid"/>
-                      <a:round/>
-                      <a:headEnd type="none" w="med" len="med"/>
-                      <a:tailEnd type="none" w="med" len="med"/>
-                    </a:lnL>
-                    <a:lnR w="6350" cap="flat" cmpd="sng" algn="ctr">
-                      <a:solidFill>
-                        <a:srgbClr val="C9D3E0"/>
-                      </a:solidFill>
-                      <a:prstDash val="solid"/>
-                      <a:round/>
-                      <a:headEnd type="none" w="med" len="med"/>
-                      <a:tailEnd type="none" w="med" len="med"/>
-                    </a:lnR>
-                    <a:lnT w="6350" cap="flat" cmpd="sng" algn="ctr">
-                      <a:solidFill>
-                        <a:srgbClr val="C9D3E0"/>
-                      </a:solidFill>
-                      <a:prstDash val="solid"/>
-                      <a:round/>
-                      <a:headEnd type="none" w="med" len="med"/>
-                      <a:tailEnd type="none" w="med" len="med"/>
-                    </a:lnT>
-                    <a:lnB w="6350" cap="flat" cmpd="sng" algn="ctr">
-                      <a:solidFill>
-                        <a:srgbClr val="C9D3E0"/>
-                      </a:solidFill>
-                      <a:prstDash val="solid"/>
-                      <a:round/>
-                      <a:headEnd type="none" w="med" len="med"/>
-                      <a:tailEnd type="none" w="med" len="med"/>
-                    </a:lnB>
-                    <a:solidFill>
-                      <a:srgbClr val="F4F7FB"/>
-                    </a:solidFill>
-                  </a:tcPr>
-                </a:tc>
-                <a:tc>
-                  <a:txBody>
-                    <a:bodyPr/>
-                    <a:lstStyle/>
-                    <a:p>
-                      <a:pPr algn="r" indent="0" marL="0">
-                        <a:buNone/>
-                      </a:pPr>
-                      <a:r>
-                        <a:rPr lang="en-US" sz="1100" dirty="0">
-                          <a:solidFill>
-                            <a:srgbClr val="1B2430"/>
-                          </a:solidFill>
-                          <a:latin typeface="Calibri" pitchFamily="34" charset="0"/>
-                          <a:ea typeface="Calibri" pitchFamily="34" charset="-122"/>
-                          <a:cs typeface="Calibri" pitchFamily="34" charset="-120"/>
-                        </a:rPr>
-                        <a:t>12</a:t>
-                      </a:r>
-                      <a:endParaRPr lang="en-US" sz="1100" dirty="0">
-                        <a:latin typeface="Calibri" charset="0"/>
-                        <a:ea typeface="Calibri" charset="0"/>
-                        <a:cs typeface="Calibri" charset="0"/>
-                      </a:endParaRPr>
-                    </a:p>
-                  </a:txBody>
-                  <a:tcPr marL="91440" marR="91440" marT="45720" marB="45720" anchor="ctr">
-                    <a:lnL w="6350" cap="flat" cmpd="sng" algn="ctr">
-                      <a:solidFill>
-                        <a:srgbClr val="C9D3E0"/>
-                      </a:solidFill>
-                      <a:prstDash val="solid"/>
-                      <a:round/>
-                      <a:headEnd type="none" w="med" len="med"/>
-                      <a:tailEnd type="none" w="med" len="med"/>
-                    </a:lnL>
-                    <a:lnR w="6350" cap="flat" cmpd="sng" algn="ctr">
-                      <a:solidFill>
-                        <a:srgbClr val="C9D3E0"/>
-                      </a:solidFill>
-                      <a:prstDash val="solid"/>
-                      <a:round/>
-                      <a:headEnd type="none" w="med" len="med"/>
-                      <a:tailEnd type="none" w="med" len="med"/>
-                    </a:lnR>
-                    <a:lnT w="6350" cap="flat" cmpd="sng" algn="ctr">
-                      <a:solidFill>
-                        <a:srgbClr val="C9D3E0"/>
-                      </a:solidFill>
-                      <a:prstDash val="solid"/>
-                      <a:round/>
-                      <a:headEnd type="none" w="med" len="med"/>
-                      <a:tailEnd type="none" w="med" len="med"/>
-                    </a:lnT>
-                    <a:lnB w="6350" cap="flat" cmpd="sng" algn="ctr">
-                      <a:solidFill>
-                        <a:srgbClr val="C9D3E0"/>
-                      </a:solidFill>
-                      <a:prstDash val="solid"/>
-                      <a:round/>
-                      <a:headEnd type="none" w="med" len="med"/>
-                      <a:tailEnd type="none" w="med" len="med"/>
-                    </a:lnB>
-                    <a:solidFill>
-                      <a:srgbClr val="F4F7FB"/>
-                    </a:solidFill>
-                  </a:tcPr>
-                </a:tc>
-                <a:tc>
-                  <a:txBody>
-                    <a:bodyPr/>
-                    <a:lstStyle/>
-                    <a:p>
-                      <a:pPr algn="r" indent="0" marL="0">
-                        <a:buNone/>
-                      </a:pPr>
-                      <a:r>
-                        <a:rPr lang="en-US" sz="1100" dirty="0">
-                          <a:solidFill>
-                            <a:srgbClr val="1B2430"/>
-                          </a:solidFill>
-                          <a:latin typeface="Calibri" pitchFamily="34" charset="0"/>
-                          <a:ea typeface="Calibri" pitchFamily="34" charset="-122"/>
-                          <a:cs typeface="Calibri" pitchFamily="34" charset="-120"/>
-                        </a:rPr>
-                        <a:t>350 ₽</a:t>
-                      </a:r>
-                      <a:endParaRPr lang="en-US" sz="1100" dirty="0">
-                        <a:latin typeface="Calibri" charset="0"/>
-                        <a:ea typeface="Calibri" charset="0"/>
-                        <a:cs typeface="Calibri" charset="0"/>
-                      </a:endParaRPr>
-                    </a:p>
-                  </a:txBody>
-                  <a:tcPr marL="91440" marR="91440" marT="45720" marB="45720" anchor="ctr">
-                    <a:lnL w="6350" cap="flat" cmpd="sng" algn="ctr">
-                      <a:solidFill>
-                        <a:srgbClr val="C9D3E0"/>
-                      </a:solidFill>
-                      <a:prstDash val="solid"/>
-                      <a:round/>
-                      <a:headEnd type="none" w="med" len="med"/>
-                      <a:tailEnd type="none" w="med" len="med"/>
-                    </a:lnL>
-                    <a:lnR w="6350" cap="flat" cmpd="sng" algn="ctr">
-                      <a:solidFill>
-                        <a:srgbClr val="C9D3E0"/>
-                      </a:solidFill>
-                      <a:prstDash val="solid"/>
-                      <a:round/>
-                      <a:headEnd type="none" w="med" len="med"/>
-                      <a:tailEnd type="none" w="med" len="med"/>
-                    </a:lnR>
-                    <a:lnT w="6350" cap="flat" cmpd="sng" algn="ctr">
-                      <a:solidFill>
-                        <a:srgbClr val="C9D3E0"/>
-                      </a:solidFill>
-                      <a:prstDash val="solid"/>
-                      <a:round/>
-                      <a:headEnd type="none" w="med" len="med"/>
-                      <a:tailEnd type="none" w="med" len="med"/>
-                    </a:lnT>
-                    <a:lnB w="6350" cap="flat" cmpd="sng" algn="ctr">
-                      <a:solidFill>
-                        <a:srgbClr val="C9D3E0"/>
-                      </a:solidFill>
-                      <a:prstDash val="solid"/>
-                      <a:round/>
-                      <a:headEnd type="none" w="med" len="med"/>
-                      <a:tailEnd type="none" w="med" len="med"/>
-                    </a:lnB>
-                    <a:solidFill>
-                      <a:srgbClr val="F4F7FB"/>
-                    </a:solidFill>
-                  </a:tcPr>
-                </a:tc>
-                <a:tc>
-                  <a:txBody>
-                    <a:bodyPr/>
-                    <a:lstStyle/>
-                    <a:p>
-                      <a:pPr algn="r" indent="0" marL="0">
-                        <a:buNone/>
-                      </a:pPr>
-                      <a:r>
-                        <a:rPr lang="en-US" sz="1100" b="1" dirty="0">
-                          <a:solidFill>
-                            <a:srgbClr val="1B2430"/>
-                          </a:solidFill>
-                          <a:latin typeface="Calibri" pitchFamily="34" charset="0"/>
-                          <a:ea typeface="Calibri" pitchFamily="34" charset="-122"/>
-                          <a:cs typeface="Calibri" pitchFamily="34" charset="-120"/>
-                        </a:rPr>
-                        <a:t>4 200 ₽</a:t>
-                      </a:r>
-                      <a:endParaRPr lang="en-US" sz="1100" dirty="0">
-                        <a:latin typeface="Calibri" charset="0"/>
-                        <a:ea typeface="Calibri" charset="0"/>
-                        <a:cs typeface="Calibri" charset="0"/>
-                      </a:endParaRPr>
-                    </a:p>
-                  </a:txBody>
-                  <a:tcPr marL="91440" marR="91440" marT="45720" marB="45720" anchor="ctr">
-                    <a:lnL w="6350" cap="flat" cmpd="sng" algn="ctr">
-                      <a:solidFill>
-                        <a:srgbClr val="C9D3E0"/>
-                      </a:solidFill>
-                      <a:prstDash val="solid"/>
-                      <a:round/>
-                      <a:headEnd type="none" w="med" len="med"/>
-                      <a:tailEnd type="none" w="med" len="med"/>
-                    </a:lnL>
-                    <a:lnR w="6350" cap="flat" cmpd="sng" algn="ctr">
-                      <a:solidFill>
-                        <a:srgbClr val="C9D3E0"/>
-                      </a:solidFill>
-                      <a:prstDash val="solid"/>
-                      <a:round/>
-                      <a:headEnd type="none" w="med" len="med"/>
-                      <a:tailEnd type="none" w="med" len="med"/>
-                    </a:lnR>
-                    <a:lnT w="6350" cap="flat" cmpd="sng" algn="ctr">
-                      <a:solidFill>
-                        <a:srgbClr val="C9D3E0"/>
-                      </a:solidFill>
-                      <a:prstDash val="solid"/>
-                      <a:round/>
-                      <a:headEnd type="none" w="med" len="med"/>
-                      <a:tailEnd type="none" w="med" len="med"/>
-                    </a:lnT>
-                    <a:lnB w="6350" cap="flat" cmpd="sng" algn="ctr">
-                      <a:solidFill>
-                        <a:srgbClr val="C9D3E0"/>
-                      </a:solidFill>
-                      <a:prstDash val="solid"/>
-                      <a:round/>
-                      <a:headEnd type="none" w="med" len="med"/>
-                      <a:tailEnd type="none" w="med" len="med"/>
-                    </a:lnB>
-                    <a:solidFill>
-                      <a:srgbClr val="F4F7FB"/>
-                    </a:solidFill>
-                  </a:tcPr>
-                </a:tc>
-              </a:tr>
-              <a:tr h="283464">
-                <a:tc>
-                  <a:txBody>
-                    <a:bodyPr/>
-                    <a:lstStyle/>
-                    <a:p>
-                      <a:pPr indent="0" marL="0">
-                        <a:buNone/>
-                      </a:pPr>
-                      <a:r>
-                        <a:rPr lang="en-US" sz="1100" dirty="0">
-                          <a:solidFill>
-                            <a:srgbClr val="1B2430"/>
-                          </a:solidFill>
-                          <a:latin typeface="Calibri" pitchFamily="34" charset="0"/>
-                          <a:ea typeface="Calibri" pitchFamily="34" charset="-122"/>
-                          <a:cs typeface="Calibri" pitchFamily="34" charset="-120"/>
-                        </a:rPr>
-                        <a:t>Кабель-канал 25×16 мм, 2 м</a:t>
-                      </a:r>
-                      <a:endParaRPr lang="en-US" sz="1100" dirty="0">
-                        <a:latin typeface="Calibri" charset="0"/>
-                        <a:ea typeface="Calibri" charset="0"/>
-                        <a:cs typeface="Calibri" charset="0"/>
-                      </a:endParaRPr>
-                    </a:p>
-                  </a:txBody>
-                  <a:tcPr marL="91440" marR="91440" marT="45720" marB="45720" anchor="ctr">
-                    <a:lnL w="6350" cap="flat" cmpd="sng" algn="ctr">
-                      <a:solidFill>
-                        <a:srgbClr val="C9D3E0"/>
-                      </a:solidFill>
-                      <a:prstDash val="solid"/>
-                      <a:round/>
-                      <a:headEnd type="none" w="med" len="med"/>
-                      <a:tailEnd type="none" w="med" len="med"/>
-                    </a:lnL>
-                    <a:lnR w="6350" cap="flat" cmpd="sng" algn="ctr">
-                      <a:solidFill>
-                        <a:srgbClr val="C9D3E0"/>
-                      </a:solidFill>
-                      <a:prstDash val="solid"/>
-                      <a:round/>
-                      <a:headEnd type="none" w="med" len="med"/>
-                      <a:tailEnd type="none" w="med" len="med"/>
-                    </a:lnR>
-                    <a:lnT w="6350" cap="flat" cmpd="sng" algn="ctr">
-                      <a:solidFill>
-                        <a:srgbClr val="C9D3E0"/>
-                      </a:solidFill>
-                      <a:prstDash val="solid"/>
-                      <a:round/>
-                      <a:headEnd type="none" w="med" len="med"/>
-                      <a:tailEnd type="none" w="med" len="med"/>
-                    </a:lnT>
-                    <a:lnB w="6350" cap="flat" cmpd="sng" algn="ctr">
-                      <a:solidFill>
-                        <a:srgbClr val="C9D3E0"/>
-                      </a:solidFill>
-                      <a:prstDash val="solid"/>
-                      <a:round/>
-                      <a:headEnd type="none" w="med" len="med"/>
-                      <a:tailEnd type="none" w="med" len="med"/>
-                    </a:lnB>
-                    <a:solidFill>
-                      <a:srgbClr val="FFFFFF"/>
-                    </a:solidFill>
-                  </a:tcPr>
-                </a:tc>
-                <a:tc>
-                  <a:txBody>
-                    <a:bodyPr/>
-                    <a:lstStyle/>
-                    <a:p>
-                      <a:pPr algn="r" indent="0" marL="0">
-                        <a:buNone/>
-                      </a:pPr>
-                      <a:r>
-                        <a:rPr lang="en-US" sz="1100" dirty="0">
-                          <a:solidFill>
-                            <a:srgbClr val="1B2430"/>
-                          </a:solidFill>
-                          <a:latin typeface="Calibri" pitchFamily="34" charset="0"/>
-                          <a:ea typeface="Calibri" pitchFamily="34" charset="-122"/>
-                          <a:cs typeface="Calibri" pitchFamily="34" charset="-120"/>
-                        </a:rPr>
-                        <a:t>40</a:t>
-                      </a:r>
-                      <a:endParaRPr lang="en-US" sz="1100" dirty="0">
-                        <a:latin typeface="Calibri" charset="0"/>
-                        <a:ea typeface="Calibri" charset="0"/>
-                        <a:cs typeface="Calibri" charset="0"/>
-                      </a:endParaRPr>
-                    </a:p>
-                  </a:txBody>
-                  <a:tcPr marL="91440" marR="91440" marT="45720" marB="45720" anchor="ctr">
-                    <a:lnL w="6350" cap="flat" cmpd="sng" algn="ctr">
-                      <a:solidFill>
-                        <a:srgbClr val="C9D3E0"/>
-                      </a:solidFill>
-                      <a:prstDash val="solid"/>
-                      <a:round/>
-                      <a:headEnd type="none" w="med" len="med"/>
-                      <a:tailEnd type="none" w="med" len="med"/>
-                    </a:lnL>
-                    <a:lnR w="6350" cap="flat" cmpd="sng" algn="ctr">
-                      <a:solidFill>
-                        <a:srgbClr val="C9D3E0"/>
-                      </a:solidFill>
-                      <a:prstDash val="solid"/>
-                      <a:round/>
-                      <a:headEnd type="none" w="med" len="med"/>
-                      <a:tailEnd type="none" w="med" len="med"/>
-                    </a:lnR>
-                    <a:lnT w="6350" cap="flat" cmpd="sng" algn="ctr">
-                      <a:solidFill>
-                        <a:srgbClr val="C9D3E0"/>
-                      </a:solidFill>
-                      <a:prstDash val="solid"/>
-                      <a:round/>
-                      <a:headEnd type="none" w="med" len="med"/>
-                      <a:tailEnd type="none" w="med" len="med"/>
-                    </a:lnT>
-                    <a:lnB w="6350" cap="flat" cmpd="sng" algn="ctr">
-                      <a:solidFill>
-                        <a:srgbClr val="C9D3E0"/>
-                      </a:solidFill>
-                      <a:prstDash val="solid"/>
-                      <a:round/>
-                      <a:headEnd type="none" w="med" len="med"/>
-                      <a:tailEnd type="none" w="med" len="med"/>
-                    </a:lnB>
-                    <a:solidFill>
-                      <a:srgbClr val="FFFFFF"/>
-                    </a:solidFill>
-                  </a:tcPr>
-                </a:tc>
-                <a:tc>
-                  <a:txBody>
-                    <a:bodyPr/>
-                    <a:lstStyle/>
-                    <a:p>
-                      <a:pPr algn="r" indent="0" marL="0">
-                        <a:buNone/>
-                      </a:pPr>
-                      <a:r>
-                        <a:rPr lang="en-US" sz="1100" dirty="0">
-                          <a:solidFill>
-                            <a:srgbClr val="1B2430"/>
-                          </a:solidFill>
-                          <a:latin typeface="Calibri" pitchFamily="34" charset="0"/>
-                          <a:ea typeface="Calibri" pitchFamily="34" charset="-122"/>
-                          <a:cs typeface="Calibri" pitchFamily="34" charset="-120"/>
-                        </a:rPr>
-                        <a:t>180 ₽</a:t>
-                      </a:r>
-                      <a:endParaRPr lang="en-US" sz="1100" dirty="0">
-                        <a:latin typeface="Calibri" charset="0"/>
-                        <a:ea typeface="Calibri" charset="0"/>
-                        <a:cs typeface="Calibri" charset="0"/>
-                      </a:endParaRPr>
-                    </a:p>
-                  </a:txBody>
-                  <a:tcPr marL="91440" marR="91440" marT="45720" marB="45720" anchor="ctr">
-                    <a:lnL w="6350" cap="flat" cmpd="sng" algn="ctr">
-                      <a:solidFill>
-                        <a:srgbClr val="C9D3E0"/>
-                      </a:solidFill>
-                      <a:prstDash val="solid"/>
-                      <a:round/>
-                      <a:headEnd type="none" w="med" len="med"/>
-                      <a:tailEnd type="none" w="med" len="med"/>
-                    </a:lnL>
-                    <a:lnR w="6350" cap="flat" cmpd="sng" algn="ctr">
-                      <a:solidFill>
-                        <a:srgbClr val="C9D3E0"/>
-                      </a:solidFill>
-                      <a:prstDash val="solid"/>
-                      <a:round/>
-                      <a:headEnd type="none" w="med" len="med"/>
-                      <a:tailEnd type="none" w="med" len="med"/>
-                    </a:lnR>
-                    <a:lnT w="6350" cap="flat" cmpd="sng" algn="ctr">
-                      <a:solidFill>
-                        <a:srgbClr val="C9D3E0"/>
-                      </a:solidFill>
-                      <a:prstDash val="solid"/>
-                      <a:round/>
-                      <a:headEnd type="none" w="med" len="med"/>
-                      <a:tailEnd type="none" w="med" len="med"/>
-                    </a:lnT>
-                    <a:lnB w="6350" cap="flat" cmpd="sng" algn="ctr">
-                      <a:solidFill>
-                        <a:srgbClr val="C9D3E0"/>
-                      </a:solidFill>
-                      <a:prstDash val="solid"/>
-                      <a:round/>
-                      <a:headEnd type="none" w="med" len="med"/>
-                      <a:tailEnd type="none" w="med" len="med"/>
-                    </a:lnB>
-                    <a:solidFill>
-                      <a:srgbClr val="FFFFFF"/>
-                    </a:solidFill>
-                  </a:tcPr>
-                </a:tc>
-                <a:tc>
-                  <a:txBody>
-                    <a:bodyPr/>
-                    <a:lstStyle/>
-                    <a:p>
-                      <a:pPr algn="r" indent="0" marL="0">
-                        <a:buNone/>
-                      </a:pPr>
-                      <a:r>
-                        <a:rPr lang="en-US" sz="1100" b="1" dirty="0">
-                          <a:solidFill>
-                            <a:srgbClr val="1B2430"/>
-                          </a:solidFill>
-                          <a:latin typeface="Calibri" pitchFamily="34" charset="0"/>
-                          <a:ea typeface="Calibri" pitchFamily="34" charset="-122"/>
-                          <a:cs typeface="Calibri" pitchFamily="34" charset="-120"/>
-                        </a:rPr>
-                        <a:t>7 200 ₽</a:t>
-                      </a:r>
-                      <a:endParaRPr lang="en-US" sz="1100" dirty="0">
-                        <a:latin typeface="Calibri" charset="0"/>
-                        <a:ea typeface="Calibri" charset="0"/>
-                        <a:cs typeface="Calibri" charset="0"/>
-                      </a:endParaRPr>
-                    </a:p>
-                  </a:txBody>
-                  <a:tcPr marL="91440" marR="91440" marT="45720" marB="45720" anchor="ctr">
-                    <a:lnL w="6350" cap="flat" cmpd="sng" algn="ctr">
-                      <a:solidFill>
-                        <a:srgbClr val="C9D3E0"/>
-                      </a:solidFill>
-                      <a:prstDash val="solid"/>
-                      <a:round/>
-                      <a:headEnd type="none" w="med" len="med"/>
-                      <a:tailEnd type="none" w="med" len="med"/>
-                    </a:lnL>
-                    <a:lnR w="6350" cap="flat" cmpd="sng" algn="ctr">
-                      <a:solidFill>
-                        <a:srgbClr val="C9D3E0"/>
-                      </a:solidFill>
-                      <a:prstDash val="solid"/>
-                      <a:round/>
-                      <a:headEnd type="none" w="med" len="med"/>
-                      <a:tailEnd type="none" w="med" len="med"/>
-                    </a:lnR>
-                    <a:lnT w="6350" cap="flat" cmpd="sng" algn="ctr">
-                      <a:solidFill>
-                        <a:srgbClr val="C9D3E0"/>
-                      </a:solidFill>
-                      <a:prstDash val="solid"/>
-                      <a:round/>
-                      <a:headEnd type="none" w="med" len="med"/>
-                      <a:tailEnd type="none" w="med" len="med"/>
-                    </a:lnT>
-                    <a:lnB w="6350" cap="flat" cmpd="sng" algn="ctr">
-                      <a:solidFill>
-                        <a:srgbClr val="C9D3E0"/>
-                      </a:solidFill>
-                      <a:prstDash val="solid"/>
-                      <a:round/>
-                      <a:headEnd type="none" w="med" len="med"/>
-                      <a:tailEnd type="none" w="med" len="med"/>
-                    </a:lnB>
-                    <a:solidFill>
-                      <a:srgbClr val="FFFFFF"/>
-                    </a:solidFill>
-                  </a:tcPr>
-                </a:tc>
-              </a:tr>
-              <a:tr h="283464">
-                <a:tc>
-                  <a:txBody>
-                    <a:bodyPr/>
-                    <a:lstStyle/>
-                    <a:p>
-                      <a:pPr indent="0" marL="0">
-                        <a:buNone/>
-                      </a:pPr>
-                      <a:r>
-                        <a:rPr lang="en-US" sz="1100" dirty="0">
-                          <a:solidFill>
-                            <a:srgbClr val="1B2430"/>
-                          </a:solidFill>
-                          <a:latin typeface="Calibri" pitchFamily="34" charset="0"/>
-                          <a:ea typeface="Calibri" pitchFamily="34" charset="-122"/>
-                          <a:cs typeface="Calibri" pitchFamily="34" charset="-120"/>
-                        </a:rPr>
-                        <a:t>Патч-корд UTP 1 м</a:t>
-                      </a:r>
-                      <a:endParaRPr lang="en-US" sz="1100" dirty="0">
-                        <a:latin typeface="Calibri" charset="0"/>
-                        <a:ea typeface="Calibri" charset="0"/>
-                        <a:cs typeface="Calibri" charset="0"/>
-                      </a:endParaRPr>
-                    </a:p>
-                  </a:txBody>
-                  <a:tcPr marL="91440" marR="91440" marT="45720" marB="45720" anchor="ctr">
-                    <a:lnL w="6350" cap="flat" cmpd="sng" algn="ctr">
-                      <a:solidFill>
-                        <a:srgbClr val="C9D3E0"/>
-                      </a:solidFill>
-                      <a:prstDash val="solid"/>
-                      <a:round/>
-                      <a:headEnd type="none" w="med" len="med"/>
-                      <a:tailEnd type="none" w="med" len="med"/>
-                    </a:lnL>
-                    <a:lnR w="6350" cap="flat" cmpd="sng" algn="ctr">
-                      <a:solidFill>
-                        <a:srgbClr val="C9D3E0"/>
-                      </a:solidFill>
-                      <a:prstDash val="solid"/>
-                      <a:round/>
-                      <a:headEnd type="none" w="med" len="med"/>
-                      <a:tailEnd type="none" w="med" len="med"/>
-                    </a:lnR>
-                    <a:lnT w="6350" cap="flat" cmpd="sng" algn="ctr">
-                      <a:solidFill>
-                        <a:srgbClr val="C9D3E0"/>
-                      </a:solidFill>
-                      <a:prstDash val="solid"/>
-                      <a:round/>
-                      <a:headEnd type="none" w="med" len="med"/>
-                      <a:tailEnd type="none" w="med" len="med"/>
-                    </a:lnT>
-                    <a:lnB w="6350" cap="flat" cmpd="sng" algn="ctr">
-                      <a:solidFill>
-                        <a:srgbClr val="C9D3E0"/>
-                      </a:solidFill>
-                      <a:prstDash val="solid"/>
-                      <a:round/>
-                      <a:headEnd type="none" w="med" len="med"/>
-                      <a:tailEnd type="none" w="med" len="med"/>
-                    </a:lnB>
-                    <a:solidFill>
-                      <a:srgbClr val="F4F7FB"/>
-                    </a:solidFill>
-                  </a:tcPr>
-                </a:tc>
-                <a:tc>
-                  <a:txBody>
-                    <a:bodyPr/>
-                    <a:lstStyle/>
-                    <a:p>
-                      <a:pPr algn="r" indent="0" marL="0">
-                        <a:buNone/>
-                      </a:pPr>
-                      <a:r>
-                        <a:rPr lang="en-US" sz="1100" dirty="0">
-                          <a:solidFill>
-                            <a:srgbClr val="1B2430"/>
-                          </a:solidFill>
-                          <a:latin typeface="Calibri" pitchFamily="34" charset="0"/>
-                          <a:ea typeface="Calibri" pitchFamily="34" charset="-122"/>
-                          <a:cs typeface="Calibri" pitchFamily="34" charset="-120"/>
-                        </a:rPr>
-                        <a:t>20</a:t>
-                      </a:r>
-                      <a:endParaRPr lang="en-US" sz="1100" dirty="0">
-                        <a:latin typeface="Calibri" charset="0"/>
-                        <a:ea typeface="Calibri" charset="0"/>
-                        <a:cs typeface="Calibri" charset="0"/>
-                      </a:endParaRPr>
-                    </a:p>
-                  </a:txBody>
-                  <a:tcPr marL="91440" marR="91440" marT="45720" marB="45720" anchor="ctr">
-                    <a:lnL w="6350" cap="flat" cmpd="sng" algn="ctr">
-                      <a:solidFill>
-                        <a:srgbClr val="C9D3E0"/>
-                      </a:solidFill>
-                      <a:prstDash val="solid"/>
-                      <a:round/>
-                      <a:headEnd type="none" w="med" len="med"/>
-                      <a:tailEnd type="none" w="med" len="med"/>
-                    </a:lnL>
-                    <a:lnR w="6350" cap="flat" cmpd="sng" algn="ctr">
-                      <a:solidFill>
-                        <a:srgbClr val="C9D3E0"/>
-                      </a:solidFill>
-                      <a:prstDash val="solid"/>
-                      <a:round/>
-                      <a:headEnd type="none" w="med" len="med"/>
-                      <a:tailEnd type="none" w="med" len="med"/>
-                    </a:lnR>
-                    <a:lnT w="6350" cap="flat" cmpd="sng" algn="ctr">
-                      <a:solidFill>
-                        <a:srgbClr val="C9D3E0"/>
-                      </a:solidFill>
-                      <a:prstDash val="solid"/>
-                      <a:round/>
-                      <a:headEnd type="none" w="med" len="med"/>
-                      <a:tailEnd type="none" w="med" len="med"/>
-                    </a:lnT>
-                    <a:lnB w="6350" cap="flat" cmpd="sng" algn="ctr">
-                      <a:solidFill>
-                        <a:srgbClr val="C9D3E0"/>
-                      </a:solidFill>
-                      <a:prstDash val="solid"/>
-                      <a:round/>
-                      <a:headEnd type="none" w="med" len="med"/>
-                      <a:tailEnd type="none" w="med" len="med"/>
-                    </a:lnB>
-                    <a:solidFill>
-                      <a:srgbClr val="F4F7FB"/>
-                    </a:solidFill>
-                  </a:tcPr>
-                </a:tc>
-                <a:tc>
-                  <a:txBody>
-                    <a:bodyPr/>
-                    <a:lstStyle/>
-                    <a:p>
-                      <a:pPr algn="r" indent="0" marL="0">
-                        <a:buNone/>
-                      </a:pPr>
-                      <a:r>
-                        <a:rPr lang="en-US" sz="1100" dirty="0">
-                          <a:solidFill>
-                            <a:srgbClr val="1B2430"/>
-                          </a:solidFill>
-                          <a:latin typeface="Calibri" pitchFamily="34" charset="0"/>
-                          <a:ea typeface="Calibri" pitchFamily="34" charset="-122"/>
-                          <a:cs typeface="Calibri" pitchFamily="34" charset="-120"/>
-                        </a:rPr>
-                        <a:t>150 ₽</a:t>
-                      </a:r>
-                      <a:endParaRPr lang="en-US" sz="1100" dirty="0">
-                        <a:latin typeface="Calibri" charset="0"/>
-                        <a:ea typeface="Calibri" charset="0"/>
-                        <a:cs typeface="Calibri" charset="0"/>
-                      </a:endParaRPr>
-                    </a:p>
-                  </a:txBody>
-                  <a:tcPr marL="91440" marR="91440" marT="45720" marB="45720" anchor="ctr">
-                    <a:lnL w="6350" cap="flat" cmpd="sng" algn="ctr">
-                      <a:solidFill>
-                        <a:srgbClr val="C9D3E0"/>
-                      </a:solidFill>
-                      <a:prstDash val="solid"/>
-                      <a:round/>
-                      <a:headEnd type="none" w="med" len="med"/>
-                      <a:tailEnd type="none" w="med" len="med"/>
-                    </a:lnL>
-                    <a:lnR w="6350" cap="flat" cmpd="sng" algn="ctr">
-                      <a:solidFill>
-                        <a:srgbClr val="C9D3E0"/>
-                      </a:solidFill>
-                      <a:prstDash val="solid"/>
-                      <a:round/>
-                      <a:headEnd type="none" w="med" len="med"/>
-                      <a:tailEnd type="none" w="med" len="med"/>
-                    </a:lnR>
-                    <a:lnT w="6350" cap="flat" cmpd="sng" algn="ctr">
-                      <a:solidFill>
-                        <a:srgbClr val="C9D3E0"/>
-                      </a:solidFill>
-                      <a:prstDash val="solid"/>
-                      <a:round/>
-                      <a:headEnd type="none" w="med" len="med"/>
-                      <a:tailEnd type="none" w="med" len="med"/>
-                    </a:lnT>
-                    <a:lnB w="6350" cap="flat" cmpd="sng" algn="ctr">
-                      <a:solidFill>
-                        <a:srgbClr val="C9D3E0"/>
-                      </a:solidFill>
-                      <a:prstDash val="solid"/>
-                      <a:round/>
-                      <a:headEnd type="none" w="med" len="med"/>
-                      <a:tailEnd type="none" w="med" len="med"/>
-                    </a:lnB>
-                    <a:solidFill>
-                      <a:srgbClr val="F4F7FB"/>
-                    </a:solidFill>
-                  </a:tcPr>
-                </a:tc>
-                <a:tc>
-                  <a:txBody>
-                    <a:bodyPr/>
-                    <a:lstStyle/>
-                    <a:p>
-                      <a:pPr algn="r" indent="0" marL="0">
-                        <a:buNone/>
-                      </a:pPr>
-                      <a:r>
-                        <a:rPr lang="en-US" sz="1100" b="1" dirty="0">
-                          <a:solidFill>
-                            <a:srgbClr val="1B2430"/>
-                          </a:solidFill>
-                          <a:latin typeface="Calibri" pitchFamily="34" charset="0"/>
-                          <a:ea typeface="Calibri" pitchFamily="34" charset="-122"/>
-                          <a:cs typeface="Calibri" pitchFamily="34" charset="-120"/>
-                        </a:rPr>
-                        <a:t>3 000 ₽</a:t>
-                      </a:r>
-                      <a:endParaRPr lang="en-US" sz="1100" dirty="0">
-                        <a:latin typeface="Calibri" charset="0"/>
-                        <a:ea typeface="Calibri" charset="0"/>
-                        <a:cs typeface="Calibri" charset="0"/>
-                      </a:endParaRPr>
-                    </a:p>
-                  </a:txBody>
-                  <a:tcPr marL="91440" marR="91440" marT="45720" marB="45720" anchor="ctr">
-                    <a:lnL w="6350" cap="flat" cmpd="sng" algn="ctr">
-                      <a:solidFill>
-                        <a:srgbClr val="C9D3E0"/>
-                      </a:solidFill>
-                      <a:prstDash val="solid"/>
-                      <a:round/>
-                      <a:headEnd type="none" w="med" len="med"/>
-                      <a:tailEnd type="none" w="med" len="med"/>
-                    </a:lnL>
-                    <a:lnR w="6350" cap="flat" cmpd="sng" algn="ctr">
-                      <a:solidFill>
-                        <a:srgbClr val="C9D3E0"/>
-                      </a:solidFill>
-                      <a:prstDash val="solid"/>
-                      <a:round/>
-                      <a:headEnd type="none" w="med" len="med"/>
-                      <a:tailEnd type="none" w="med" len="med"/>
-                    </a:lnR>
-                    <a:lnT w="6350" cap="flat" cmpd="sng" algn="ctr">
-                      <a:solidFill>
-                        <a:srgbClr val="C9D3E0"/>
-                      </a:solidFill>
-                      <a:prstDash val="solid"/>
-                      <a:round/>
-                      <a:headEnd type="none" w="med" len="med"/>
-                      <a:tailEnd type="none" w="med" len="med"/>
-                    </a:lnT>
-                    <a:lnB w="6350" cap="flat" cmpd="sng" algn="ctr">
-                      <a:solidFill>
-                        <a:srgbClr val="C9D3E0"/>
-                      </a:solidFill>
-                      <a:prstDash val="solid"/>
-                      <a:round/>
-                      <a:headEnd type="none" w="med" len="med"/>
-                      <a:tailEnd type="none" w="med" len="med"/>
-                    </a:lnB>
-                    <a:solidFill>
-                      <a:srgbClr val="F4F7FB"/>
-                    </a:solidFill>
-                  </a:tcPr>
-                </a:tc>
-              </a:tr>
-              <a:tr h="283464">
-                <a:tc>
-                  <a:txBody>
-                    <a:bodyPr/>
-                    <a:lstStyle/>
-                    <a:p>
-                      <a:pPr indent="0" marL="0">
-                        <a:buNone/>
-                      </a:pPr>
-                      <a:r>
-                        <a:rPr lang="en-US" sz="1100" dirty="0">
-                          <a:solidFill>
-                            <a:srgbClr val="1B2430"/>
-                          </a:solidFill>
-                          <a:latin typeface="Calibri" pitchFamily="34" charset="0"/>
-                          <a:ea typeface="Calibri" pitchFamily="34" charset="-122"/>
-                          <a:cs typeface="Calibri" pitchFamily="34" charset="-120"/>
-                        </a:rPr>
-                        <a:t>Консольный кабель Cisco RJ-45 – USB</a:t>
-                      </a:r>
-                      <a:endParaRPr lang="en-US" sz="1100" dirty="0">
-                        <a:latin typeface="Calibri" charset="0"/>
-                        <a:ea typeface="Calibri" charset="0"/>
-                        <a:cs typeface="Calibri" charset="0"/>
-                      </a:endParaRPr>
-                    </a:p>
-                  </a:txBody>
-                  <a:tcPr marL="91440" marR="91440" marT="45720" marB="45720" anchor="ctr">
-                    <a:lnL w="6350" cap="flat" cmpd="sng" algn="ctr">
-                      <a:solidFill>
-                        <a:srgbClr val="C9D3E0"/>
-                      </a:solidFill>
-                      <a:prstDash val="solid"/>
-                      <a:round/>
-                      <a:headEnd type="none" w="med" len="med"/>
-                      <a:tailEnd type="none" w="med" len="med"/>
-                    </a:lnL>
-                    <a:lnR w="6350" cap="flat" cmpd="sng" algn="ctr">
-                      <a:solidFill>
-                        <a:srgbClr val="C9D3E0"/>
-                      </a:solidFill>
-                      <a:prstDash val="solid"/>
-                      <a:round/>
-                      <a:headEnd type="none" w="med" len="med"/>
-                      <a:tailEnd type="none" w="med" len="med"/>
-                    </a:lnR>
-                    <a:lnT w="6350" cap="flat" cmpd="sng" algn="ctr">
-                      <a:solidFill>
-                        <a:srgbClr val="C9D3E0"/>
-                      </a:solidFill>
-                      <a:prstDash val="solid"/>
-                      <a:round/>
-                      <a:headEnd type="none" w="med" len="med"/>
-                      <a:tailEnd type="none" w="med" len="med"/>
-                    </a:lnT>
-                    <a:lnB w="6350" cap="flat" cmpd="sng" algn="ctr">
-                      <a:solidFill>
-                        <a:srgbClr val="C9D3E0"/>
-                      </a:solidFill>
-                      <a:prstDash val="solid"/>
-                      <a:round/>
-                      <a:headEnd type="none" w="med" len="med"/>
-                      <a:tailEnd type="none" w="med" len="med"/>
-                    </a:lnB>
-                    <a:solidFill>
-                      <a:srgbClr val="FFFFFF"/>
-                    </a:solidFill>
-                  </a:tcPr>
-                </a:tc>
-                <a:tc>
-                  <a:txBody>
-                    <a:bodyPr/>
-                    <a:lstStyle/>
-                    <a:p>
-                      <a:pPr algn="r" indent="0" marL="0">
-                        <a:buNone/>
-                      </a:pPr>
-                      <a:r>
-                        <a:rPr lang="en-US" sz="1100" dirty="0">
-                          <a:solidFill>
-                            <a:srgbClr val="1B2430"/>
-                          </a:solidFill>
-                          <a:latin typeface="Calibri" pitchFamily="34" charset="0"/>
-                          <a:ea typeface="Calibri" pitchFamily="34" charset="-122"/>
-                          <a:cs typeface="Calibri" pitchFamily="34" charset="-120"/>
-                        </a:rPr>
-                        <a:t>1</a:t>
-                      </a:r>
-                      <a:endParaRPr lang="en-US" sz="1100" dirty="0">
-                        <a:latin typeface="Calibri" charset="0"/>
-                        <a:ea typeface="Calibri" charset="0"/>
-                        <a:cs typeface="Calibri" charset="0"/>
-                      </a:endParaRPr>
-                    </a:p>
-                  </a:txBody>
-                  <a:tcPr marL="91440" marR="91440" marT="45720" marB="45720" anchor="ctr">
-                    <a:lnL w="6350" cap="flat" cmpd="sng" algn="ctr">
-                      <a:solidFill>
-                        <a:srgbClr val="C9D3E0"/>
-                      </a:solidFill>
-                      <a:prstDash val="solid"/>
-                      <a:round/>
-                      <a:headEnd type="none" w="med" len="med"/>
-                      <a:tailEnd type="none" w="med" len="med"/>
-                    </a:lnL>
-                    <a:lnR w="6350" cap="flat" cmpd="sng" algn="ctr">
-                      <a:solidFill>
-                        <a:srgbClr val="C9D3E0"/>
-                      </a:solidFill>
-                      <a:prstDash val="solid"/>
-                      <a:round/>
-                      <a:headEnd type="none" w="med" len="med"/>
-                      <a:tailEnd type="none" w="med" len="med"/>
-                    </a:lnR>
-                    <a:lnT w="6350" cap="flat" cmpd="sng" algn="ctr">
-                      <a:solidFill>
-                        <a:srgbClr val="C9D3E0"/>
-                      </a:solidFill>
-                      <a:prstDash val="solid"/>
-                      <a:round/>
-                      <a:headEnd type="none" w="med" len="med"/>
-                      <a:tailEnd type="none" w="med" len="med"/>
-                    </a:lnT>
-                    <a:lnB w="6350" cap="flat" cmpd="sng" algn="ctr">
-                      <a:solidFill>
-                        <a:srgbClr val="C9D3E0"/>
-                      </a:solidFill>
-                      <a:prstDash val="solid"/>
-                      <a:round/>
-                      <a:headEnd type="none" w="med" len="med"/>
-                      <a:tailEnd type="none" w="med" len="med"/>
-                    </a:lnB>
-                    <a:solidFill>
-                      <a:srgbClr val="FFFFFF"/>
-                    </a:solidFill>
-                  </a:tcPr>
-                </a:tc>
-                <a:tc>
-                  <a:txBody>
-                    <a:bodyPr/>
-                    <a:lstStyle/>
-                    <a:p>
-                      <a:pPr algn="r" indent="0" marL="0">
-                        <a:buNone/>
-                      </a:pPr>
-                      <a:r>
-                        <a:rPr lang="en-US" sz="1100" dirty="0">
-                          <a:solidFill>
-                            <a:srgbClr val="1B2430"/>
-                          </a:solidFill>
-                          <a:latin typeface="Calibri" pitchFamily="34" charset="0"/>
-                          <a:ea typeface="Calibri" pitchFamily="34" charset="-122"/>
-                          <a:cs typeface="Calibri" pitchFamily="34" charset="-120"/>
-                        </a:rPr>
-                        <a:t>1 200 ₽</a:t>
-                      </a:r>
-                      <a:endParaRPr lang="en-US" sz="1100" dirty="0">
-                        <a:latin typeface="Calibri" charset="0"/>
-                        <a:ea typeface="Calibri" charset="0"/>
-                        <a:cs typeface="Calibri" charset="0"/>
-                      </a:endParaRPr>
-                    </a:p>
-                  </a:txBody>
-                  <a:tcPr marL="91440" marR="91440" marT="45720" marB="45720" anchor="ctr">
-                    <a:lnL w="6350" cap="flat" cmpd="sng" algn="ctr">
-                      <a:solidFill>
-                        <a:srgbClr val="C9D3E0"/>
-                      </a:solidFill>
-                      <a:prstDash val="solid"/>
-                      <a:round/>
-                      <a:headEnd type="none" w="med" len="med"/>
-                      <a:tailEnd type="none" w="med" len="med"/>
-                    </a:lnL>
-                    <a:lnR w="6350" cap="flat" cmpd="sng" algn="ctr">
-                      <a:solidFill>
-                        <a:srgbClr val="C9D3E0"/>
-                      </a:solidFill>
-                      <a:prstDash val="solid"/>
-                      <a:round/>
-                      <a:headEnd type="none" w="med" len="med"/>
-                      <a:tailEnd type="none" w="med" len="med"/>
-                    </a:lnR>
-                    <a:lnT w="6350" cap="flat" cmpd="sng" algn="ctr">
-                      <a:solidFill>
-                        <a:srgbClr val="C9D3E0"/>
-                      </a:solidFill>
-                      <a:prstDash val="solid"/>
-                      <a:round/>
-                      <a:headEnd type="none" w="med" len="med"/>
-                      <a:tailEnd type="none" w="med" len="med"/>
-                    </a:lnT>
-                    <a:lnB w="6350" cap="flat" cmpd="sng" algn="ctr">
-                      <a:solidFill>
-                        <a:srgbClr val="C9D3E0"/>
-                      </a:solidFill>
-                      <a:prstDash val="solid"/>
-                      <a:round/>
-                      <a:headEnd type="none" w="med" len="med"/>
-                      <a:tailEnd type="none" w="med" len="med"/>
-                    </a:lnB>
-                    <a:solidFill>
-                      <a:srgbClr val="FFFFFF"/>
-                    </a:solidFill>
-                  </a:tcPr>
-                </a:tc>
-                <a:tc>
-                  <a:txBody>
-                    <a:bodyPr/>
-                    <a:lstStyle/>
-                    <a:p>
-                      <a:pPr algn="r" indent="0" marL="0">
-                        <a:buNone/>
-                      </a:pPr>
-                      <a:r>
-                        <a:rPr lang="en-US" sz="1100" b="1" dirty="0">
-                          <a:solidFill>
-                            <a:srgbClr val="1B2430"/>
-                          </a:solidFill>
-                          <a:latin typeface="Calibri" pitchFamily="34" charset="0"/>
-                          <a:ea typeface="Calibri" pitchFamily="34" charset="-122"/>
-                          <a:cs typeface="Calibri" pitchFamily="34" charset="-120"/>
-                        </a:rPr>
-                        <a:t>1 200 ₽</a:t>
-                      </a:r>
-                      <a:endParaRPr lang="en-US" sz="1100" dirty="0">
-                        <a:latin typeface="Calibri" charset="0"/>
-                        <a:ea typeface="Calibri" charset="0"/>
-                        <a:cs typeface="Calibri" charset="0"/>
-                      </a:endParaRPr>
-                    </a:p>
-                  </a:txBody>
-                  <a:tcPr marL="91440" marR="91440" marT="45720" marB="45720" anchor="ctr">
-                    <a:lnL w="6350" cap="flat" cmpd="sng" algn="ctr">
-                      <a:solidFill>
-                        <a:srgbClr val="C9D3E0"/>
-                      </a:solidFill>
-                      <a:prstDash val="solid"/>
-                      <a:round/>
-                      <a:headEnd type="none" w="med" len="med"/>
-                      <a:tailEnd type="none" w="med" len="med"/>
-                    </a:lnL>
-                    <a:lnR w="6350" cap="flat" cmpd="sng" algn="ctr">
-                      <a:solidFill>
-                        <a:srgbClr val="C9D3E0"/>
-                      </a:solidFill>
-                      <a:prstDash val="solid"/>
-                      <a:round/>
-                      <a:headEnd type="none" w="med" len="med"/>
-                      <a:tailEnd type="none" w="med" len="med"/>
-                    </a:lnR>
-                    <a:lnT w="6350" cap="flat" cmpd="sng" algn="ctr">
-                      <a:solidFill>
-                        <a:srgbClr val="C9D3E0"/>
-                      </a:solidFill>
-                      <a:prstDash val="solid"/>
-                      <a:round/>
-                      <a:headEnd type="none" w="med" len="med"/>
-                      <a:tailEnd type="none" w="med" len="med"/>
-                    </a:lnT>
-                    <a:lnB w="6350" cap="flat" cmpd="sng" algn="ctr">
-                      <a:solidFill>
-                        <a:srgbClr val="C9D3E0"/>
-                      </a:solidFill>
-                      <a:prstDash val="solid"/>
-                      <a:round/>
-                      <a:headEnd type="none" w="med" len="med"/>
-                      <a:tailEnd type="none" w="med" len="med"/>
-                    </a:lnB>
-                    <a:solidFill>
-                      <a:srgbClr val="FFFFFF"/>
-                    </a:solidFill>
-                  </a:tcPr>
-                </a:tc>
-              </a:tr>
-              <a:tr h="283464">
-                <a:tc>
-                  <a:txBody>
-                    <a:bodyPr/>
-                    <a:lstStyle/>
-                    <a:p>
-                      <a:pPr indent="0" marL="0">
-                        <a:buNone/>
-                      </a:pPr>
-                      <a:r>
-                        <a:rPr lang="en-US" sz="1100" dirty="0">
-                          <a:solidFill>
-                            <a:srgbClr val="1B2430"/>
-                          </a:solidFill>
-                          <a:latin typeface="Calibri" pitchFamily="34" charset="0"/>
-                          <a:ea typeface="Calibri" pitchFamily="34" charset="-122"/>
-                          <a:cs typeface="Calibri" pitchFamily="34" charset="-120"/>
-                        </a:rPr>
-                        <a:t>Кримпер + LAN-тестер</a:t>
-                      </a:r>
-                      <a:endParaRPr lang="en-US" sz="1100" dirty="0">
-                        <a:latin typeface="Calibri" charset="0"/>
-                        <a:ea typeface="Calibri" charset="0"/>
-                        <a:cs typeface="Calibri" charset="0"/>
-                      </a:endParaRPr>
-                    </a:p>
-                  </a:txBody>
-                  <a:tcPr marL="91440" marR="91440" marT="45720" marB="45720" anchor="ctr">
-                    <a:lnL w="6350" cap="flat" cmpd="sng" algn="ctr">
-                      <a:solidFill>
-                        <a:srgbClr val="C9D3E0"/>
-                      </a:solidFill>
-                      <a:prstDash val="solid"/>
-                      <a:round/>
-                      <a:headEnd type="none" w="med" len="med"/>
-                      <a:tailEnd type="none" w="med" len="med"/>
-                    </a:lnL>
-                    <a:lnR w="6350" cap="flat" cmpd="sng" algn="ctr">
-                      <a:solidFill>
-                        <a:srgbClr val="C9D3E0"/>
-                      </a:solidFill>
-                      <a:prstDash val="solid"/>
-                      <a:round/>
-                      <a:headEnd type="none" w="med" len="med"/>
-                      <a:tailEnd type="none" w="med" len="med"/>
-                    </a:lnR>
-                    <a:lnT w="6350" cap="flat" cmpd="sng" algn="ctr">
-                      <a:solidFill>
-                        <a:srgbClr val="C9D3E0"/>
-                      </a:solidFill>
-                      <a:prstDash val="solid"/>
-                      <a:round/>
-                      <a:headEnd type="none" w="med" len="med"/>
-                      <a:tailEnd type="none" w="med" len="med"/>
-                    </a:lnT>
-                    <a:lnB w="6350" cap="flat" cmpd="sng" algn="ctr">
-                      <a:solidFill>
-                        <a:srgbClr val="C9D3E0"/>
-                      </a:solidFill>
-                      <a:prstDash val="solid"/>
-                      <a:round/>
-                      <a:headEnd type="none" w="med" len="med"/>
-                      <a:tailEnd type="none" w="med" len="med"/>
-                    </a:lnB>
-                    <a:solidFill>
-                      <a:srgbClr val="F4F7FB"/>
-                    </a:solidFill>
-                  </a:tcPr>
-                </a:tc>
-                <a:tc>
-                  <a:txBody>
-                    <a:bodyPr/>
-                    <a:lstStyle/>
-                    <a:p>
-                      <a:pPr algn="r" indent="0" marL="0">
-                        <a:buNone/>
-                      </a:pPr>
-                      <a:r>
-                        <a:rPr lang="en-US" sz="1100" dirty="0">
-                          <a:solidFill>
-                            <a:srgbClr val="1B2430"/>
-                          </a:solidFill>
-                          <a:latin typeface="Calibri" pitchFamily="34" charset="0"/>
-                          <a:ea typeface="Calibri" pitchFamily="34" charset="-122"/>
-                          <a:cs typeface="Calibri" pitchFamily="34" charset="-120"/>
-                        </a:rPr>
-                        <a:t>1</a:t>
-                      </a:r>
-                      <a:endParaRPr lang="en-US" sz="1100" dirty="0">
-                        <a:latin typeface="Calibri" charset="0"/>
-                        <a:ea typeface="Calibri" charset="0"/>
-                        <a:cs typeface="Calibri" charset="0"/>
-                      </a:endParaRPr>
-                    </a:p>
-                  </a:txBody>
-                  <a:tcPr marL="91440" marR="91440" marT="45720" marB="45720" anchor="ctr">
-                    <a:lnL w="6350" cap="flat" cmpd="sng" algn="ctr">
-                      <a:solidFill>
-                        <a:srgbClr val="C9D3E0"/>
-                      </a:solidFill>
-                      <a:prstDash val="solid"/>
-                      <a:round/>
-                      <a:headEnd type="none" w="med" len="med"/>
-                      <a:tailEnd type="none" w="med" len="med"/>
-                    </a:lnL>
-                    <a:lnR w="6350" cap="flat" cmpd="sng" algn="ctr">
-                      <a:solidFill>
-                        <a:srgbClr val="C9D3E0"/>
-                      </a:solidFill>
-                      <a:prstDash val="solid"/>
-                      <a:round/>
-                      <a:headEnd type="none" w="med" len="med"/>
-                      <a:tailEnd type="none" w="med" len="med"/>
-                    </a:lnR>
-                    <a:lnT w="6350" cap="flat" cmpd="sng" algn="ctr">
-                      <a:solidFill>
-                        <a:srgbClr val="C9D3E0"/>
-                      </a:solidFill>
-                      <a:prstDash val="solid"/>
-                      <a:round/>
-                      <a:headEnd type="none" w="med" len="med"/>
-                      <a:tailEnd type="none" w="med" len="med"/>
-                    </a:lnT>
-                    <a:lnB w="6350" cap="flat" cmpd="sng" algn="ctr">
-                      <a:solidFill>
-                        <a:srgbClr val="C9D3E0"/>
-                      </a:solidFill>
-                      <a:prstDash val="solid"/>
-                      <a:round/>
-                      <a:headEnd type="none" w="med" len="med"/>
-                      <a:tailEnd type="none" w="med" len="med"/>
-                    </a:lnB>
-                    <a:solidFill>
-                      <a:srgbClr val="F4F7FB"/>
-                    </a:solidFill>
-                  </a:tcPr>
-                </a:tc>
-                <a:tc>
-                  <a:txBody>
-                    <a:bodyPr/>
-                    <a:lstStyle/>
-                    <a:p>
-                      <a:pPr algn="r" indent="0" marL="0">
-                        <a:buNone/>
-                      </a:pPr>
-                      <a:r>
-                        <a:rPr lang="en-US" sz="1100" dirty="0">
-                          <a:solidFill>
-                            <a:srgbClr val="1B2430"/>
-                          </a:solidFill>
-                          <a:latin typeface="Calibri" pitchFamily="34" charset="0"/>
-                          <a:ea typeface="Calibri" pitchFamily="34" charset="-122"/>
-                          <a:cs typeface="Calibri" pitchFamily="34" charset="-120"/>
-                        </a:rPr>
-                        <a:t>3 500 ₽</a:t>
-                      </a:r>
-                      <a:endParaRPr lang="en-US" sz="1100" dirty="0">
-                        <a:latin typeface="Calibri" charset="0"/>
-                        <a:ea typeface="Calibri" charset="0"/>
-                        <a:cs typeface="Calibri" charset="0"/>
-                      </a:endParaRPr>
-                    </a:p>
-                  </a:txBody>
-                  <a:tcPr marL="91440" marR="91440" marT="45720" marB="45720" anchor="ctr">
-                    <a:lnL w="6350" cap="flat" cmpd="sng" algn="ctr">
-                      <a:solidFill>
-                        <a:srgbClr val="C9D3E0"/>
-                      </a:solidFill>
-                      <a:prstDash val="solid"/>
-                      <a:round/>
-                      <a:headEnd type="none" w="med" len="med"/>
-                      <a:tailEnd type="none" w="med" len="med"/>
-                    </a:lnL>
-                    <a:lnR w="6350" cap="flat" cmpd="sng" algn="ctr">
-                      <a:solidFill>
-                        <a:srgbClr val="C9D3E0"/>
-                      </a:solidFill>
-                      <a:prstDash val="solid"/>
-                      <a:round/>
-                      <a:headEnd type="none" w="med" len="med"/>
-                      <a:tailEnd type="none" w="med" len="med"/>
-                    </a:lnR>
-                    <a:lnT w="6350" cap="flat" cmpd="sng" algn="ctr">
-                      <a:solidFill>
-                        <a:srgbClr val="C9D3E0"/>
-                      </a:solidFill>
-                      <a:prstDash val="solid"/>
-                      <a:round/>
-                      <a:headEnd type="none" w="med" len="med"/>
-                      <a:tailEnd type="none" w="med" len="med"/>
-                    </a:lnT>
-                    <a:lnB w="6350" cap="flat" cmpd="sng" algn="ctr">
-                      <a:solidFill>
-                        <a:srgbClr val="C9D3E0"/>
-                      </a:solidFill>
-                      <a:prstDash val="solid"/>
-                      <a:round/>
-                      <a:headEnd type="none" w="med" len="med"/>
-                      <a:tailEnd type="none" w="med" len="med"/>
-                    </a:lnB>
-                    <a:solidFill>
-                      <a:srgbClr val="F4F7FB"/>
-                    </a:solidFill>
-                  </a:tcPr>
-                </a:tc>
-                <a:tc>
-                  <a:txBody>
-                    <a:bodyPr/>
-                    <a:lstStyle/>
-                    <a:p>
-                      <a:pPr algn="r" indent="0" marL="0">
-                        <a:buNone/>
-                      </a:pPr>
-                      <a:r>
-                        <a:rPr lang="en-US" sz="1100" b="1" dirty="0">
-                          <a:solidFill>
-                            <a:srgbClr val="1B2430"/>
-                          </a:solidFill>
-                          <a:latin typeface="Calibri" pitchFamily="34" charset="0"/>
-                          <a:ea typeface="Calibri" pitchFamily="34" charset="-122"/>
-                          <a:cs typeface="Calibri" pitchFamily="34" charset="-120"/>
-                        </a:rPr>
-                        <a:t>3 500 ₽</a:t>
-                      </a:r>
-                      <a:endParaRPr lang="en-US" sz="1100" dirty="0">
-                        <a:latin typeface="Calibri" charset="0"/>
-                        <a:ea typeface="Calibri" charset="0"/>
-                        <a:cs typeface="Calibri" charset="0"/>
-                      </a:endParaRPr>
-                    </a:p>
-                  </a:txBody>
-                  <a:tcPr marL="91440" marR="91440" marT="45720" marB="45720" anchor="ctr">
-                    <a:lnL w="6350" cap="flat" cmpd="sng" algn="ctr">
-                      <a:solidFill>
-                        <a:srgbClr val="C9D3E0"/>
-                      </a:solidFill>
-                      <a:prstDash val="solid"/>
-                      <a:round/>
-                      <a:headEnd type="none" w="med" len="med"/>
-                      <a:tailEnd type="none" w="med" len="med"/>
-                    </a:lnL>
-                    <a:lnR w="6350" cap="flat" cmpd="sng" algn="ctr">
-                      <a:solidFill>
-                        <a:srgbClr val="C9D3E0"/>
-                      </a:solidFill>
-                      <a:prstDash val="solid"/>
-                      <a:round/>
-                      <a:headEnd type="none" w="med" len="med"/>
-                      <a:tailEnd type="none" w="med" len="med"/>
-                    </a:lnR>
-                    <a:lnT w="6350" cap="flat" cmpd="sng" algn="ctr">
-                      <a:solidFill>
-                        <a:srgbClr val="C9D3E0"/>
-                      </a:solidFill>
-                      <a:prstDash val="solid"/>
-                      <a:round/>
-                      <a:headEnd type="none" w="med" len="med"/>
-                      <a:tailEnd type="none" w="med" len="med"/>
-                    </a:lnT>
-                    <a:lnB w="6350" cap="flat" cmpd="sng" algn="ctr">
-                      <a:solidFill>
-                        <a:srgbClr val="C9D3E0"/>
-                      </a:solidFill>
-                      <a:prstDash val="solid"/>
-                      <a:round/>
-                      <a:headEnd type="none" w="med" len="med"/>
-                      <a:tailEnd type="none" w="med" len="med"/>
-                    </a:lnB>
-                    <a:solidFill>
-                      <a:srgbClr val="F4F7FB"/>
-                    </a:solidFill>
-                  </a:tcPr>
-                </a:tc>
-              </a:tr>
-              <a:tr h="283464">
-                <a:tc>
-                  <a:txBody>
-                    <a:bodyPr/>
-                    <a:lstStyle/>
-                    <a:p>
-                      <a:pPr indent="0" marL="0">
-                        <a:buNone/>
-                      </a:pPr>
-                      <a:r>
-                        <a:rPr lang="en-US" sz="1100" dirty="0">
-                          <a:solidFill>
-                            <a:srgbClr val="1B2430"/>
-                          </a:solidFill>
-                          <a:latin typeface="Calibri" pitchFamily="34" charset="0"/>
-                          <a:ea typeface="Calibri" pitchFamily="34" charset="-122"/>
-                          <a:cs typeface="Calibri" pitchFamily="34" charset="-120"/>
-                        </a:rPr>
-                        <a:t>Стяжки, маркировка, крепёж (комплект)</a:t>
-                      </a:r>
-                      <a:endParaRPr lang="en-US" sz="1100" dirty="0">
-                        <a:latin typeface="Calibri" charset="0"/>
-                        <a:ea typeface="Calibri" charset="0"/>
-                        <a:cs typeface="Calibri" charset="0"/>
-                      </a:endParaRPr>
-                    </a:p>
-                  </a:txBody>
-                  <a:tcPr marL="91440" marR="91440" marT="45720" marB="45720" anchor="ctr">
-                    <a:lnL w="6350" cap="flat" cmpd="sng" algn="ctr">
-                      <a:solidFill>
-                        <a:srgbClr val="C9D3E0"/>
-                      </a:solidFill>
-                      <a:prstDash val="solid"/>
-                      <a:round/>
-                      <a:headEnd type="none" w="med" len="med"/>
-                      <a:tailEnd type="none" w="med" len="med"/>
-                    </a:lnL>
-                    <a:lnR w="6350" cap="flat" cmpd="sng" algn="ctr">
-                      <a:solidFill>
-                        <a:srgbClr val="C9D3E0"/>
-                      </a:solidFill>
-                      <a:prstDash val="solid"/>
-                      <a:round/>
-                      <a:headEnd type="none" w="med" len="med"/>
-                      <a:tailEnd type="none" w="med" len="med"/>
-                    </a:lnR>
-                    <a:lnT w="6350" cap="flat" cmpd="sng" algn="ctr">
-                      <a:solidFill>
-                        <a:srgbClr val="C9D3E0"/>
-                      </a:solidFill>
-                      <a:prstDash val="solid"/>
-                      <a:round/>
-                      <a:headEnd type="none" w="med" len="med"/>
-                      <a:tailEnd type="none" w="med" len="med"/>
-                    </a:lnT>
-                    <a:lnB w="6350" cap="flat" cmpd="sng" algn="ctr">
-                      <a:solidFill>
-                        <a:srgbClr val="C9D3E0"/>
-                      </a:solidFill>
-                      <a:prstDash val="solid"/>
-                      <a:round/>
-                      <a:headEnd type="none" w="med" len="med"/>
-                      <a:tailEnd type="none" w="med" len="med"/>
-                    </a:lnB>
-                    <a:solidFill>
-                      <a:srgbClr val="FFFFFF"/>
-                    </a:solidFill>
-                  </a:tcPr>
-                </a:tc>
-                <a:tc>
-                  <a:txBody>
-                    <a:bodyPr/>
-                    <a:lstStyle/>
-                    <a:p>
-                      <a:pPr algn="r" indent="0" marL="0">
-                        <a:buNone/>
-                      </a:pPr>
-                      <a:r>
-                        <a:rPr lang="en-US" sz="1100" dirty="0">
-                          <a:solidFill>
-                            <a:srgbClr val="1B2430"/>
-                          </a:solidFill>
-                          <a:latin typeface="Calibri" pitchFamily="34" charset="0"/>
-                          <a:ea typeface="Calibri" pitchFamily="34" charset="-122"/>
-                          <a:cs typeface="Calibri" pitchFamily="34" charset="-120"/>
-                        </a:rPr>
-                        <a:t>1</a:t>
-                      </a:r>
-                      <a:endParaRPr lang="en-US" sz="1100" dirty="0">
-                        <a:latin typeface="Calibri" charset="0"/>
-                        <a:ea typeface="Calibri" charset="0"/>
-                        <a:cs typeface="Calibri" charset="0"/>
-                      </a:endParaRPr>
-                    </a:p>
-                  </a:txBody>
-                  <a:tcPr marL="91440" marR="91440" marT="45720" marB="45720" anchor="ctr">
-                    <a:lnL w="6350" cap="flat" cmpd="sng" algn="ctr">
-                      <a:solidFill>
-                        <a:srgbClr val="C9D3E0"/>
-                      </a:solidFill>
-                      <a:prstDash val="solid"/>
-                      <a:round/>
-                      <a:headEnd type="none" w="med" len="med"/>
-                      <a:tailEnd type="none" w="med" len="med"/>
-                    </a:lnL>
-                    <a:lnR w="6350" cap="flat" cmpd="sng" algn="ctr">
-                      <a:solidFill>
-                        <a:srgbClr val="C9D3E0"/>
-                      </a:solidFill>
-                      <a:prstDash val="solid"/>
-                      <a:round/>
-                      <a:headEnd type="none" w="med" len="med"/>
-                      <a:tailEnd type="none" w="med" len="med"/>
-                    </a:lnR>
-                    <a:lnT w="6350" cap="flat" cmpd="sng" algn="ctr">
-                      <a:solidFill>
-                        <a:srgbClr val="C9D3E0"/>
-                      </a:solidFill>
-                      <a:prstDash val="solid"/>
-                      <a:round/>
-                      <a:headEnd type="none" w="med" len="med"/>
-                      <a:tailEnd type="none" w="med" len="med"/>
-                    </a:lnT>
-                    <a:lnB w="6350" cap="flat" cmpd="sng" algn="ctr">
-                      <a:solidFill>
-                        <a:srgbClr val="C9D3E0"/>
-                      </a:solidFill>
-                      <a:prstDash val="solid"/>
-                      <a:round/>
-                      <a:headEnd type="none" w="med" len="med"/>
-                      <a:tailEnd type="none" w="med" len="med"/>
-                    </a:lnB>
-                    <a:solidFill>
-                      <a:srgbClr val="FFFFFF"/>
-                    </a:solidFill>
-                  </a:tcPr>
-                </a:tc>
-                <a:tc>
-                  <a:txBody>
-                    <a:bodyPr/>
-                    <a:lstStyle/>
-                    <a:p>
-                      <a:pPr algn="r" indent="0" marL="0">
-                        <a:buNone/>
-                      </a:pPr>
-                      <a:r>
-                        <a:rPr lang="en-US" sz="1100" dirty="0">
-                          <a:solidFill>
-                            <a:srgbClr val="1B2430"/>
-                          </a:solidFill>
-                          <a:latin typeface="Calibri" pitchFamily="34" charset="0"/>
-                          <a:ea typeface="Calibri" pitchFamily="34" charset="-122"/>
-                          <a:cs typeface="Calibri" pitchFamily="34" charset="-120"/>
-                        </a:rPr>
-                        <a:t>1 500 ₽</a:t>
-                      </a:r>
-                      <a:endParaRPr lang="en-US" sz="1100" dirty="0">
-                        <a:latin typeface="Calibri" charset="0"/>
-                        <a:ea typeface="Calibri" charset="0"/>
-                        <a:cs typeface="Calibri" charset="0"/>
-                      </a:endParaRPr>
-                    </a:p>
-                  </a:txBody>
-                  <a:tcPr marL="91440" marR="91440" marT="45720" marB="45720" anchor="ctr">
-                    <a:lnL w="6350" cap="flat" cmpd="sng" algn="ctr">
-                      <a:solidFill>
-                        <a:srgbClr val="C9D3E0"/>
-                      </a:solidFill>
-                      <a:prstDash val="solid"/>
-                      <a:round/>
-                      <a:headEnd type="none" w="med" len="med"/>
-                      <a:tailEnd type="none" w="med" len="med"/>
-                    </a:lnL>
-                    <a:lnR w="6350" cap="flat" cmpd="sng" algn="ctr">
-                      <a:solidFill>
-                        <a:srgbClr val="C9D3E0"/>
-                      </a:solidFill>
-                      <a:prstDash val="solid"/>
-                      <a:round/>
-                      <a:headEnd type="none" w="med" len="med"/>
-                      <a:tailEnd type="none" w="med" len="med"/>
-                    </a:lnR>
-                    <a:lnT w="6350" cap="flat" cmpd="sng" algn="ctr">
-                      <a:solidFill>
-                        <a:srgbClr val="C9D3E0"/>
-                      </a:solidFill>
-                      <a:prstDash val="solid"/>
-                      <a:round/>
-                      <a:headEnd type="none" w="med" len="med"/>
-                      <a:tailEnd type="none" w="med" len="med"/>
-                    </a:lnT>
-                    <a:lnB w="6350" cap="flat" cmpd="sng" algn="ctr">
-                      <a:solidFill>
-                        <a:srgbClr val="C9D3E0"/>
-                      </a:solidFill>
-                      <a:prstDash val="solid"/>
-                      <a:round/>
-                      <a:headEnd type="none" w="med" len="med"/>
-                      <a:tailEnd type="none" w="med" len="med"/>
-                    </a:lnB>
-                    <a:solidFill>
-                      <a:srgbClr val="FFFFFF"/>
-                    </a:solidFill>
-                  </a:tcPr>
-                </a:tc>
-                <a:tc>
-                  <a:txBody>
-                    <a:bodyPr/>
-                    <a:lstStyle/>
-                    <a:p>
-                      <a:pPr algn="r" indent="0" marL="0">
-                        <a:buNone/>
-                      </a:pPr>
-                      <a:r>
-                        <a:rPr lang="en-US" sz="1100" b="1" dirty="0">
-                          <a:solidFill>
-                            <a:srgbClr val="1B2430"/>
-                          </a:solidFill>
-                          <a:latin typeface="Calibri" pitchFamily="34" charset="0"/>
-                          <a:ea typeface="Calibri" pitchFamily="34" charset="-122"/>
-                          <a:cs typeface="Calibri" pitchFamily="34" charset="-120"/>
-                        </a:rPr>
-                        <a:t>1 500 ₽</a:t>
-                      </a:r>
-                      <a:endParaRPr lang="en-US" sz="1100" dirty="0">
-                        <a:latin typeface="Calibri" charset="0"/>
-                        <a:ea typeface="Calibri" charset="0"/>
-                        <a:cs typeface="Calibri" charset="0"/>
-                      </a:endParaRPr>
-                    </a:p>
-                  </a:txBody>
-                  <a:tcPr marL="91440" marR="91440" marT="45720" marB="45720" anchor="ctr">
-                    <a:lnL w="6350" cap="flat" cmpd="sng" algn="ctr">
-                      <a:solidFill>
-                        <a:srgbClr val="C9D3E0"/>
-                      </a:solidFill>
-                      <a:prstDash val="solid"/>
-                      <a:round/>
-                      <a:headEnd type="none" w="med" len="med"/>
-                      <a:tailEnd type="none" w="med" len="med"/>
-                    </a:lnL>
-                    <a:lnR w="6350" cap="flat" cmpd="sng" algn="ctr">
-                      <a:solidFill>
-                        <a:srgbClr val="C9D3E0"/>
-                      </a:solidFill>
-                      <a:prstDash val="solid"/>
-                      <a:round/>
-                      <a:headEnd type="none" w="med" len="med"/>
-                      <a:tailEnd type="none" w="med" len="med"/>
-                    </a:lnR>
-                    <a:lnT w="6350" cap="flat" cmpd="sng" algn="ctr">
-                      <a:solidFill>
-                        <a:srgbClr val="C9D3E0"/>
-                      </a:solidFill>
-                      <a:prstDash val="solid"/>
-                      <a:round/>
-                      <a:headEnd type="none" w="med" len="med"/>
-                      <a:tailEnd type="none" w="med" len="med"/>
-                    </a:lnT>
-                    <a:lnB w="6350" cap="flat" cmpd="sng" algn="ctr">
-                      <a:solidFill>
-                        <a:srgbClr val="C9D3E0"/>
-                      </a:solidFill>
-                      <a:prstDash val="solid"/>
-                      <a:round/>
-                      <a:headEnd type="none" w="med" len="med"/>
-                      <a:tailEnd type="none" w="med" len="med"/>
-                    </a:lnB>
-                    <a:solidFill>
-                      <a:srgbClr val="FFFFFF"/>
-                    </a:solidFill>
-                  </a:tcPr>
-                </a:tc>
-              </a:tr>
-              <a:tr h="283464">
-                <a:tc gridSpan="3">
-                  <a:txBody>
-                    <a:bodyPr/>
-                    <a:lstStyle/>
-                    <a:p>
-                      <a:pPr indent="0" marL="0">
-                        <a:buNone/>
-                      </a:pPr>
-                      <a:r>
-                        <a:rPr lang="en-US" sz="1100" b="1" dirty="0">
-                          <a:solidFill>
-                            <a:srgbClr val="FFFFFF"/>
-                          </a:solidFill>
-                          <a:latin typeface="Calibri" pitchFamily="34" charset="0"/>
-                          <a:ea typeface="Calibri" pitchFamily="34" charset="-122"/>
-                          <a:cs typeface="Calibri" pitchFamily="34" charset="-120"/>
-                        </a:rPr>
-                        <a:t>Итого расходные материалы</a:t>
-                      </a:r>
-                      <a:endParaRPr lang="en-US" sz="1100" dirty="0">
-                        <a:latin typeface="Calibri" charset="0"/>
-                        <a:ea typeface="Calibri" charset="0"/>
-                        <a:cs typeface="Calibri" charset="0"/>
-                      </a:endParaRPr>
-                    </a:p>
-                  </a:txBody>
-                  <a:tcPr marL="91440" marR="91440" marT="45720" marB="45720" anchor="ctr">
-                    <a:lnL w="6350" cap="flat" cmpd="sng" algn="ctr">
-                      <a:solidFill>
-                        <a:srgbClr val="C9D3E0"/>
-                      </a:solidFill>
-                      <a:prstDash val="solid"/>
-                      <a:round/>
-                      <a:headEnd type="none" w="med" len="med"/>
-                      <a:tailEnd type="none" w="med" len="med"/>
-                    </a:lnL>
-                    <a:lnR w="6350" cap="flat" cmpd="sng" algn="ctr">
-                      <a:solidFill>
-                        <a:srgbClr val="C9D3E0"/>
-                      </a:solidFill>
-                      <a:prstDash val="solid"/>
-                      <a:round/>
-                      <a:headEnd type="none" w="med" len="med"/>
-                      <a:tailEnd type="none" w="med" len="med"/>
-                    </a:lnR>
-                    <a:lnT w="6350" cap="flat" cmpd="sng" algn="ctr">
-                      <a:solidFill>
-                        <a:srgbClr val="C9D3E0"/>
-                      </a:solidFill>
-                      <a:prstDash val="solid"/>
-                      <a:round/>
-                      <a:headEnd type="none" w="med" len="med"/>
-                      <a:tailEnd type="none" w="med" len="med"/>
-                    </a:lnT>
-                    <a:lnB w="6350" cap="flat" cmpd="sng" algn="ctr">
-                      <a:solidFill>
-                        <a:srgbClr val="C9D3E0"/>
-                      </a:solidFill>
-                      <a:prstDash val="solid"/>
-                      <a:round/>
-                      <a:headEnd type="none" w="med" len="med"/>
-                      <a:tailEnd type="none" w="med" len="med"/>
-                    </a:lnB>
-                    <a:solidFill>
-                      <a:srgbClr val="0B1F3A"/>
-                    </a:solidFill>
-                  </a:tcPr>
-                </a:tc>
-                <a:tc hMerge="1">
-                  <a:tcPr/>
-                </a:tc>
-                <a:tc hMerge="1">
-                  <a:tcPr/>
-                </a:tc>
-                <a:tc>
-                  <a:txBody>
-                    <a:bodyPr/>
-                    <a:lstStyle/>
-                    <a:p>
-                      <a:pPr algn="r" indent="0" marL="0">
-                        <a:buNone/>
-                      </a:pPr>
-                      <a:r>
-                        <a:rPr lang="en-US" sz="1100" b="1" dirty="0">
-                          <a:solidFill>
-                            <a:srgbClr val="FFFFFF"/>
-                          </a:solidFill>
-                          <a:latin typeface="Calibri" pitchFamily="34" charset="0"/>
-                          <a:ea typeface="Calibri" pitchFamily="34" charset="-122"/>
-                          <a:cs typeface="Calibri" pitchFamily="34" charset="-120"/>
-                        </a:rPr>
-                        <a:t>41 300 ₽</a:t>
-                      </a:r>
-                      <a:endParaRPr lang="en-US" sz="1100" dirty="0">
-                        <a:latin typeface="Calibri" charset="0"/>
-                        <a:ea typeface="Calibri" charset="0"/>
-                        <a:cs typeface="Calibri" charset="0"/>
-                      </a:endParaRPr>
-                    </a:p>
-                  </a:txBody>
-                  <a:tcPr marL="91440" marR="91440" marT="45720" marB="45720" anchor="ctr">
-                    <a:lnL w="6350" cap="flat" cmpd="sng" algn="ctr">
-                      <a:solidFill>
-                        <a:srgbClr val="C9D3E0"/>
-                      </a:solidFill>
-                      <a:prstDash val="solid"/>
-                      <a:round/>
-                      <a:headEnd type="none" w="med" len="med"/>
-                      <a:tailEnd type="none" w="med" len="med"/>
-                    </a:lnL>
-                    <a:lnR w="6350" cap="flat" cmpd="sng" algn="ctr">
-                      <a:solidFill>
-                        <a:srgbClr val="C9D3E0"/>
-                      </a:solidFill>
-                      <a:prstDash val="solid"/>
-                      <a:round/>
-                      <a:headEnd type="none" w="med" len="med"/>
-                      <a:tailEnd type="none" w="med" len="med"/>
-                    </a:lnR>
-                    <a:lnT w="6350" cap="flat" cmpd="sng" algn="ctr">
-                      <a:solidFill>
-                        <a:srgbClr val="C9D3E0"/>
-                      </a:solidFill>
-                      <a:prstDash val="solid"/>
-                      <a:round/>
-                      <a:headEnd type="none" w="med" len="med"/>
-                      <a:tailEnd type="none" w="med" len="med"/>
-                    </a:lnT>
-                    <a:lnB w="6350" cap="flat" cmpd="sng" algn="ctr">
-                      <a:solidFill>
-                        <a:srgbClr val="C9D3E0"/>
-                      </a:solidFill>
-                      <a:prstDash val="solid"/>
-                      <a:round/>
-                      <a:headEnd type="none" w="med" len="med"/>
-                      <a:tailEnd type="none" w="med" len="med"/>
-                    </a:lnB>
-                    <a:solidFill>
-                      <a:srgbClr val="0B1F3A"/>
-                    </a:solidFill>
-                  </a:tcPr>
-                </a:tc>
-              </a:tr>
-            </a:tbl>
-          </a:graphicData>
-        </a:graphic>
-      </p:graphicFrame>
+      <p:sp>
+        <p:nvSpPr>
+          <p:cNvPr id="4" name="Shape 2"/>
+          <p:cNvSpPr/>
+          <p:nvPr/>
+        </p:nvSpPr>
+        <p:spPr>
+          <a:xfrm>
+            <a:off x="457200" y="1234440"/>
+            <a:ext cx="2651760" cy="850392"/>
+          </a:xfrm>
+          <a:prstGeom prst="roundRect">
+            <a:avLst>
+              <a:gd name="adj" fmla="val 8602"/>
+            </a:avLst>
+          </a:prstGeom>
+          <a:solidFill>
+            <a:srgbClr val="F4F7FB"/>
+          </a:solidFill>
+          <a:ln w="12700">
+            <a:solidFill>
+              <a:srgbClr val="F4F7FB"/>
+            </a:solidFill>
+            <a:prstDash val="solid"/>
+          </a:ln>
+          <a:effectLst>
+            <a:outerShdw sx="100000" sy="100000" kx="0" ky="0" algn="bl" rotWithShape="0" blurRad="76200" dist="25400" dir="5400000">
+              <a:srgbClr val="000000">
+                <a:alpha val="12000"/>
+              </a:srgbClr>
+            </a:outerShdw>
+          </a:effectLst>
+        </p:spPr>
+      </p:sp>
+      <p:pic>
+        <p:nvPicPr>
+          <p:cNvPr id="5" name="Image 0" descr="/private/tmp/claude-501/-Users-sergei/2bb89287-c36d-4b6a-b8e3-e06097a589c7/scratchpad/t/presentation/images/cable.jpg">    </p:cNvPr>
+          <p:cNvPicPr>
+            <a:picLocks noChangeAspect="1"/>
+          </p:cNvPicPr>
+          <p:nvPr/>
+        </p:nvPicPr>
+        <p:blipFill>
+          <a:blip r:embed="rId1"/>
+          <a:stretch>
+            <a:fillRect/>
+          </a:stretch>
+        </p:blipFill>
+        <p:spPr>
+          <a:xfrm>
+            <a:off x="530352" y="1310679"/>
+            <a:ext cx="868680" cy="697914"/>
+          </a:xfrm>
+          <a:prstGeom prst="rect">
+            <a:avLst/>
+          </a:prstGeom>
+        </p:spPr>
+      </p:pic>
+      <p:sp>
+        <p:nvSpPr>
+          <p:cNvPr id="6" name="Text 3"/>
+          <p:cNvSpPr txBox="1"/>
+          <p:nvPr/>
+        </p:nvSpPr>
+        <p:spPr>
+          <a:xfrm>
+            <a:off x="1481328" y="1307592"/>
+            <a:ext cx="1554480" cy="457200"/>
+          </a:xfrm>
+          <a:prstGeom prst="rect">
+            <a:avLst/>
+          </a:prstGeom>
+          <a:noFill/>
+          <a:ln/>
+        </p:spPr>
+        <p:txBody>
+          <a:bodyPr wrap="square" lIns="0" tIns="0" rIns="0" bIns="0" rtlCol="0" anchor="t"/>
+          <a:lstStyle/>
+          <a:p>
+            <a:pPr indent="0" marL="0">
+              <a:buNone/>
+            </a:pPr>
+            <a:r>
+              <a:rPr lang="en-US" sz="900" dirty="0">
+                <a:solidFill>
+                  <a:srgbClr val="1B2430"/>
+                </a:solidFill>
+                <a:latin typeface="Calibri" pitchFamily="34" charset="0"/>
+                <a:ea typeface="Calibri" pitchFamily="34" charset="-122"/>
+                <a:cs typeface="Calibri" pitchFamily="34" charset="-120"/>
+              </a:rPr>
+              <a:t>Кабель витая пара UTP Cat.5e, бухта 305 м</a:t>
+            </a:r>
+            <a:endParaRPr lang="en-US" sz="900" dirty="0"/>
+          </a:p>
+        </p:txBody>
+      </p:sp>
+      <p:sp>
+        <p:nvSpPr>
+          <p:cNvPr id="7" name="Text 4"/>
+          <p:cNvSpPr txBox="1"/>
+          <p:nvPr/>
+        </p:nvSpPr>
+        <p:spPr>
+          <a:xfrm>
+            <a:off x="1481328" y="1783080"/>
+            <a:ext cx="1600200" cy="228600"/>
+          </a:xfrm>
+          <a:prstGeom prst="rect">
+            <a:avLst/>
+          </a:prstGeom>
+          <a:noFill/>
+          <a:ln/>
+        </p:spPr>
+        <p:txBody>
+          <a:bodyPr wrap="square" lIns="0" tIns="0" rIns="0" bIns="0" rtlCol="0" anchor="ctr"/>
+          <a:lstStyle/>
+          <a:p>
+            <a:pPr indent="0" marL="0">
+              <a:buNone/>
+            </a:pPr>
+            <a:r>
+              <a:rPr lang="en-US" sz="900" dirty="0">
+                <a:solidFill>
+                  <a:srgbClr val="5B6675"/>
+                </a:solidFill>
+                <a:latin typeface="Calibri" pitchFamily="34" charset="0"/>
+                <a:ea typeface="Calibri" pitchFamily="34" charset="-122"/>
+                <a:cs typeface="Calibri" pitchFamily="34" charset="-120"/>
+              </a:rPr>
+              <a:t>2 × 7 500 ₽</a:t>
+            </a:r>
+            <a:pPr indent="0" marL="0">
+              <a:buNone/>
+            </a:pPr>
+            <a:r>
+              <a:rPr lang="en-US" sz="900" b="1" dirty="0">
+                <a:solidFill>
+                  <a:srgbClr val="22B573"/>
+                </a:solidFill>
+                <a:latin typeface="Calibri" pitchFamily="34" charset="0"/>
+                <a:ea typeface="Calibri" pitchFamily="34" charset="-122"/>
+                <a:cs typeface="Calibri" pitchFamily="34" charset="-120"/>
+              </a:rPr>
+              <a:t>  15 000 ₽</a:t>
+            </a:r>
+            <a:endParaRPr lang="en-US" sz="900" dirty="0"/>
+          </a:p>
+        </p:txBody>
+      </p:sp>
+      <p:sp>
+        <p:nvSpPr>
+          <p:cNvPr id="8" name="Shape 5"/>
+          <p:cNvSpPr/>
+          <p:nvPr/>
+        </p:nvSpPr>
+        <p:spPr>
+          <a:xfrm>
+            <a:off x="3246120" y="1234440"/>
+            <a:ext cx="2651760" cy="850392"/>
+          </a:xfrm>
+          <a:prstGeom prst="roundRect">
+            <a:avLst>
+              <a:gd name="adj" fmla="val 8602"/>
+            </a:avLst>
+          </a:prstGeom>
+          <a:solidFill>
+            <a:srgbClr val="F4F7FB"/>
+          </a:solidFill>
+          <a:ln w="12700">
+            <a:solidFill>
+              <a:srgbClr val="F4F7FB"/>
+            </a:solidFill>
+            <a:prstDash val="solid"/>
+          </a:ln>
+          <a:effectLst>
+            <a:outerShdw sx="100000" sy="100000" kx="0" ky="0" algn="bl" rotWithShape="0" blurRad="76200" dist="25400" dir="5400000">
+              <a:srgbClr val="000000">
+                <a:alpha val="12000"/>
+              </a:srgbClr>
+            </a:outerShdw>
+          </a:effectLst>
+        </p:spPr>
+      </p:sp>
+      <p:pic>
+        <p:nvPicPr>
+          <p:cNvPr id="9" name="Image 1" descr="/private/tmp/claude-501/-Users-sergei/2bb89287-c36d-4b6a-b8e3-e06097a589c7/scratchpad/t/presentation/images/rj45.jpg">    </p:cNvPr>
+          <p:cNvPicPr>
+            <a:picLocks noChangeAspect="1"/>
+          </p:cNvPicPr>
+          <p:nvPr/>
+        </p:nvPicPr>
+        <p:blipFill>
+          <a:blip r:embed="rId2"/>
+          <a:stretch>
+            <a:fillRect/>
+          </a:stretch>
+        </p:blipFill>
+        <p:spPr>
+          <a:xfrm>
+            <a:off x="3319272" y="1333881"/>
+            <a:ext cx="868680" cy="651510"/>
+          </a:xfrm>
+          <a:prstGeom prst="rect">
+            <a:avLst/>
+          </a:prstGeom>
+        </p:spPr>
+      </p:pic>
+      <p:sp>
+        <p:nvSpPr>
+          <p:cNvPr id="10" name="Text 6"/>
+          <p:cNvSpPr txBox="1"/>
+          <p:nvPr/>
+        </p:nvSpPr>
+        <p:spPr>
+          <a:xfrm>
+            <a:off x="4270248" y="1307592"/>
+            <a:ext cx="1554480" cy="457200"/>
+          </a:xfrm>
+          <a:prstGeom prst="rect">
+            <a:avLst/>
+          </a:prstGeom>
+          <a:noFill/>
+          <a:ln/>
+        </p:spPr>
+        <p:txBody>
+          <a:bodyPr wrap="square" lIns="0" tIns="0" rIns="0" bIns="0" rtlCol="0" anchor="t"/>
+          <a:lstStyle/>
+          <a:p>
+            <a:pPr indent="0" marL="0">
+              <a:buNone/>
+            </a:pPr>
+            <a:r>
+              <a:rPr lang="en-US" sz="900" dirty="0">
+                <a:solidFill>
+                  <a:srgbClr val="1B2430"/>
+                </a:solidFill>
+                <a:latin typeface="Calibri" pitchFamily="34" charset="0"/>
+                <a:ea typeface="Calibri" pitchFamily="34" charset="-122"/>
+                <a:cs typeface="Calibri" pitchFamily="34" charset="-120"/>
+              </a:rPr>
+              <a:t>Коннекторы RJ-45 8P8C (уп. 100 шт.)</a:t>
+            </a:r>
+            <a:endParaRPr lang="en-US" sz="900" dirty="0"/>
+          </a:p>
+        </p:txBody>
+      </p:sp>
+      <p:sp>
+        <p:nvSpPr>
+          <p:cNvPr id="11" name="Text 7"/>
+          <p:cNvSpPr txBox="1"/>
+          <p:nvPr/>
+        </p:nvSpPr>
+        <p:spPr>
+          <a:xfrm>
+            <a:off x="4270248" y="1783080"/>
+            <a:ext cx="1600200" cy="228600"/>
+          </a:xfrm>
+          <a:prstGeom prst="rect">
+            <a:avLst/>
+          </a:prstGeom>
+          <a:noFill/>
+          <a:ln/>
+        </p:spPr>
+        <p:txBody>
+          <a:bodyPr wrap="square" lIns="0" tIns="0" rIns="0" bIns="0" rtlCol="0" anchor="ctr"/>
+          <a:lstStyle/>
+          <a:p>
+            <a:pPr indent="0" marL="0">
+              <a:buNone/>
+            </a:pPr>
+            <a:r>
+              <a:rPr lang="en-US" sz="900" dirty="0">
+                <a:solidFill>
+                  <a:srgbClr val="5B6675"/>
+                </a:solidFill>
+                <a:latin typeface="Calibri" pitchFamily="34" charset="0"/>
+                <a:ea typeface="Calibri" pitchFamily="34" charset="-122"/>
+                <a:cs typeface="Calibri" pitchFamily="34" charset="-120"/>
+              </a:rPr>
+              <a:t>2 × 900 ₽</a:t>
+            </a:r>
+            <a:pPr indent="0" marL="0">
+              <a:buNone/>
+            </a:pPr>
+            <a:r>
+              <a:rPr lang="en-US" sz="900" b="1" dirty="0">
+                <a:solidFill>
+                  <a:srgbClr val="22B573"/>
+                </a:solidFill>
+                <a:latin typeface="Calibri" pitchFamily="34" charset="0"/>
+                <a:ea typeface="Calibri" pitchFamily="34" charset="-122"/>
+                <a:cs typeface="Calibri" pitchFamily="34" charset="-120"/>
+              </a:rPr>
+              <a:t>  1 800 ₽</a:t>
+            </a:r>
+            <a:endParaRPr lang="en-US" sz="900" dirty="0"/>
+          </a:p>
+        </p:txBody>
+      </p:sp>
+      <p:sp>
+        <p:nvSpPr>
+          <p:cNvPr id="12" name="Shape 8"/>
+          <p:cNvSpPr/>
+          <p:nvPr/>
+        </p:nvSpPr>
+        <p:spPr>
+          <a:xfrm>
+            <a:off x="6035040" y="1234440"/>
+            <a:ext cx="2651760" cy="850392"/>
+          </a:xfrm>
+          <a:prstGeom prst="roundRect">
+            <a:avLst>
+              <a:gd name="adj" fmla="val 8602"/>
+            </a:avLst>
+          </a:prstGeom>
+          <a:solidFill>
+            <a:srgbClr val="F4F7FB"/>
+          </a:solidFill>
+          <a:ln w="12700">
+            <a:solidFill>
+              <a:srgbClr val="F4F7FB"/>
+            </a:solidFill>
+            <a:prstDash val="solid"/>
+          </a:ln>
+          <a:effectLst>
+            <a:outerShdw sx="100000" sy="100000" kx="0" ky="0" algn="bl" rotWithShape="0" blurRad="76200" dist="25400" dir="5400000">
+              <a:srgbClr val="000000">
+                <a:alpha val="12000"/>
+              </a:srgbClr>
+            </a:outerShdw>
+          </a:effectLst>
+        </p:spPr>
+      </p:sp>
+      <p:pic>
+        <p:nvPicPr>
+          <p:cNvPr id="13" name="Image 2" descr="/private/tmp/claude-501/-Users-sergei/2bb89287-c36d-4b6a-b8e3-e06097a589c7/scratchpad/t/presentation/images/boot.jpg">    </p:cNvPr>
+          <p:cNvPicPr>
+            <a:picLocks noChangeAspect="1"/>
+          </p:cNvPicPr>
+          <p:nvPr/>
+        </p:nvPicPr>
+        <p:blipFill>
+          <a:blip r:embed="rId3"/>
+          <a:stretch>
+            <a:fillRect/>
+          </a:stretch>
+        </p:blipFill>
+        <p:spPr>
+          <a:xfrm>
+            <a:off x="6108192" y="1376059"/>
+            <a:ext cx="868680" cy="567155"/>
+          </a:xfrm>
+          <a:prstGeom prst="rect">
+            <a:avLst/>
+          </a:prstGeom>
+        </p:spPr>
+      </p:pic>
+      <p:sp>
+        <p:nvSpPr>
+          <p:cNvPr id="14" name="Text 9"/>
+          <p:cNvSpPr txBox="1"/>
+          <p:nvPr/>
+        </p:nvSpPr>
+        <p:spPr>
+          <a:xfrm>
+            <a:off x="7059168" y="1307592"/>
+            <a:ext cx="1554480" cy="457200"/>
+          </a:xfrm>
+          <a:prstGeom prst="rect">
+            <a:avLst/>
+          </a:prstGeom>
+          <a:noFill/>
+          <a:ln/>
+        </p:spPr>
+        <p:txBody>
+          <a:bodyPr wrap="square" lIns="0" tIns="0" rIns="0" bIns="0" rtlCol="0" anchor="t"/>
+          <a:lstStyle/>
+          <a:p>
+            <a:pPr indent="0" marL="0">
+              <a:buNone/>
+            </a:pPr>
+            <a:r>
+              <a:rPr lang="en-US" sz="900" dirty="0">
+                <a:solidFill>
+                  <a:srgbClr val="1B2430"/>
+                </a:solidFill>
+                <a:latin typeface="Calibri" pitchFamily="34" charset="0"/>
+                <a:ea typeface="Calibri" pitchFamily="34" charset="-122"/>
+                <a:cs typeface="Calibri" pitchFamily="34" charset="-120"/>
+              </a:rPr>
+              <a:t>Изолирующие колпачки (уп. 100 шт.)</a:t>
+            </a:r>
+            <a:endParaRPr lang="en-US" sz="900" dirty="0"/>
+          </a:p>
+        </p:txBody>
+      </p:sp>
+      <p:sp>
+        <p:nvSpPr>
+          <p:cNvPr id="15" name="Text 10"/>
+          <p:cNvSpPr txBox="1"/>
+          <p:nvPr/>
+        </p:nvSpPr>
+        <p:spPr>
+          <a:xfrm>
+            <a:off x="7059168" y="1783080"/>
+            <a:ext cx="1600200" cy="228600"/>
+          </a:xfrm>
+          <a:prstGeom prst="rect">
+            <a:avLst/>
+          </a:prstGeom>
+          <a:noFill/>
+          <a:ln/>
+        </p:spPr>
+        <p:txBody>
+          <a:bodyPr wrap="square" lIns="0" tIns="0" rIns="0" bIns="0" rtlCol="0" anchor="ctr"/>
+          <a:lstStyle/>
+          <a:p>
+            <a:pPr indent="0" marL="0">
+              <a:buNone/>
+            </a:pPr>
+            <a:r>
+              <a:rPr lang="en-US" sz="900" dirty="0">
+                <a:solidFill>
+                  <a:srgbClr val="5B6675"/>
+                </a:solidFill>
+                <a:latin typeface="Calibri" pitchFamily="34" charset="0"/>
+                <a:ea typeface="Calibri" pitchFamily="34" charset="-122"/>
+                <a:cs typeface="Calibri" pitchFamily="34" charset="-120"/>
+              </a:rPr>
+              <a:t>2 × 350 ₽</a:t>
+            </a:r>
+            <a:pPr indent="0" marL="0">
+              <a:buNone/>
+            </a:pPr>
+            <a:r>
+              <a:rPr lang="en-US" sz="900" b="1" dirty="0">
+                <a:solidFill>
+                  <a:srgbClr val="22B573"/>
+                </a:solidFill>
+                <a:latin typeface="Calibri" pitchFamily="34" charset="0"/>
+                <a:ea typeface="Calibri" pitchFamily="34" charset="-122"/>
+                <a:cs typeface="Calibri" pitchFamily="34" charset="-120"/>
+              </a:rPr>
+              <a:t>  700 ₽</a:t>
+            </a:r>
+            <a:endParaRPr lang="en-US" sz="900" dirty="0"/>
+          </a:p>
+        </p:txBody>
+      </p:sp>
+      <p:sp>
+        <p:nvSpPr>
+          <p:cNvPr id="16" name="Shape 11"/>
+          <p:cNvSpPr/>
+          <p:nvPr/>
+        </p:nvSpPr>
+        <p:spPr>
+          <a:xfrm>
+            <a:off x="457200" y="2148840"/>
+            <a:ext cx="2651760" cy="850392"/>
+          </a:xfrm>
+          <a:prstGeom prst="roundRect">
+            <a:avLst>
+              <a:gd name="adj" fmla="val 8602"/>
+            </a:avLst>
+          </a:prstGeom>
+          <a:solidFill>
+            <a:srgbClr val="F4F7FB"/>
+          </a:solidFill>
+          <a:ln w="12700">
+            <a:solidFill>
+              <a:srgbClr val="F4F7FB"/>
+            </a:solidFill>
+            <a:prstDash val="solid"/>
+          </a:ln>
+          <a:effectLst>
+            <a:outerShdw sx="100000" sy="100000" kx="0" ky="0" algn="bl" rotWithShape="0" blurRad="76200" dist="25400" dir="5400000">
+              <a:srgbClr val="000000">
+                <a:alpha val="12000"/>
+              </a:srgbClr>
+            </a:outerShdw>
+          </a:effectLst>
+        </p:spPr>
+      </p:sp>
+      <p:pic>
+        <p:nvPicPr>
+          <p:cNvPr id="17" name="Image 3" descr="/private/tmp/claude-501/-Users-sergei/2bb89287-c36d-4b6a-b8e3-e06097a589c7/scratchpad/t/presentation/images/panel.jpg">    </p:cNvPr>
+          <p:cNvPicPr>
+            <a:picLocks noChangeAspect="1"/>
+          </p:cNvPicPr>
+          <p:nvPr/>
+        </p:nvPicPr>
+        <p:blipFill>
+          <a:blip r:embed="rId4"/>
+          <a:stretch>
+            <a:fillRect/>
+          </a:stretch>
+        </p:blipFill>
+        <p:spPr>
+          <a:xfrm>
+            <a:off x="530352" y="2284928"/>
+            <a:ext cx="868680" cy="578215"/>
+          </a:xfrm>
+          <a:prstGeom prst="rect">
+            <a:avLst/>
+          </a:prstGeom>
+        </p:spPr>
+      </p:pic>
+      <p:sp>
+        <p:nvSpPr>
+          <p:cNvPr id="18" name="Text 12"/>
+          <p:cNvSpPr txBox="1"/>
+          <p:nvPr/>
+        </p:nvSpPr>
+        <p:spPr>
+          <a:xfrm>
+            <a:off x="1481328" y="2221992"/>
+            <a:ext cx="1554480" cy="457200"/>
+          </a:xfrm>
+          <a:prstGeom prst="rect">
+            <a:avLst/>
+          </a:prstGeom>
+          <a:noFill/>
+          <a:ln/>
+        </p:spPr>
+        <p:txBody>
+          <a:bodyPr wrap="square" lIns="0" tIns="0" rIns="0" bIns="0" rtlCol="0" anchor="t"/>
+          <a:lstStyle/>
+          <a:p>
+            <a:pPr indent="0" marL="0">
+              <a:buNone/>
+            </a:pPr>
+            <a:r>
+              <a:rPr lang="en-US" sz="900" dirty="0">
+                <a:solidFill>
+                  <a:srgbClr val="1B2430"/>
+                </a:solidFill>
+                <a:latin typeface="Calibri" pitchFamily="34" charset="0"/>
+                <a:ea typeface="Calibri" pitchFamily="34" charset="-122"/>
+                <a:cs typeface="Calibri" pitchFamily="34" charset="-120"/>
+              </a:rPr>
+              <a:t>Патч-панель 24 порта Cat.5e</a:t>
+            </a:r>
+            <a:endParaRPr lang="en-US" sz="900" dirty="0"/>
+          </a:p>
+        </p:txBody>
+      </p:sp>
+      <p:sp>
+        <p:nvSpPr>
+          <p:cNvPr id="19" name="Text 13"/>
+          <p:cNvSpPr txBox="1"/>
+          <p:nvPr/>
+        </p:nvSpPr>
+        <p:spPr>
+          <a:xfrm>
+            <a:off x="1481328" y="2697480"/>
+            <a:ext cx="1600200" cy="228600"/>
+          </a:xfrm>
+          <a:prstGeom prst="rect">
+            <a:avLst/>
+          </a:prstGeom>
+          <a:noFill/>
+          <a:ln/>
+        </p:spPr>
+        <p:txBody>
+          <a:bodyPr wrap="square" lIns="0" tIns="0" rIns="0" bIns="0" rtlCol="0" anchor="ctr"/>
+          <a:lstStyle/>
+          <a:p>
+            <a:pPr indent="0" marL="0">
+              <a:buNone/>
+            </a:pPr>
+            <a:r>
+              <a:rPr lang="en-US" sz="900" dirty="0">
+                <a:solidFill>
+                  <a:srgbClr val="5B6675"/>
+                </a:solidFill>
+                <a:latin typeface="Calibri" pitchFamily="34" charset="0"/>
+                <a:ea typeface="Calibri" pitchFamily="34" charset="-122"/>
+                <a:cs typeface="Calibri" pitchFamily="34" charset="-120"/>
+              </a:rPr>
+              <a:t>1 × 3 200 ₽</a:t>
+            </a:r>
+            <a:pPr indent="0" marL="0">
+              <a:buNone/>
+            </a:pPr>
+            <a:r>
+              <a:rPr lang="en-US" sz="900" b="1" dirty="0">
+                <a:solidFill>
+                  <a:srgbClr val="22B573"/>
+                </a:solidFill>
+                <a:latin typeface="Calibri" pitchFamily="34" charset="0"/>
+                <a:ea typeface="Calibri" pitchFamily="34" charset="-122"/>
+                <a:cs typeface="Calibri" pitchFamily="34" charset="-120"/>
+              </a:rPr>
+              <a:t>  3 200 ₽</a:t>
+            </a:r>
+            <a:endParaRPr lang="en-US" sz="900" dirty="0"/>
+          </a:p>
+        </p:txBody>
+      </p:sp>
+      <p:sp>
+        <p:nvSpPr>
+          <p:cNvPr id="20" name="Shape 14"/>
+          <p:cNvSpPr/>
+          <p:nvPr/>
+        </p:nvSpPr>
+        <p:spPr>
+          <a:xfrm>
+            <a:off x="3246120" y="2148840"/>
+            <a:ext cx="2651760" cy="850392"/>
+          </a:xfrm>
+          <a:prstGeom prst="roundRect">
+            <a:avLst>
+              <a:gd name="adj" fmla="val 8602"/>
+            </a:avLst>
+          </a:prstGeom>
+          <a:solidFill>
+            <a:srgbClr val="F4F7FB"/>
+          </a:solidFill>
+          <a:ln w="12700">
+            <a:solidFill>
+              <a:srgbClr val="F4F7FB"/>
+            </a:solidFill>
+            <a:prstDash val="solid"/>
+          </a:ln>
+          <a:effectLst>
+            <a:outerShdw sx="100000" sy="100000" kx="0" ky="0" algn="bl" rotWithShape="0" blurRad="76200" dist="25400" dir="5400000">
+              <a:srgbClr val="000000">
+                <a:alpha val="12000"/>
+              </a:srgbClr>
+            </a:outerShdw>
+          </a:effectLst>
+        </p:spPr>
+      </p:sp>
+      <p:pic>
+        <p:nvPicPr>
+          <p:cNvPr id="21" name="Image 4" descr="/private/tmp/claude-501/-Users-sergei/2bb89287-c36d-4b6a-b8e3-e06097a589c7/scratchpad/t/presentation/images/socket.jpg">    </p:cNvPr>
+          <p:cNvPicPr>
+            <a:picLocks noChangeAspect="1"/>
+          </p:cNvPicPr>
+          <p:nvPr/>
+        </p:nvPicPr>
+        <p:blipFill>
+          <a:blip r:embed="rId5"/>
+          <a:stretch>
+            <a:fillRect/>
+          </a:stretch>
+        </p:blipFill>
+        <p:spPr>
+          <a:xfrm>
+            <a:off x="3319272" y="2276332"/>
+            <a:ext cx="868680" cy="595408"/>
+          </a:xfrm>
+          <a:prstGeom prst="rect">
+            <a:avLst/>
+          </a:prstGeom>
+        </p:spPr>
+      </p:pic>
+      <p:sp>
+        <p:nvSpPr>
+          <p:cNvPr id="22" name="Text 15"/>
+          <p:cNvSpPr txBox="1"/>
+          <p:nvPr/>
+        </p:nvSpPr>
+        <p:spPr>
+          <a:xfrm>
+            <a:off x="4270248" y="2221992"/>
+            <a:ext cx="1554480" cy="457200"/>
+          </a:xfrm>
+          <a:prstGeom prst="rect">
+            <a:avLst/>
+          </a:prstGeom>
+          <a:noFill/>
+          <a:ln/>
+        </p:spPr>
+        <p:txBody>
+          <a:bodyPr wrap="square" lIns="0" tIns="0" rIns="0" bIns="0" rtlCol="0" anchor="t"/>
+          <a:lstStyle/>
+          <a:p>
+            <a:pPr indent="0" marL="0">
+              <a:buNone/>
+            </a:pPr>
+            <a:r>
+              <a:rPr lang="en-US" sz="900" dirty="0">
+                <a:solidFill>
+                  <a:srgbClr val="1B2430"/>
+                </a:solidFill>
+                <a:latin typeface="Calibri" pitchFamily="34" charset="0"/>
+                <a:ea typeface="Calibri" pitchFamily="34" charset="-122"/>
+                <a:cs typeface="Calibri" pitchFamily="34" charset="-120"/>
+              </a:rPr>
+              <a:t>Розетка RJ-45 настенная</a:t>
+            </a:r>
+            <a:endParaRPr lang="en-US" sz="900" dirty="0"/>
+          </a:p>
+        </p:txBody>
+      </p:sp>
+      <p:sp>
+        <p:nvSpPr>
+          <p:cNvPr id="23" name="Text 16"/>
+          <p:cNvSpPr txBox="1"/>
+          <p:nvPr/>
+        </p:nvSpPr>
+        <p:spPr>
+          <a:xfrm>
+            <a:off x="4270248" y="2697480"/>
+            <a:ext cx="1600200" cy="228600"/>
+          </a:xfrm>
+          <a:prstGeom prst="rect">
+            <a:avLst/>
+          </a:prstGeom>
+          <a:noFill/>
+          <a:ln/>
+        </p:spPr>
+        <p:txBody>
+          <a:bodyPr wrap="square" lIns="0" tIns="0" rIns="0" bIns="0" rtlCol="0" anchor="ctr"/>
+          <a:lstStyle/>
+          <a:p>
+            <a:pPr indent="0" marL="0">
+              <a:buNone/>
+            </a:pPr>
+            <a:r>
+              <a:rPr lang="en-US" sz="900" dirty="0">
+                <a:solidFill>
+                  <a:srgbClr val="5B6675"/>
+                </a:solidFill>
+                <a:latin typeface="Calibri" pitchFamily="34" charset="0"/>
+                <a:ea typeface="Calibri" pitchFamily="34" charset="-122"/>
+                <a:cs typeface="Calibri" pitchFamily="34" charset="-120"/>
+              </a:rPr>
+              <a:t>12 × 350 ₽</a:t>
+            </a:r>
+            <a:pPr indent="0" marL="0">
+              <a:buNone/>
+            </a:pPr>
+            <a:r>
+              <a:rPr lang="en-US" sz="900" b="1" dirty="0">
+                <a:solidFill>
+                  <a:srgbClr val="22B573"/>
+                </a:solidFill>
+                <a:latin typeface="Calibri" pitchFamily="34" charset="0"/>
+                <a:ea typeface="Calibri" pitchFamily="34" charset="-122"/>
+                <a:cs typeface="Calibri" pitchFamily="34" charset="-120"/>
+              </a:rPr>
+              <a:t>  4 200 ₽</a:t>
+            </a:r>
+            <a:endParaRPr lang="en-US" sz="900" dirty="0"/>
+          </a:p>
+        </p:txBody>
+      </p:sp>
+      <p:sp>
+        <p:nvSpPr>
+          <p:cNvPr id="24" name="Shape 17"/>
+          <p:cNvSpPr/>
+          <p:nvPr/>
+        </p:nvSpPr>
+        <p:spPr>
+          <a:xfrm>
+            <a:off x="6035040" y="2148840"/>
+            <a:ext cx="2651760" cy="850392"/>
+          </a:xfrm>
+          <a:prstGeom prst="roundRect">
+            <a:avLst>
+              <a:gd name="adj" fmla="val 8602"/>
+            </a:avLst>
+          </a:prstGeom>
+          <a:solidFill>
+            <a:srgbClr val="F4F7FB"/>
+          </a:solidFill>
+          <a:ln w="12700">
+            <a:solidFill>
+              <a:srgbClr val="F4F7FB"/>
+            </a:solidFill>
+            <a:prstDash val="solid"/>
+          </a:ln>
+          <a:effectLst>
+            <a:outerShdw sx="100000" sy="100000" kx="0" ky="0" algn="bl" rotWithShape="0" blurRad="76200" dist="25400" dir="5400000">
+              <a:srgbClr val="000000">
+                <a:alpha val="12000"/>
+              </a:srgbClr>
+            </a:outerShdw>
+          </a:effectLst>
+        </p:spPr>
+      </p:sp>
+      <p:pic>
+        <p:nvPicPr>
+          <p:cNvPr id="25" name="Image 5" descr="/private/tmp/claude-501/-Users-sergei/2bb89287-c36d-4b6a-b8e3-e06097a589c7/scratchpad/t/presentation/images/duct.jpg">    </p:cNvPr>
+          <p:cNvPicPr>
+            <a:picLocks noChangeAspect="1"/>
+          </p:cNvPicPr>
+          <p:nvPr/>
+        </p:nvPicPr>
+        <p:blipFill>
+          <a:blip r:embed="rId6"/>
+          <a:stretch>
+            <a:fillRect/>
+          </a:stretch>
+        </p:blipFill>
+        <p:spPr>
+          <a:xfrm>
+            <a:off x="6189330" y="2221992"/>
+            <a:ext cx="706404" cy="704088"/>
+          </a:xfrm>
+          <a:prstGeom prst="rect">
+            <a:avLst/>
+          </a:prstGeom>
+        </p:spPr>
+      </p:pic>
+      <p:sp>
+        <p:nvSpPr>
+          <p:cNvPr id="26" name="Text 18"/>
+          <p:cNvSpPr txBox="1"/>
+          <p:nvPr/>
+        </p:nvSpPr>
+        <p:spPr>
+          <a:xfrm>
+            <a:off x="7059168" y="2221992"/>
+            <a:ext cx="1554480" cy="457200"/>
+          </a:xfrm>
+          <a:prstGeom prst="rect">
+            <a:avLst/>
+          </a:prstGeom>
+          <a:noFill/>
+          <a:ln/>
+        </p:spPr>
+        <p:txBody>
+          <a:bodyPr wrap="square" lIns="0" tIns="0" rIns="0" bIns="0" rtlCol="0" anchor="t"/>
+          <a:lstStyle/>
+          <a:p>
+            <a:pPr indent="0" marL="0">
+              <a:buNone/>
+            </a:pPr>
+            <a:r>
+              <a:rPr lang="en-US" sz="900" dirty="0">
+                <a:solidFill>
+                  <a:srgbClr val="1B2430"/>
+                </a:solidFill>
+                <a:latin typeface="Calibri" pitchFamily="34" charset="0"/>
+                <a:ea typeface="Calibri" pitchFamily="34" charset="-122"/>
+                <a:cs typeface="Calibri" pitchFamily="34" charset="-120"/>
+              </a:rPr>
+              <a:t>Кабель-канал 25×16 мм, 2 м</a:t>
+            </a:r>
+            <a:endParaRPr lang="en-US" sz="900" dirty="0"/>
+          </a:p>
+        </p:txBody>
+      </p:sp>
+      <p:sp>
+        <p:nvSpPr>
+          <p:cNvPr id="27" name="Text 19"/>
+          <p:cNvSpPr txBox="1"/>
+          <p:nvPr/>
+        </p:nvSpPr>
+        <p:spPr>
+          <a:xfrm>
+            <a:off x="7059168" y="2697480"/>
+            <a:ext cx="1600200" cy="228600"/>
+          </a:xfrm>
+          <a:prstGeom prst="rect">
+            <a:avLst/>
+          </a:prstGeom>
+          <a:noFill/>
+          <a:ln/>
+        </p:spPr>
+        <p:txBody>
+          <a:bodyPr wrap="square" lIns="0" tIns="0" rIns="0" bIns="0" rtlCol="0" anchor="ctr"/>
+          <a:lstStyle/>
+          <a:p>
+            <a:pPr indent="0" marL="0">
+              <a:buNone/>
+            </a:pPr>
+            <a:r>
+              <a:rPr lang="en-US" sz="900" dirty="0">
+                <a:solidFill>
+                  <a:srgbClr val="5B6675"/>
+                </a:solidFill>
+                <a:latin typeface="Calibri" pitchFamily="34" charset="0"/>
+                <a:ea typeface="Calibri" pitchFamily="34" charset="-122"/>
+                <a:cs typeface="Calibri" pitchFamily="34" charset="-120"/>
+              </a:rPr>
+              <a:t>40 × 180 ₽</a:t>
+            </a:r>
+            <a:pPr indent="0" marL="0">
+              <a:buNone/>
+            </a:pPr>
+            <a:r>
+              <a:rPr lang="en-US" sz="900" b="1" dirty="0">
+                <a:solidFill>
+                  <a:srgbClr val="22B573"/>
+                </a:solidFill>
+                <a:latin typeface="Calibri" pitchFamily="34" charset="0"/>
+                <a:ea typeface="Calibri" pitchFamily="34" charset="-122"/>
+                <a:cs typeface="Calibri" pitchFamily="34" charset="-120"/>
+              </a:rPr>
+              <a:t>  7 200 ₽</a:t>
+            </a:r>
+            <a:endParaRPr lang="en-US" sz="900" dirty="0"/>
+          </a:p>
+        </p:txBody>
+      </p:sp>
+      <p:sp>
+        <p:nvSpPr>
+          <p:cNvPr id="28" name="Shape 20"/>
+          <p:cNvSpPr/>
+          <p:nvPr/>
+        </p:nvSpPr>
+        <p:spPr>
+          <a:xfrm>
+            <a:off x="457200" y="3063240"/>
+            <a:ext cx="2651760" cy="850392"/>
+          </a:xfrm>
+          <a:prstGeom prst="roundRect">
+            <a:avLst>
+              <a:gd name="adj" fmla="val 8602"/>
+            </a:avLst>
+          </a:prstGeom>
+          <a:solidFill>
+            <a:srgbClr val="F4F7FB"/>
+          </a:solidFill>
+          <a:ln w="12700">
+            <a:solidFill>
+              <a:srgbClr val="F4F7FB"/>
+            </a:solidFill>
+            <a:prstDash val="solid"/>
+          </a:ln>
+          <a:effectLst>
+            <a:outerShdw sx="100000" sy="100000" kx="0" ky="0" algn="bl" rotWithShape="0" blurRad="76200" dist="25400" dir="5400000">
+              <a:srgbClr val="000000">
+                <a:alpha val="12000"/>
+              </a:srgbClr>
+            </a:outerShdw>
+          </a:effectLst>
+        </p:spPr>
+      </p:sp>
+      <p:pic>
+        <p:nvPicPr>
+          <p:cNvPr id="29" name="Image 6" descr="/private/tmp/claude-501/-Users-sergei/2bb89287-c36d-4b6a-b8e3-e06097a589c7/scratchpad/t/presentation/images/cord.jpg">    </p:cNvPr>
+          <p:cNvPicPr>
+            <a:picLocks noChangeAspect="1"/>
+          </p:cNvPicPr>
+          <p:nvPr/>
+        </p:nvPicPr>
+        <p:blipFill>
+          <a:blip r:embed="rId7"/>
+          <a:stretch>
+            <a:fillRect/>
+          </a:stretch>
+        </p:blipFill>
+        <p:spPr>
+          <a:xfrm>
+            <a:off x="530352" y="3162681"/>
+            <a:ext cx="868680" cy="651510"/>
+          </a:xfrm>
+          <a:prstGeom prst="rect">
+            <a:avLst/>
+          </a:prstGeom>
+        </p:spPr>
+      </p:pic>
+      <p:sp>
+        <p:nvSpPr>
+          <p:cNvPr id="30" name="Text 21"/>
+          <p:cNvSpPr txBox="1"/>
+          <p:nvPr/>
+        </p:nvSpPr>
+        <p:spPr>
+          <a:xfrm>
+            <a:off x="1481328" y="3136392"/>
+            <a:ext cx="1554480" cy="457200"/>
+          </a:xfrm>
+          <a:prstGeom prst="rect">
+            <a:avLst/>
+          </a:prstGeom>
+          <a:noFill/>
+          <a:ln/>
+        </p:spPr>
+        <p:txBody>
+          <a:bodyPr wrap="square" lIns="0" tIns="0" rIns="0" bIns="0" rtlCol="0" anchor="t"/>
+          <a:lstStyle/>
+          <a:p>
+            <a:pPr indent="0" marL="0">
+              <a:buNone/>
+            </a:pPr>
+            <a:r>
+              <a:rPr lang="en-US" sz="900" dirty="0">
+                <a:solidFill>
+                  <a:srgbClr val="1B2430"/>
+                </a:solidFill>
+                <a:latin typeface="Calibri" pitchFamily="34" charset="0"/>
+                <a:ea typeface="Calibri" pitchFamily="34" charset="-122"/>
+                <a:cs typeface="Calibri" pitchFamily="34" charset="-120"/>
+              </a:rPr>
+              <a:t>Патч-корд UTP 1 м</a:t>
+            </a:r>
+            <a:endParaRPr lang="en-US" sz="900" dirty="0"/>
+          </a:p>
+        </p:txBody>
+      </p:sp>
+      <p:sp>
+        <p:nvSpPr>
+          <p:cNvPr id="31" name="Text 22"/>
+          <p:cNvSpPr txBox="1"/>
+          <p:nvPr/>
+        </p:nvSpPr>
+        <p:spPr>
+          <a:xfrm>
+            <a:off x="1481328" y="3611880"/>
+            <a:ext cx="1600200" cy="228600"/>
+          </a:xfrm>
+          <a:prstGeom prst="rect">
+            <a:avLst/>
+          </a:prstGeom>
+          <a:noFill/>
+          <a:ln/>
+        </p:spPr>
+        <p:txBody>
+          <a:bodyPr wrap="square" lIns="0" tIns="0" rIns="0" bIns="0" rtlCol="0" anchor="ctr"/>
+          <a:lstStyle/>
+          <a:p>
+            <a:pPr indent="0" marL="0">
+              <a:buNone/>
+            </a:pPr>
+            <a:r>
+              <a:rPr lang="en-US" sz="900" dirty="0">
+                <a:solidFill>
+                  <a:srgbClr val="5B6675"/>
+                </a:solidFill>
+                <a:latin typeface="Calibri" pitchFamily="34" charset="0"/>
+                <a:ea typeface="Calibri" pitchFamily="34" charset="-122"/>
+                <a:cs typeface="Calibri" pitchFamily="34" charset="-120"/>
+              </a:rPr>
+              <a:t>20 × 150 ₽</a:t>
+            </a:r>
+            <a:pPr indent="0" marL="0">
+              <a:buNone/>
+            </a:pPr>
+            <a:r>
+              <a:rPr lang="en-US" sz="900" b="1" dirty="0">
+                <a:solidFill>
+                  <a:srgbClr val="22B573"/>
+                </a:solidFill>
+                <a:latin typeface="Calibri" pitchFamily="34" charset="0"/>
+                <a:ea typeface="Calibri" pitchFamily="34" charset="-122"/>
+                <a:cs typeface="Calibri" pitchFamily="34" charset="-120"/>
+              </a:rPr>
+              <a:t>  3 000 ₽</a:t>
+            </a:r>
+            <a:endParaRPr lang="en-US" sz="900" dirty="0"/>
+          </a:p>
+        </p:txBody>
+      </p:sp>
+      <p:sp>
+        <p:nvSpPr>
+          <p:cNvPr id="32" name="Shape 23"/>
+          <p:cNvSpPr/>
+          <p:nvPr/>
+        </p:nvSpPr>
+        <p:spPr>
+          <a:xfrm>
+            <a:off x="3246120" y="3063240"/>
+            <a:ext cx="2651760" cy="850392"/>
+          </a:xfrm>
+          <a:prstGeom prst="roundRect">
+            <a:avLst>
+              <a:gd name="adj" fmla="val 8602"/>
+            </a:avLst>
+          </a:prstGeom>
+          <a:solidFill>
+            <a:srgbClr val="F4F7FB"/>
+          </a:solidFill>
+          <a:ln w="12700">
+            <a:solidFill>
+              <a:srgbClr val="F4F7FB"/>
+            </a:solidFill>
+            <a:prstDash val="solid"/>
+          </a:ln>
+          <a:effectLst>
+            <a:outerShdw sx="100000" sy="100000" kx="0" ky="0" algn="bl" rotWithShape="0" blurRad="76200" dist="25400" dir="5400000">
+              <a:srgbClr val="000000">
+                <a:alpha val="12000"/>
+              </a:srgbClr>
+            </a:outerShdw>
+          </a:effectLst>
+        </p:spPr>
+      </p:sp>
+      <p:pic>
+        <p:nvPicPr>
+          <p:cNvPr id="33" name="Image 7" descr="/private/tmp/claude-501/-Users-sergei/2bb89287-c36d-4b6a-b8e3-e06097a589c7/scratchpad/t/presentation/images/console.jpg">    </p:cNvPr>
+          <p:cNvPicPr>
+            <a:picLocks noChangeAspect="1"/>
+          </p:cNvPicPr>
+          <p:nvPr/>
+        </p:nvPicPr>
+        <p:blipFill>
+          <a:blip r:embed="rId8"/>
+          <a:stretch>
+            <a:fillRect/>
+          </a:stretch>
+        </p:blipFill>
+        <p:spPr>
+          <a:xfrm>
+            <a:off x="3319272" y="3162681"/>
+            <a:ext cx="868680" cy="651510"/>
+          </a:xfrm>
+          <a:prstGeom prst="rect">
+            <a:avLst/>
+          </a:prstGeom>
+        </p:spPr>
+      </p:pic>
+      <p:sp>
+        <p:nvSpPr>
+          <p:cNvPr id="34" name="Text 24"/>
+          <p:cNvSpPr txBox="1"/>
+          <p:nvPr/>
+        </p:nvSpPr>
+        <p:spPr>
+          <a:xfrm>
+            <a:off x="4270248" y="3136392"/>
+            <a:ext cx="1554480" cy="457200"/>
+          </a:xfrm>
+          <a:prstGeom prst="rect">
+            <a:avLst/>
+          </a:prstGeom>
+          <a:noFill/>
+          <a:ln/>
+        </p:spPr>
+        <p:txBody>
+          <a:bodyPr wrap="square" lIns="0" tIns="0" rIns="0" bIns="0" rtlCol="0" anchor="t"/>
+          <a:lstStyle/>
+          <a:p>
+            <a:pPr indent="0" marL="0">
+              <a:buNone/>
+            </a:pPr>
+            <a:r>
+              <a:rPr lang="en-US" sz="900" dirty="0">
+                <a:solidFill>
+                  <a:srgbClr val="1B2430"/>
+                </a:solidFill>
+                <a:latin typeface="Calibri" pitchFamily="34" charset="0"/>
+                <a:ea typeface="Calibri" pitchFamily="34" charset="-122"/>
+                <a:cs typeface="Calibri" pitchFamily="34" charset="-120"/>
+              </a:rPr>
+              <a:t>Консольный кабель Cisco RJ-45 – USB</a:t>
+            </a:r>
+            <a:endParaRPr lang="en-US" sz="900" dirty="0"/>
+          </a:p>
+        </p:txBody>
+      </p:sp>
+      <p:sp>
+        <p:nvSpPr>
+          <p:cNvPr id="35" name="Text 25"/>
+          <p:cNvSpPr txBox="1"/>
+          <p:nvPr/>
+        </p:nvSpPr>
+        <p:spPr>
+          <a:xfrm>
+            <a:off x="4270248" y="3611880"/>
+            <a:ext cx="1600200" cy="228600"/>
+          </a:xfrm>
+          <a:prstGeom prst="rect">
+            <a:avLst/>
+          </a:prstGeom>
+          <a:noFill/>
+          <a:ln/>
+        </p:spPr>
+        <p:txBody>
+          <a:bodyPr wrap="square" lIns="0" tIns="0" rIns="0" bIns="0" rtlCol="0" anchor="ctr"/>
+          <a:lstStyle/>
+          <a:p>
+            <a:pPr indent="0" marL="0">
+              <a:buNone/>
+            </a:pPr>
+            <a:r>
+              <a:rPr lang="en-US" sz="900" dirty="0">
+                <a:solidFill>
+                  <a:srgbClr val="5B6675"/>
+                </a:solidFill>
+                <a:latin typeface="Calibri" pitchFamily="34" charset="0"/>
+                <a:ea typeface="Calibri" pitchFamily="34" charset="-122"/>
+                <a:cs typeface="Calibri" pitchFamily="34" charset="-120"/>
+              </a:rPr>
+              <a:t>1 × 1 200 ₽</a:t>
+            </a:r>
+            <a:pPr indent="0" marL="0">
+              <a:buNone/>
+            </a:pPr>
+            <a:r>
+              <a:rPr lang="en-US" sz="900" b="1" dirty="0">
+                <a:solidFill>
+                  <a:srgbClr val="22B573"/>
+                </a:solidFill>
+                <a:latin typeface="Calibri" pitchFamily="34" charset="0"/>
+                <a:ea typeface="Calibri" pitchFamily="34" charset="-122"/>
+                <a:cs typeface="Calibri" pitchFamily="34" charset="-120"/>
+              </a:rPr>
+              <a:t>  1 200 ₽</a:t>
+            </a:r>
+            <a:endParaRPr lang="en-US" sz="900" dirty="0"/>
+          </a:p>
+        </p:txBody>
+      </p:sp>
+      <p:sp>
+        <p:nvSpPr>
+          <p:cNvPr id="36" name="Shape 26"/>
+          <p:cNvSpPr/>
+          <p:nvPr/>
+        </p:nvSpPr>
+        <p:spPr>
+          <a:xfrm>
+            <a:off x="6035040" y="3063240"/>
+            <a:ext cx="2651760" cy="850392"/>
+          </a:xfrm>
+          <a:prstGeom prst="roundRect">
+            <a:avLst>
+              <a:gd name="adj" fmla="val 8602"/>
+            </a:avLst>
+          </a:prstGeom>
+          <a:solidFill>
+            <a:srgbClr val="F4F7FB"/>
+          </a:solidFill>
+          <a:ln w="12700">
+            <a:solidFill>
+              <a:srgbClr val="F4F7FB"/>
+            </a:solidFill>
+            <a:prstDash val="solid"/>
+          </a:ln>
+          <a:effectLst>
+            <a:outerShdw sx="100000" sy="100000" kx="0" ky="0" algn="bl" rotWithShape="0" blurRad="76200" dist="25400" dir="5400000">
+              <a:srgbClr val="000000">
+                <a:alpha val="12000"/>
+              </a:srgbClr>
+            </a:outerShdw>
+          </a:effectLst>
+        </p:spPr>
+      </p:sp>
+      <p:pic>
+        <p:nvPicPr>
+          <p:cNvPr id="37" name="Image 8" descr="/private/tmp/claude-501/-Users-sergei/2bb89287-c36d-4b6a-b8e3-e06097a589c7/scratchpad/t/presentation/images/crimp.jpg">    </p:cNvPr>
+          <p:cNvPicPr>
+            <a:picLocks noChangeAspect="1"/>
+          </p:cNvPicPr>
+          <p:nvPr/>
+        </p:nvPicPr>
+        <p:blipFill>
+          <a:blip r:embed="rId9"/>
+          <a:stretch>
+            <a:fillRect/>
+          </a:stretch>
+        </p:blipFill>
+        <p:spPr>
+          <a:xfrm>
+            <a:off x="6108192" y="3162681"/>
+            <a:ext cx="868680" cy="651510"/>
+          </a:xfrm>
+          <a:prstGeom prst="rect">
+            <a:avLst/>
+          </a:prstGeom>
+        </p:spPr>
+      </p:pic>
+      <p:sp>
+        <p:nvSpPr>
+          <p:cNvPr id="38" name="Text 27"/>
+          <p:cNvSpPr txBox="1"/>
+          <p:nvPr/>
+        </p:nvSpPr>
+        <p:spPr>
+          <a:xfrm>
+            <a:off x="7059168" y="3136392"/>
+            <a:ext cx="1554480" cy="457200"/>
+          </a:xfrm>
+          <a:prstGeom prst="rect">
+            <a:avLst/>
+          </a:prstGeom>
+          <a:noFill/>
+          <a:ln/>
+        </p:spPr>
+        <p:txBody>
+          <a:bodyPr wrap="square" lIns="0" tIns="0" rIns="0" bIns="0" rtlCol="0" anchor="t"/>
+          <a:lstStyle/>
+          <a:p>
+            <a:pPr indent="0" marL="0">
+              <a:buNone/>
+            </a:pPr>
+            <a:r>
+              <a:rPr lang="en-US" sz="900" dirty="0">
+                <a:solidFill>
+                  <a:srgbClr val="1B2430"/>
+                </a:solidFill>
+                <a:latin typeface="Calibri" pitchFamily="34" charset="0"/>
+                <a:ea typeface="Calibri" pitchFamily="34" charset="-122"/>
+                <a:cs typeface="Calibri" pitchFamily="34" charset="-120"/>
+              </a:rPr>
+              <a:t>Кримпер + LAN-тестер</a:t>
+            </a:r>
+            <a:endParaRPr lang="en-US" sz="900" dirty="0"/>
+          </a:p>
+        </p:txBody>
+      </p:sp>
+      <p:sp>
+        <p:nvSpPr>
+          <p:cNvPr id="39" name="Text 28"/>
+          <p:cNvSpPr txBox="1"/>
+          <p:nvPr/>
+        </p:nvSpPr>
+        <p:spPr>
+          <a:xfrm>
+            <a:off x="7059168" y="3611880"/>
+            <a:ext cx="1600200" cy="228600"/>
+          </a:xfrm>
+          <a:prstGeom prst="rect">
+            <a:avLst/>
+          </a:prstGeom>
+          <a:noFill/>
+          <a:ln/>
+        </p:spPr>
+        <p:txBody>
+          <a:bodyPr wrap="square" lIns="0" tIns="0" rIns="0" bIns="0" rtlCol="0" anchor="ctr"/>
+          <a:lstStyle/>
+          <a:p>
+            <a:pPr indent="0" marL="0">
+              <a:buNone/>
+            </a:pPr>
+            <a:r>
+              <a:rPr lang="en-US" sz="900" dirty="0">
+                <a:solidFill>
+                  <a:srgbClr val="5B6675"/>
+                </a:solidFill>
+                <a:latin typeface="Calibri" pitchFamily="34" charset="0"/>
+                <a:ea typeface="Calibri" pitchFamily="34" charset="-122"/>
+                <a:cs typeface="Calibri" pitchFamily="34" charset="-120"/>
+              </a:rPr>
+              <a:t>1 × 3 500 ₽</a:t>
+            </a:r>
+            <a:pPr indent="0" marL="0">
+              <a:buNone/>
+            </a:pPr>
+            <a:r>
+              <a:rPr lang="en-US" sz="900" b="1" dirty="0">
+                <a:solidFill>
+                  <a:srgbClr val="22B573"/>
+                </a:solidFill>
+                <a:latin typeface="Calibri" pitchFamily="34" charset="0"/>
+                <a:ea typeface="Calibri" pitchFamily="34" charset="-122"/>
+                <a:cs typeface="Calibri" pitchFamily="34" charset="-120"/>
+              </a:rPr>
+              <a:t>  3 500 ₽</a:t>
+            </a:r>
+            <a:endParaRPr lang="en-US" sz="900" dirty="0"/>
+          </a:p>
+        </p:txBody>
+      </p:sp>
+      <p:sp>
+        <p:nvSpPr>
+          <p:cNvPr id="40" name="Shape 29"/>
+          <p:cNvSpPr/>
+          <p:nvPr/>
+        </p:nvSpPr>
+        <p:spPr>
+          <a:xfrm>
+            <a:off x="457200" y="3977640"/>
+            <a:ext cx="2651760" cy="850392"/>
+          </a:xfrm>
+          <a:prstGeom prst="roundRect">
+            <a:avLst>
+              <a:gd name="adj" fmla="val 8602"/>
+            </a:avLst>
+          </a:prstGeom>
+          <a:solidFill>
+            <a:srgbClr val="F4F7FB"/>
+          </a:solidFill>
+          <a:ln w="12700">
+            <a:solidFill>
+              <a:srgbClr val="F4F7FB"/>
+            </a:solidFill>
+            <a:prstDash val="solid"/>
+          </a:ln>
+          <a:effectLst>
+            <a:outerShdw sx="100000" sy="100000" kx="0" ky="0" algn="bl" rotWithShape="0" blurRad="76200" dist="25400" dir="5400000">
+              <a:srgbClr val="000000">
+                <a:alpha val="12000"/>
+              </a:srgbClr>
+            </a:outerShdw>
+          </a:effectLst>
+        </p:spPr>
+      </p:sp>
+      <p:pic>
+        <p:nvPicPr>
+          <p:cNvPr id="41" name="Image 9" descr="/private/tmp/claude-501/-Users-sergei/2bb89287-c36d-4b6a-b8e3-e06097a589c7/scratchpad/t/presentation/images/ties.jpg">    </p:cNvPr>
+          <p:cNvPicPr>
+            <a:picLocks noChangeAspect="1"/>
+          </p:cNvPicPr>
+          <p:nvPr/>
+        </p:nvPicPr>
+        <p:blipFill>
+          <a:blip r:embed="rId10"/>
+          <a:stretch>
+            <a:fillRect/>
+          </a:stretch>
+        </p:blipFill>
+        <p:spPr>
+          <a:xfrm>
+            <a:off x="530352" y="4077081"/>
+            <a:ext cx="868680" cy="651510"/>
+          </a:xfrm>
+          <a:prstGeom prst="rect">
+            <a:avLst/>
+          </a:prstGeom>
+        </p:spPr>
+      </p:pic>
+      <p:sp>
+        <p:nvSpPr>
+          <p:cNvPr id="42" name="Text 30"/>
+          <p:cNvSpPr txBox="1"/>
+          <p:nvPr/>
+        </p:nvSpPr>
+        <p:spPr>
+          <a:xfrm>
+            <a:off x="1481328" y="4050792"/>
+            <a:ext cx="1554480" cy="457200"/>
+          </a:xfrm>
+          <a:prstGeom prst="rect">
+            <a:avLst/>
+          </a:prstGeom>
+          <a:noFill/>
+          <a:ln/>
+        </p:spPr>
+        <p:txBody>
+          <a:bodyPr wrap="square" lIns="0" tIns="0" rIns="0" bIns="0" rtlCol="0" anchor="t"/>
+          <a:lstStyle/>
+          <a:p>
+            <a:pPr indent="0" marL="0">
+              <a:buNone/>
+            </a:pPr>
+            <a:r>
+              <a:rPr lang="en-US" sz="900" dirty="0">
+                <a:solidFill>
+                  <a:srgbClr val="1B2430"/>
+                </a:solidFill>
+                <a:latin typeface="Calibri" pitchFamily="34" charset="0"/>
+                <a:ea typeface="Calibri" pitchFamily="34" charset="-122"/>
+                <a:cs typeface="Calibri" pitchFamily="34" charset="-120"/>
+              </a:rPr>
+              <a:t>Стяжки, маркировка, крепёж (комплект)</a:t>
+            </a:r>
+            <a:endParaRPr lang="en-US" sz="900" dirty="0"/>
+          </a:p>
+        </p:txBody>
+      </p:sp>
+      <p:sp>
+        <p:nvSpPr>
+          <p:cNvPr id="43" name="Text 31"/>
+          <p:cNvSpPr txBox="1"/>
+          <p:nvPr/>
+        </p:nvSpPr>
+        <p:spPr>
+          <a:xfrm>
+            <a:off x="1481328" y="4526280"/>
+            <a:ext cx="1600200" cy="228600"/>
+          </a:xfrm>
+          <a:prstGeom prst="rect">
+            <a:avLst/>
+          </a:prstGeom>
+          <a:noFill/>
+          <a:ln/>
+        </p:spPr>
+        <p:txBody>
+          <a:bodyPr wrap="square" lIns="0" tIns="0" rIns="0" bIns="0" rtlCol="0" anchor="ctr"/>
+          <a:lstStyle/>
+          <a:p>
+            <a:pPr indent="0" marL="0">
+              <a:buNone/>
+            </a:pPr>
+            <a:r>
+              <a:rPr lang="en-US" sz="900" dirty="0">
+                <a:solidFill>
+                  <a:srgbClr val="5B6675"/>
+                </a:solidFill>
+                <a:latin typeface="Calibri" pitchFamily="34" charset="0"/>
+                <a:ea typeface="Calibri" pitchFamily="34" charset="-122"/>
+                <a:cs typeface="Calibri" pitchFamily="34" charset="-120"/>
+              </a:rPr>
+              <a:t>1 × 1 500 ₽</a:t>
+            </a:r>
+            <a:pPr indent="0" marL="0">
+              <a:buNone/>
+            </a:pPr>
+            <a:r>
+              <a:rPr lang="en-US" sz="900" b="1" dirty="0">
+                <a:solidFill>
+                  <a:srgbClr val="22B573"/>
+                </a:solidFill>
+                <a:latin typeface="Calibri" pitchFamily="34" charset="0"/>
+                <a:ea typeface="Calibri" pitchFamily="34" charset="-122"/>
+                <a:cs typeface="Calibri" pitchFamily="34" charset="-120"/>
+              </a:rPr>
+              <a:t>  1 500 ₽</a:t>
+            </a:r>
+            <a:endParaRPr lang="en-US" sz="900" dirty="0"/>
+          </a:p>
+        </p:txBody>
+      </p:sp>
+      <p:sp>
+        <p:nvSpPr>
+          <p:cNvPr id="44" name="Shape 32"/>
+          <p:cNvSpPr/>
+          <p:nvPr/>
+        </p:nvSpPr>
+        <p:spPr>
+          <a:xfrm>
+            <a:off x="3246120" y="3977640"/>
+            <a:ext cx="5440680" cy="850392"/>
+          </a:xfrm>
+          <a:prstGeom prst="roundRect">
+            <a:avLst>
+              <a:gd name="adj" fmla="val 8602"/>
+            </a:avLst>
+          </a:prstGeom>
+          <a:solidFill>
+            <a:srgbClr val="0B1F3A"/>
+          </a:solidFill>
+          <a:ln w="12700">
+            <a:solidFill>
+              <a:srgbClr val="0B1F3A"/>
+            </a:solidFill>
+            <a:prstDash val="solid"/>
+          </a:ln>
+        </p:spPr>
+      </p:sp>
+      <p:sp>
+        <p:nvSpPr>
+          <p:cNvPr id="45" name="Text 33"/>
+          <p:cNvSpPr txBox="1"/>
+          <p:nvPr/>
+        </p:nvSpPr>
+        <p:spPr>
+          <a:xfrm>
+            <a:off x="3474720" y="3977640"/>
+            <a:ext cx="3108960" cy="850392"/>
+          </a:xfrm>
+          <a:prstGeom prst="rect">
+            <a:avLst/>
+          </a:prstGeom>
+          <a:noFill/>
+          <a:ln/>
+        </p:spPr>
+        <p:txBody>
+          <a:bodyPr wrap="square" lIns="0" tIns="0" rIns="0" bIns="0" rtlCol="0" anchor="ctr"/>
+          <a:lstStyle/>
+          <a:p>
+            <a:pPr indent="0" marL="0">
+              <a:buNone/>
+            </a:pPr>
+            <a:r>
+              <a:rPr lang="en-US" sz="1500" dirty="0">
+                <a:solidFill>
+                  <a:srgbClr val="FFFFFF"/>
+                </a:solidFill>
+                <a:latin typeface="Calibri" pitchFamily="34" charset="0"/>
+                <a:ea typeface="Calibri" pitchFamily="34" charset="-122"/>
+                <a:cs typeface="Calibri" pitchFamily="34" charset="-120"/>
+              </a:rPr>
+              <a:t>Итого расходные материалы</a:t>
+            </a:r>
+            <a:endParaRPr lang="en-US" sz="1500" dirty="0"/>
+          </a:p>
+        </p:txBody>
+      </p:sp>
+      <p:sp>
+        <p:nvSpPr>
+          <p:cNvPr id="46" name="Text 34"/>
+          <p:cNvSpPr txBox="1"/>
+          <p:nvPr/>
+        </p:nvSpPr>
+        <p:spPr>
+          <a:xfrm>
+            <a:off x="6537960" y="3977640"/>
+            <a:ext cx="1920240" cy="850392"/>
+          </a:xfrm>
+          <a:prstGeom prst="rect">
+            <a:avLst/>
+          </a:prstGeom>
+          <a:noFill/>
+          <a:ln/>
+        </p:spPr>
+        <p:txBody>
+          <a:bodyPr wrap="square" lIns="0" tIns="0" rIns="0" bIns="0" rtlCol="0" anchor="ctr"/>
+          <a:lstStyle/>
+          <a:p>
+            <a:pPr algn="r" indent="0" marL="0">
+              <a:buNone/>
+            </a:pPr>
+            <a:r>
+              <a:rPr lang="en-US" sz="2200" b="1" dirty="0">
+                <a:solidFill>
+                  <a:srgbClr val="FFFFFF"/>
+                </a:solidFill>
+                <a:latin typeface="Cambria" pitchFamily="34" charset="0"/>
+                <a:ea typeface="Cambria" pitchFamily="34" charset="-122"/>
+                <a:cs typeface="Cambria" pitchFamily="34" charset="-120"/>
+              </a:rPr>
+              <a:t>41 300 ₽</a:t>
+            </a:r>
+            <a:endParaRPr lang="en-US" sz="2200" dirty="0"/>
+          </a:p>
+        </p:txBody>
+      </p:sp>
     </p:spTree>
   </p:cSld>
   <p:clrMapOvr>
@@ -7996,6 +6500,828 @@
               <a:t>Составлена смета: 1 138 300 ₽ на оборудование и материалы</a:t>
             </a:r>
             <a:endParaRPr lang="en-US" sz="1600" dirty="0"/>
+          </a:p>
+        </p:txBody>
+      </p:sp>
+    </p:spTree>
+  </p:cSld>
+  <p:clrMapOvr>
+    <a:masterClrMapping/>
+  </p:clrMapOvr>
+</p:sld>
+</file>
+
+<file path=ppt/slides/slide14.xml><?xml version="1.0" encoding="utf-8"?>
+<p:sld xmlns:a="http://schemas.openxmlformats.org/drawingml/2006/main" xmlns:r="http://schemas.openxmlformats.org/officeDocument/2006/relationships" xmlns:p="http://schemas.openxmlformats.org/presentationml/2006/main">
+  <p:cSld name="Slide 14">
+    <p:bg>
+      <p:bgPr>
+        <a:solidFill>
+          <a:srgbClr val="FFFFFF"/>
+        </a:solidFill>
+      </p:bgPr>
+    </p:bg>
+    <p:spTree>
+      <p:nvGrpSpPr>
+        <p:cNvPr id="1" name=""/>
+        <p:cNvGrpSpPr/>
+        <p:nvPr/>
+      </p:nvGrpSpPr>
+      <p:grpSpPr>
+        <a:xfrm>
+          <a:off x="0" y="0"/>
+          <a:ext cx="0" cy="0"/>
+          <a:chOff x="0" y="0"/>
+          <a:chExt cx="0" cy="0"/>
+        </a:xfrm>
+      </p:grpSpPr>
+      <p:sp>
+        <p:nvSpPr>
+          <p:cNvPr id="2" name="Text 0"/>
+          <p:cNvSpPr txBox="1"/>
+          <p:nvPr/>
+        </p:nvSpPr>
+        <p:spPr>
+          <a:xfrm>
+            <a:off x="457200" y="274320"/>
+            <a:ext cx="8229600" cy="548640"/>
+          </a:xfrm>
+          <a:prstGeom prst="rect">
+            <a:avLst/>
+          </a:prstGeom>
+          <a:noFill/>
+          <a:ln/>
+        </p:spPr>
+        <p:txBody>
+          <a:bodyPr wrap="square" lIns="0" tIns="0" rIns="0" bIns="0" rtlCol="0" anchor="ctr"/>
+          <a:lstStyle/>
+          <a:p>
+            <a:pPr indent="0" marL="0">
+              <a:buNone/>
+            </a:pPr>
+            <a:r>
+              <a:rPr lang="en-US" sz="3000" b="1" dirty="0">
+                <a:solidFill>
+                  <a:srgbClr val="0B1F3A"/>
+                </a:solidFill>
+                <a:latin typeface="Cambria" pitchFamily="34" charset="0"/>
+                <a:ea typeface="Cambria" pitchFamily="34" charset="-122"/>
+                <a:cs typeface="Cambria" pitchFamily="34" charset="-120"/>
+              </a:rPr>
+              <a:t>Источники изображений</a:t>
+            </a:r>
+            <a:endParaRPr lang="en-US" sz="3000" dirty="0"/>
+          </a:p>
+        </p:txBody>
+      </p:sp>
+      <p:sp>
+        <p:nvSpPr>
+          <p:cNvPr id="3" name="Text 1"/>
+          <p:cNvSpPr txBox="1"/>
+          <p:nvPr/>
+        </p:nvSpPr>
+        <p:spPr>
+          <a:xfrm>
+            <a:off x="457200" y="804672"/>
+            <a:ext cx="8229600" cy="320040"/>
+          </a:xfrm>
+          <a:prstGeom prst="rect">
+            <a:avLst/>
+          </a:prstGeom>
+          <a:noFill/>
+          <a:ln/>
+        </p:spPr>
+        <p:txBody>
+          <a:bodyPr wrap="square" lIns="0" tIns="0" rIns="0" bIns="0" rtlCol="0" anchor="ctr"/>
+          <a:lstStyle/>
+          <a:p>
+            <a:pPr indent="0" marL="0">
+              <a:buNone/>
+            </a:pPr>
+            <a:r>
+              <a:rPr lang="en-US" sz="1400" dirty="0">
+                <a:solidFill>
+                  <a:srgbClr val="5B6675"/>
+                </a:solidFill>
+                <a:latin typeface="Calibri" pitchFamily="34" charset="0"/>
+                <a:ea typeface="Calibri" pitchFamily="34" charset="-122"/>
+                <a:cs typeface="Calibri" pitchFamily="34" charset="-120"/>
+              </a:rPr>
+              <a:t>Фотографии оборудования — Wikimedia Commons, свободные лицензии</a:t>
+            </a:r>
+            <a:endParaRPr lang="en-US" sz="1400" dirty="0"/>
+          </a:p>
+        </p:txBody>
+      </p:sp>
+      <p:sp>
+        <p:nvSpPr>
+          <p:cNvPr id="4" name="Text 2"/>
+          <p:cNvSpPr txBox="1"/>
+          <p:nvPr/>
+        </p:nvSpPr>
+        <p:spPr>
+          <a:xfrm>
+            <a:off x="457200" y="1234440"/>
+            <a:ext cx="4023360" cy="3017520"/>
+          </a:xfrm>
+          <a:prstGeom prst="rect">
+            <a:avLst/>
+          </a:prstGeom>
+          <a:noFill/>
+          <a:ln/>
+        </p:spPr>
+        <p:txBody>
+          <a:bodyPr wrap="square" lIns="0" tIns="0" rIns="0" bIns="0" rtlCol="0" anchor="t"/>
+          <a:lstStyle/>
+          <a:p>
+            <a:pPr indent="0" marL="0">
+              <a:spcAft>
+                <a:spcPts val="400"/>
+              </a:spcAft>
+              <a:buNone/>
+            </a:pPr>
+            <a:r>
+              <a:rPr lang="en-US" sz="850" b="1" dirty="0">
+                <a:solidFill>
+                  <a:srgbClr val="0B1F3A"/>
+                </a:solidFill>
+                <a:latin typeface="Calibri" pitchFamily="34" charset="0"/>
+                <a:ea typeface="Calibri" pitchFamily="34" charset="-122"/>
+                <a:cs typeface="Calibri" pitchFamily="34" charset="-120"/>
+              </a:rPr>
+              <a:t>Маршрутизатор: </a:t>
+            </a:r>
+            <a:pPr indent="0" marL="0">
+              <a:spcAft>
+                <a:spcPts val="400"/>
+              </a:spcAft>
+              <a:buNone/>
+            </a:pPr>
+            <a:r>
+              <a:rPr lang="en-US" sz="850" dirty="0">
+                <a:solidFill>
+                  <a:srgbClr val="1B2430"/>
+                </a:solidFill>
+                <a:latin typeface="Calibri" pitchFamily="34" charset="0"/>
+                <a:ea typeface="Calibri" pitchFamily="34" charset="-122"/>
+                <a:cs typeface="Calibri" pitchFamily="34" charset="-120"/>
+              </a:rPr>
+              <a:t>Cisco 2800 series router (1).jpg — Robert, CC BY 2.0</a:t>
+            </a:r>
+            <a:endParaRPr lang="en-US" sz="850" dirty="0"/>
+          </a:p>
+          <a:p>
+            <a:pPr indent="0" marL="0">
+              <a:spcAft>
+                <a:spcPts val="400"/>
+              </a:spcAft>
+              <a:buNone/>
+            </a:pPr>
+            <a:r>
+              <a:rPr lang="en-US" sz="850" b="1" dirty="0">
+                <a:solidFill>
+                  <a:srgbClr val="0B1F3A"/>
+                </a:solidFill>
+                <a:latin typeface="Calibri" pitchFamily="34" charset="0"/>
+                <a:ea typeface="Calibri" pitchFamily="34" charset="-122"/>
+                <a:cs typeface="Calibri" pitchFamily="34" charset="-120"/>
+              </a:rPr>
+              <a:t>Коммутаторы: </a:t>
+            </a:r>
+            <a:pPr indent="0" marL="0">
+              <a:spcAft>
+                <a:spcPts val="400"/>
+              </a:spcAft>
+              <a:buNone/>
+            </a:pPr>
+            <a:r>
+              <a:rPr lang="en-US" sz="850" dirty="0">
+                <a:solidFill>
+                  <a:srgbClr val="1B2430"/>
+                </a:solidFill>
+                <a:latin typeface="Calibri" pitchFamily="34" charset="0"/>
+                <a:ea typeface="Calibri" pitchFamily="34" charset="-122"/>
+                <a:cs typeface="Calibri" pitchFamily="34" charset="-120"/>
+              </a:rPr>
+              <a:t>Ccna security lab.JPG — Axel Dux, CC BY-SA 3.0</a:t>
+            </a:r>
+            <a:endParaRPr lang="en-US" sz="850" dirty="0"/>
+          </a:p>
+          <a:p>
+            <a:pPr indent="0" marL="0">
+              <a:spcAft>
+                <a:spcPts val="400"/>
+              </a:spcAft>
+              <a:buNone/>
+            </a:pPr>
+            <a:r>
+              <a:rPr lang="en-US" sz="850" b="1" dirty="0">
+                <a:solidFill>
+                  <a:srgbClr val="0B1F3A"/>
+                </a:solidFill>
+                <a:latin typeface="Calibri" pitchFamily="34" charset="0"/>
+                <a:ea typeface="Calibri" pitchFamily="34" charset="-122"/>
+                <a:cs typeface="Calibri" pitchFamily="34" charset="-120"/>
+              </a:rPr>
+              <a:t>Рабочая станция: </a:t>
+            </a:r>
+            <a:pPr indent="0" marL="0">
+              <a:spcAft>
+                <a:spcPts val="400"/>
+              </a:spcAft>
+              <a:buNone/>
+            </a:pPr>
+            <a:r>
+              <a:rPr lang="en-US" sz="850" dirty="0">
+                <a:solidFill>
+                  <a:srgbClr val="1B2430"/>
+                </a:solidFill>
+                <a:latin typeface="Calibri" pitchFamily="34" charset="0"/>
+                <a:ea typeface="Calibri" pitchFamily="34" charset="-122"/>
+                <a:cs typeface="Calibri" pitchFamily="34" charset="-120"/>
+              </a:rPr>
+              <a:t>20150214-20150219최광모C36.JPG — 최광모, CC BY-SA 4.0</a:t>
+            </a:r>
+            <a:endParaRPr lang="en-US" sz="850" dirty="0"/>
+          </a:p>
+          <a:p>
+            <a:pPr indent="0" marL="0">
+              <a:spcAft>
+                <a:spcPts val="400"/>
+              </a:spcAft>
+              <a:buNone/>
+            </a:pPr>
+            <a:r>
+              <a:rPr lang="en-US" sz="850" b="1" dirty="0">
+                <a:solidFill>
+                  <a:srgbClr val="0B1F3A"/>
+                </a:solidFill>
+                <a:latin typeface="Calibri" pitchFamily="34" charset="0"/>
+                <a:ea typeface="Calibri" pitchFamily="34" charset="-122"/>
+                <a:cs typeface="Calibri" pitchFamily="34" charset="-120"/>
+              </a:rPr>
+              <a:t>Сервер: </a:t>
+            </a:r>
+            <a:pPr indent="0" marL="0">
+              <a:spcAft>
+                <a:spcPts val="400"/>
+              </a:spcAft>
+              <a:buNone/>
+            </a:pPr>
+            <a:r>
+              <a:rPr lang="en-US" sz="850" dirty="0">
+                <a:solidFill>
+                  <a:srgbClr val="1B2430"/>
+                </a:solidFill>
+                <a:latin typeface="Calibri" pitchFamily="34" charset="0"/>
+                <a:ea typeface="Calibri" pitchFamily="34" charset="-122"/>
+                <a:cs typeface="Calibri" pitchFamily="34" charset="-120"/>
+              </a:rPr>
+              <a:t>HP ProLiant DL360 and two DL380.jpg — Robert, CC BY 2.0</a:t>
+            </a:r>
+            <a:endParaRPr lang="en-US" sz="850" dirty="0"/>
+          </a:p>
+          <a:p>
+            <a:pPr indent="0" marL="0">
+              <a:spcAft>
+                <a:spcPts val="400"/>
+              </a:spcAft>
+              <a:buNone/>
+            </a:pPr>
+            <a:r>
+              <a:rPr lang="en-US" sz="850" b="1" dirty="0">
+                <a:solidFill>
+                  <a:srgbClr val="0B1F3A"/>
+                </a:solidFill>
+                <a:latin typeface="Calibri" pitchFamily="34" charset="0"/>
+                <a:ea typeface="Calibri" pitchFamily="34" charset="-122"/>
+                <a:cs typeface="Calibri" pitchFamily="34" charset="-120"/>
+              </a:rPr>
+              <a:t>МФУ: </a:t>
+            </a:r>
+            <a:pPr indent="0" marL="0">
+              <a:spcAft>
+                <a:spcPts val="400"/>
+              </a:spcAft>
+              <a:buNone/>
+            </a:pPr>
+            <a:r>
+              <a:rPr lang="en-US" sz="850" dirty="0">
+                <a:solidFill>
+                  <a:srgbClr val="1B2430"/>
+                </a:solidFill>
+                <a:latin typeface="Calibri" pitchFamily="34" charset="0"/>
+                <a:ea typeface="Calibri" pitchFamily="34" charset="-122"/>
+                <a:cs typeface="Calibri" pitchFamily="34" charset="-120"/>
+              </a:rPr>
+              <a:t>HP Color LaserJet CM1312nfi Multifunction Printer.jpg — Sgroey, CC BY-SA 4.0</a:t>
+            </a:r>
+            <a:endParaRPr lang="en-US" sz="850" dirty="0"/>
+          </a:p>
+          <a:p>
+            <a:pPr indent="0" marL="0">
+              <a:spcAft>
+                <a:spcPts val="400"/>
+              </a:spcAft>
+              <a:buNone/>
+            </a:pPr>
+            <a:r>
+              <a:rPr lang="en-US" sz="850" b="1" dirty="0">
+                <a:solidFill>
+                  <a:srgbClr val="0B1F3A"/>
+                </a:solidFill>
+                <a:latin typeface="Calibri" pitchFamily="34" charset="0"/>
+                <a:ea typeface="Calibri" pitchFamily="34" charset="-122"/>
+                <a:cs typeface="Calibri" pitchFamily="34" charset="-120"/>
+              </a:rPr>
+              <a:t>Шкаф: </a:t>
+            </a:r>
+            <a:pPr indent="0" marL="0">
+              <a:spcAft>
+                <a:spcPts val="400"/>
+              </a:spcAft>
+              <a:buNone/>
+            </a:pPr>
+            <a:r>
+              <a:rPr lang="en-US" sz="850" dirty="0">
+                <a:solidFill>
+                  <a:srgbClr val="1B2430"/>
+                </a:solidFill>
+                <a:latin typeface="Calibri" pitchFamily="34" charset="0"/>
+                <a:ea typeface="Calibri" pitchFamily="34" charset="-122"/>
+                <a:cs typeface="Calibri" pitchFamily="34" charset="-120"/>
+              </a:rPr>
+              <a:t>Racksserver.png — Racksserver, CC BY-SA 3.0</a:t>
+            </a:r>
+            <a:endParaRPr lang="en-US" sz="850" dirty="0"/>
+          </a:p>
+          <a:p>
+            <a:pPr indent="0" marL="0">
+              <a:spcAft>
+                <a:spcPts val="400"/>
+              </a:spcAft>
+              <a:buNone/>
+            </a:pPr>
+            <a:r>
+              <a:rPr lang="en-US" sz="850" b="1" dirty="0">
+                <a:solidFill>
+                  <a:srgbClr val="0B1F3A"/>
+                </a:solidFill>
+                <a:latin typeface="Calibri" pitchFamily="34" charset="0"/>
+                <a:ea typeface="Calibri" pitchFamily="34" charset="-122"/>
+                <a:cs typeface="Calibri" pitchFamily="34" charset="-120"/>
+              </a:rPr>
+              <a:t>ИБП: </a:t>
+            </a:r>
+            <a:pPr indent="0" marL="0">
+              <a:spcAft>
+                <a:spcPts val="400"/>
+              </a:spcAft>
+              <a:buNone/>
+            </a:pPr>
+            <a:r>
+              <a:rPr lang="en-US" sz="850" dirty="0">
+                <a:solidFill>
+                  <a:srgbClr val="1B2430"/>
+                </a:solidFill>
+                <a:latin typeface="Calibri" pitchFamily="34" charset="0"/>
+                <a:ea typeface="Calibri" pitchFamily="34" charset="-122"/>
+                <a:cs typeface="Calibri" pitchFamily="34" charset="-120"/>
+              </a:rPr>
+              <a:t>Apc ups rs500 07.jpg — Hundehalter, CC BY-SA 3.0</a:t>
+            </a:r>
+            <a:endParaRPr lang="en-US" sz="850" dirty="0"/>
+          </a:p>
+          <a:p>
+            <a:pPr indent="0" marL="0">
+              <a:spcAft>
+                <a:spcPts val="400"/>
+              </a:spcAft>
+              <a:buNone/>
+            </a:pPr>
+            <a:r>
+              <a:rPr lang="en-US" sz="850" b="1" dirty="0">
+                <a:solidFill>
+                  <a:srgbClr val="0B1F3A"/>
+                </a:solidFill>
+                <a:latin typeface="Calibri" pitchFamily="34" charset="0"/>
+                <a:ea typeface="Calibri" pitchFamily="34" charset="-122"/>
+                <a:cs typeface="Calibri" pitchFamily="34" charset="-120"/>
+              </a:rPr>
+              <a:t>Кабель UTP: </a:t>
+            </a:r>
+            <a:pPr indent="0" marL="0">
+              <a:spcAft>
+                <a:spcPts val="400"/>
+              </a:spcAft>
+              <a:buNone/>
+            </a:pPr>
+            <a:r>
+              <a:rPr lang="en-US" sz="850" dirty="0">
+                <a:solidFill>
+                  <a:srgbClr val="1B2430"/>
+                </a:solidFill>
+                <a:latin typeface="Calibri" pitchFamily="34" charset="0"/>
+                <a:ea typeface="Calibri" pitchFamily="34" charset="-122"/>
+                <a:cs typeface="Calibri" pitchFamily="34" charset="-120"/>
+              </a:rPr>
+              <a:t>10baseT cable.jpeg — Dflock, Public domain</a:t>
+            </a:r>
+            <a:endParaRPr lang="en-US" sz="850" dirty="0"/>
+          </a:p>
+          <a:p>
+            <a:pPr indent="0" marL="0">
+              <a:spcAft>
+                <a:spcPts val="400"/>
+              </a:spcAft>
+              <a:buNone/>
+            </a:pPr>
+            <a:r>
+              <a:rPr lang="en-US" sz="850" b="1" dirty="0">
+                <a:solidFill>
+                  <a:srgbClr val="0B1F3A"/>
+                </a:solidFill>
+                <a:latin typeface="Calibri" pitchFamily="34" charset="0"/>
+                <a:ea typeface="Calibri" pitchFamily="34" charset="-122"/>
+                <a:cs typeface="Calibri" pitchFamily="34" charset="-120"/>
+              </a:rPr>
+              <a:t>Коннекторы RJ-45: </a:t>
+            </a:r>
+            <a:pPr indent="0" marL="0">
+              <a:spcAft>
+                <a:spcPts val="400"/>
+              </a:spcAft>
+              <a:buNone/>
+            </a:pPr>
+            <a:r>
+              <a:rPr lang="en-US" sz="850" dirty="0">
+                <a:solidFill>
+                  <a:srgbClr val="1B2430"/>
+                </a:solidFill>
+                <a:latin typeface="Calibri" pitchFamily="34" charset="0"/>
+                <a:ea typeface="Calibri" pitchFamily="34" charset="-122"/>
+                <a:cs typeface="Calibri" pitchFamily="34" charset="-120"/>
+              </a:rPr>
+              <a:t>8P8C modular plugs (1).JPG — CyberXRef, CC BY-SA 3.0</a:t>
+            </a:r>
+            <a:endParaRPr lang="en-US" sz="850" dirty="0"/>
+          </a:p>
+        </p:txBody>
+      </p:sp>
+      <p:sp>
+        <p:nvSpPr>
+          <p:cNvPr id="5" name="Text 3"/>
+          <p:cNvSpPr txBox="1"/>
+          <p:nvPr/>
+        </p:nvSpPr>
+        <p:spPr>
+          <a:xfrm>
+            <a:off x="4663440" y="1234440"/>
+            <a:ext cx="4023360" cy="3017520"/>
+          </a:xfrm>
+          <a:prstGeom prst="rect">
+            <a:avLst/>
+          </a:prstGeom>
+          <a:noFill/>
+          <a:ln/>
+        </p:spPr>
+        <p:txBody>
+          <a:bodyPr wrap="square" lIns="0" tIns="0" rIns="0" bIns="0" rtlCol="0" anchor="t"/>
+          <a:lstStyle/>
+          <a:p>
+            <a:pPr indent="0" marL="0">
+              <a:spcAft>
+                <a:spcPts val="400"/>
+              </a:spcAft>
+              <a:buNone/>
+            </a:pPr>
+            <a:r>
+              <a:rPr lang="en-US" sz="850" b="1" dirty="0">
+                <a:solidFill>
+                  <a:srgbClr val="0B1F3A"/>
+                </a:solidFill>
+                <a:latin typeface="Calibri" pitchFamily="34" charset="0"/>
+                <a:ea typeface="Calibri" pitchFamily="34" charset="-122"/>
+                <a:cs typeface="Calibri" pitchFamily="34" charset="-120"/>
+              </a:rPr>
+              <a:t>Колпачки: </a:t>
+            </a:r>
+            <a:pPr indent="0" marL="0">
+              <a:spcAft>
+                <a:spcPts val="400"/>
+              </a:spcAft>
+              <a:buNone/>
+            </a:pPr>
+            <a:r>
+              <a:rPr lang="en-US" sz="850" dirty="0">
+                <a:solidFill>
+                  <a:srgbClr val="1B2430"/>
+                </a:solidFill>
+                <a:latin typeface="Calibri" pitchFamily="34" charset="0"/>
+                <a:ea typeface="Calibri" pitchFamily="34" charset="-122"/>
+                <a:cs typeface="Calibri" pitchFamily="34" charset="-120"/>
+              </a:rPr>
+              <a:t>10baseT jack.png — Dflock at English Wikipedia, Public domain</a:t>
+            </a:r>
+            <a:endParaRPr lang="en-US" sz="850" dirty="0"/>
+          </a:p>
+          <a:p>
+            <a:pPr indent="0" marL="0">
+              <a:spcAft>
+                <a:spcPts val="400"/>
+              </a:spcAft>
+              <a:buNone/>
+            </a:pPr>
+            <a:r>
+              <a:rPr lang="en-US" sz="850" b="1" dirty="0">
+                <a:solidFill>
+                  <a:srgbClr val="0B1F3A"/>
+                </a:solidFill>
+                <a:latin typeface="Calibri" pitchFamily="34" charset="0"/>
+                <a:ea typeface="Calibri" pitchFamily="34" charset="-122"/>
+                <a:cs typeface="Calibri" pitchFamily="34" charset="-120"/>
+              </a:rPr>
+              <a:t>Патч-панель: </a:t>
+            </a:r>
+            <a:pPr indent="0" marL="0">
+              <a:spcAft>
+                <a:spcPts val="400"/>
+              </a:spcAft>
+              <a:buNone/>
+            </a:pPr>
+            <a:r>
+              <a:rPr lang="en-US" sz="850" dirty="0">
+                <a:solidFill>
+                  <a:srgbClr val="1B2430"/>
+                </a:solidFill>
+                <a:latin typeface="Calibri" pitchFamily="34" charset="0"/>
+                <a:ea typeface="Calibri" pitchFamily="34" charset="-122"/>
+                <a:cs typeface="Calibri" pitchFamily="34" charset="-120"/>
+              </a:rPr>
+              <a:t>19" patchpanel for up to 24 keystone modules.jpg — Phiarc, CC BY-SA 4.0</a:t>
+            </a:r>
+            <a:endParaRPr lang="en-US" sz="850" dirty="0"/>
+          </a:p>
+          <a:p>
+            <a:pPr indent="0" marL="0">
+              <a:spcAft>
+                <a:spcPts val="400"/>
+              </a:spcAft>
+              <a:buNone/>
+            </a:pPr>
+            <a:r>
+              <a:rPr lang="en-US" sz="850" b="1" dirty="0">
+                <a:solidFill>
+                  <a:srgbClr val="0B1F3A"/>
+                </a:solidFill>
+                <a:latin typeface="Calibri" pitchFamily="34" charset="0"/>
+                <a:ea typeface="Calibri" pitchFamily="34" charset="-122"/>
+                <a:cs typeface="Calibri" pitchFamily="34" charset="-120"/>
+              </a:rPr>
+              <a:t>Розетка RJ-45: </a:t>
+            </a:r>
+            <a:pPr indent="0" marL="0">
+              <a:spcAft>
+                <a:spcPts val="400"/>
+              </a:spcAft>
+              <a:buNone/>
+            </a:pPr>
+            <a:r>
+              <a:rPr lang="en-US" sz="850" dirty="0">
+                <a:solidFill>
+                  <a:srgbClr val="1B2430"/>
+                </a:solidFill>
+                <a:latin typeface="Calibri" pitchFamily="34" charset="0"/>
+                <a:ea typeface="Calibri" pitchFamily="34" charset="-122"/>
+                <a:cs typeface="Calibri" pitchFamily="34" charset="-120"/>
+              </a:rPr>
+              <a:t>RJ45-wall.jpg — NzW at Wikipedia, Public domain</a:t>
+            </a:r>
+            <a:endParaRPr lang="en-US" sz="850" dirty="0"/>
+          </a:p>
+          <a:p>
+            <a:pPr indent="0" marL="0">
+              <a:spcAft>
+                <a:spcPts val="400"/>
+              </a:spcAft>
+              <a:buNone/>
+            </a:pPr>
+            <a:r>
+              <a:rPr lang="en-US" sz="850" b="1" dirty="0">
+                <a:solidFill>
+                  <a:srgbClr val="0B1F3A"/>
+                </a:solidFill>
+                <a:latin typeface="Calibri" pitchFamily="34" charset="0"/>
+                <a:ea typeface="Calibri" pitchFamily="34" charset="-122"/>
+                <a:cs typeface="Calibri" pitchFamily="34" charset="-120"/>
+              </a:rPr>
+              <a:t>Кабель-канал: </a:t>
+            </a:r>
+            <a:pPr indent="0" marL="0">
+              <a:spcAft>
+                <a:spcPts val="400"/>
+              </a:spcAft>
+              <a:buNone/>
+            </a:pPr>
+            <a:r>
+              <a:rPr lang="en-US" sz="850" dirty="0">
+                <a:solidFill>
+                  <a:srgbClr val="1B2430"/>
+                </a:solidFill>
+                <a:latin typeface="Calibri" pitchFamily="34" charset="0"/>
+                <a:ea typeface="Calibri" pitchFamily="34" charset="-122"/>
+                <a:cs typeface="Calibri" pitchFamily="34" charset="-120"/>
+              </a:rPr>
+              <a:t>Angular trunking accessories.JPG — Leotard, Public domain</a:t>
+            </a:r>
+            <a:endParaRPr lang="en-US" sz="850" dirty="0"/>
+          </a:p>
+          <a:p>
+            <a:pPr indent="0" marL="0">
+              <a:spcAft>
+                <a:spcPts val="400"/>
+              </a:spcAft>
+              <a:buNone/>
+            </a:pPr>
+            <a:r>
+              <a:rPr lang="en-US" sz="850" b="1" dirty="0">
+                <a:solidFill>
+                  <a:srgbClr val="0B1F3A"/>
+                </a:solidFill>
+                <a:latin typeface="Calibri" pitchFamily="34" charset="0"/>
+                <a:ea typeface="Calibri" pitchFamily="34" charset="-122"/>
+                <a:cs typeface="Calibri" pitchFamily="34" charset="-120"/>
+              </a:rPr>
+              <a:t>Патч-корд: </a:t>
+            </a:r>
+            <a:pPr indent="0" marL="0">
+              <a:spcAft>
+                <a:spcPts val="400"/>
+              </a:spcAft>
+              <a:buNone/>
+            </a:pPr>
+            <a:r>
+              <a:rPr lang="en-US" sz="850" dirty="0">
+                <a:solidFill>
+                  <a:srgbClr val="1B2430"/>
+                </a:solidFill>
+                <a:latin typeface="Calibri" pitchFamily="34" charset="0"/>
+                <a:ea typeface="Calibri" pitchFamily="34" charset="-122"/>
+                <a:cs typeface="Calibri" pitchFamily="34" charset="-120"/>
+              </a:rPr>
+              <a:t>232x174 RJ-45 patchcord.png — Mlewis000 (talk) (Uploads), CC BY-SA 3.0</a:t>
+            </a:r>
+            <a:endParaRPr lang="en-US" sz="850" dirty="0"/>
+          </a:p>
+          <a:p>
+            <a:pPr indent="0" marL="0">
+              <a:spcAft>
+                <a:spcPts val="400"/>
+              </a:spcAft>
+              <a:buNone/>
+            </a:pPr>
+            <a:r>
+              <a:rPr lang="en-US" sz="850" b="1" dirty="0">
+                <a:solidFill>
+                  <a:srgbClr val="0B1F3A"/>
+                </a:solidFill>
+                <a:latin typeface="Calibri" pitchFamily="34" charset="0"/>
+                <a:ea typeface="Calibri" pitchFamily="34" charset="-122"/>
+                <a:cs typeface="Calibri" pitchFamily="34" charset="-120"/>
+              </a:rPr>
+              <a:t>Консольный кабель: </a:t>
+            </a:r>
+            <a:pPr indent="0" marL="0">
+              <a:spcAft>
+                <a:spcPts val="400"/>
+              </a:spcAft>
+              <a:buNone/>
+            </a:pPr>
+            <a:r>
+              <a:rPr lang="en-US" sz="850" dirty="0">
+                <a:solidFill>
+                  <a:srgbClr val="1B2430"/>
+                </a:solidFill>
+                <a:latin typeface="Calibri" pitchFamily="34" charset="0"/>
+                <a:ea typeface="Calibri" pitchFamily="34" charset="-122"/>
+                <a:cs typeface="Calibri" pitchFamily="34" charset="-120"/>
+              </a:rPr>
+              <a:t>CiscoConsoleCable.jpg — Pries, CC BY-SA 4.0</a:t>
+            </a:r>
+            <a:endParaRPr lang="en-US" sz="850" dirty="0"/>
+          </a:p>
+          <a:p>
+            <a:pPr indent="0" marL="0">
+              <a:spcAft>
+                <a:spcPts val="400"/>
+              </a:spcAft>
+              <a:buNone/>
+            </a:pPr>
+            <a:r>
+              <a:rPr lang="en-US" sz="850" b="1" dirty="0">
+                <a:solidFill>
+                  <a:srgbClr val="0B1F3A"/>
+                </a:solidFill>
+                <a:latin typeface="Calibri" pitchFamily="34" charset="0"/>
+                <a:ea typeface="Calibri" pitchFamily="34" charset="-122"/>
+                <a:cs typeface="Calibri" pitchFamily="34" charset="-120"/>
+              </a:rPr>
+              <a:t>Кримпер и тестер: </a:t>
+            </a:r>
+            <a:pPr indent="0" marL="0">
+              <a:spcAft>
+                <a:spcPts val="400"/>
+              </a:spcAft>
+              <a:buNone/>
+            </a:pPr>
+            <a:r>
+              <a:rPr lang="en-US" sz="850" dirty="0">
+                <a:solidFill>
+                  <a:srgbClr val="1B2430"/>
+                </a:solidFill>
+                <a:latin typeface="Calibri" pitchFamily="34" charset="0"/>
+                <a:ea typeface="Calibri" pitchFamily="34" charset="-122"/>
+                <a:cs typeface="Calibri" pitchFamily="34" charset="-120"/>
+              </a:rPr>
+              <a:t>Cable stripper, cable tester (RJ45, RJ11), LSA-Tool and crimping tool.jpg — www.heimnetzwerke.net, CC BY 4.0</a:t>
+            </a:r>
+            <a:endParaRPr lang="en-US" sz="850" dirty="0"/>
+          </a:p>
+          <a:p>
+            <a:pPr indent="0" marL="0">
+              <a:spcAft>
+                <a:spcPts val="400"/>
+              </a:spcAft>
+              <a:buNone/>
+            </a:pPr>
+            <a:r>
+              <a:rPr lang="en-US" sz="850" b="1" dirty="0">
+                <a:solidFill>
+                  <a:srgbClr val="0B1F3A"/>
+                </a:solidFill>
+                <a:latin typeface="Calibri" pitchFamily="34" charset="0"/>
+                <a:ea typeface="Calibri" pitchFamily="34" charset="-122"/>
+                <a:cs typeface="Calibri" pitchFamily="34" charset="-120"/>
+              </a:rPr>
+              <a:t>Стяжки: </a:t>
+            </a:r>
+            <a:pPr indent="0" marL="0">
+              <a:spcAft>
+                <a:spcPts val="400"/>
+              </a:spcAft>
+              <a:buNone/>
+            </a:pPr>
+            <a:r>
+              <a:rPr lang="en-US" sz="850" dirty="0">
+                <a:solidFill>
+                  <a:srgbClr val="1B2430"/>
+                </a:solidFill>
+                <a:latin typeface="Calibri" pitchFamily="34" charset="0"/>
+                <a:ea typeface="Calibri" pitchFamily="34" charset="-122"/>
+                <a:cs typeface="Calibri" pitchFamily="34" charset="-120"/>
+              </a:rPr>
+              <a:t>Cable ties.jpg — Silverxxx (talk), CC BY-SA 3.0</a:t>
+            </a:r>
+            <a:endParaRPr lang="en-US" sz="850" dirty="0"/>
+          </a:p>
+        </p:txBody>
+      </p:sp>
+      <p:sp>
+        <p:nvSpPr>
+          <p:cNvPr id="6" name="Text 4"/>
+          <p:cNvSpPr txBox="1"/>
+          <p:nvPr/>
+        </p:nvSpPr>
+        <p:spPr>
+          <a:xfrm>
+            <a:off x="457200" y="4480560"/>
+            <a:ext cx="8229600" cy="274320"/>
+          </a:xfrm>
+          <a:prstGeom prst="rect">
+            <a:avLst/>
+          </a:prstGeom>
+          <a:noFill/>
+          <a:ln/>
+        </p:spPr>
+        <p:txBody>
+          <a:bodyPr wrap="square" lIns="0" tIns="0" rIns="0" bIns="0" rtlCol="0" anchor="ctr"/>
+          <a:lstStyle/>
+          <a:p>
+            <a:pPr indent="0" marL="0">
+              <a:buNone/>
+            </a:pPr>
+            <a:r>
+              <a:rPr lang="en-US" sz="1000" i="1" dirty="0">
+                <a:solidFill>
+                  <a:srgbClr val="5B6675"/>
+                </a:solidFill>
+                <a:latin typeface="Calibri" pitchFamily="34" charset="0"/>
+                <a:ea typeface="Calibri" pitchFamily="34" charset="-122"/>
+                <a:cs typeface="Calibri" pitchFamily="34" charset="-120"/>
+              </a:rPr>
+              <a:t>Страница каждого файла: commons.wikimedia.org/wiki/File:&lt;имя файла&gt;</a:t>
+            </a:r>
+            <a:endParaRPr lang="en-US" sz="1000" dirty="0"/>
           </a:p>
         </p:txBody>
       </p:sp>
@@ -17741,2374 +17067,1178 @@
           </a:p>
         </p:txBody>
       </p:sp>
-      <p:graphicFrame>
-        <p:nvGraphicFramePr>
-          <p:cNvPr id="10" name="Table 0"/>
-          <p:cNvGraphicFramePr>
-            <a:graphicFrameLocks noGrp="1"/>
-          </p:cNvGraphicFramePr>
-          <p:nvPr>
-            <p:extLst>
-              <p:ext uri="{D42A27DB-BD31-4B8C-83A1-F6EECF244321}">
-                <p14:modId xmlns:p14="http://schemas.microsoft.com/office/powerpoint/2010/main" val="1579011935"/>
-              </p:ext>
-            </p:extLst>
-          </p:nvPr>
-        </p:nvGraphicFramePr>
-        <p:xfrm>
-          <a:off x="457200" y="1234440"/>
-          <a:ext cx="8229600" cy="914400"/>
-        </p:xfrm>
-        <a:graphic>
-          <a:graphicData uri="http://schemas.openxmlformats.org/drawingml/2006/table">
-            <a:tbl>
-              <a:tblPr/>
-              <a:tblGrid>
-                <a:gridCol w="4846320"/>
-                <a:gridCol w="822960"/>
-                <a:gridCol w="1188720"/>
-                <a:gridCol w="1371600"/>
-              </a:tblGrid>
-              <a:tr h="365760">
-                <a:tc>
-                  <a:txBody>
-                    <a:bodyPr/>
-                    <a:lstStyle/>
-                    <a:p>
-                      <a:pPr algn="l" indent="0" marL="0">
-                        <a:buNone/>
-                      </a:pPr>
-                      <a:r>
-                        <a:rPr lang="en-US" sz="1200" b="1" dirty="0">
-                          <a:solidFill>
-                            <a:srgbClr val="FFFFFF"/>
-                          </a:solidFill>
-                          <a:latin typeface="Calibri" pitchFamily="34" charset="0"/>
-                          <a:ea typeface="Calibri" pitchFamily="34" charset="-122"/>
-                          <a:cs typeface="Calibri" pitchFamily="34" charset="-120"/>
-                        </a:rPr>
-                        <a:t>Наименование</a:t>
-                      </a:r>
-                      <a:endParaRPr lang="en-US" sz="1200" dirty="0">
-                        <a:latin typeface="Calibri" charset="0"/>
-                        <a:ea typeface="Calibri" charset="0"/>
-                        <a:cs typeface="Calibri" charset="0"/>
-                      </a:endParaRPr>
-                    </a:p>
-                  </a:txBody>
-                  <a:tcPr marL="91440" marR="91440" marT="45720" marB="45720" anchor="ctr">
-                    <a:lnL w="9525" cap="flat" cmpd="sng" algn="ctr">
-                      <a:solidFill>
-                        <a:srgbClr val="C9D3E0"/>
-                      </a:solidFill>
-                      <a:prstDash val="solid"/>
-                      <a:round/>
-                      <a:headEnd type="none" w="med" len="med"/>
-                      <a:tailEnd type="none" w="med" len="med"/>
-                    </a:lnL>
-                    <a:lnR w="9525" cap="flat" cmpd="sng" algn="ctr">
-                      <a:solidFill>
-                        <a:srgbClr val="C9D3E0"/>
-                      </a:solidFill>
-                      <a:prstDash val="solid"/>
-                      <a:round/>
-                      <a:headEnd type="none" w="med" len="med"/>
-                      <a:tailEnd type="none" w="med" len="med"/>
-                    </a:lnR>
-                    <a:lnT w="9525" cap="flat" cmpd="sng" algn="ctr">
-                      <a:solidFill>
-                        <a:srgbClr val="C9D3E0"/>
-                      </a:solidFill>
-                      <a:prstDash val="solid"/>
-                      <a:round/>
-                      <a:headEnd type="none" w="med" len="med"/>
-                      <a:tailEnd type="none" w="med" len="med"/>
-                    </a:lnT>
-                    <a:lnB w="9525" cap="flat" cmpd="sng" algn="ctr">
-                      <a:solidFill>
-                        <a:srgbClr val="C9D3E0"/>
-                      </a:solidFill>
-                      <a:prstDash val="solid"/>
-                      <a:round/>
-                      <a:headEnd type="none" w="med" len="med"/>
-                      <a:tailEnd type="none" w="med" len="med"/>
-                    </a:lnB>
-                    <a:solidFill>
-                      <a:srgbClr val="0B1F3A"/>
-                    </a:solidFill>
-                  </a:tcPr>
-                </a:tc>
-                <a:tc>
-                  <a:txBody>
-                    <a:bodyPr/>
-                    <a:lstStyle/>
-                    <a:p>
-                      <a:pPr algn="r" indent="0" marL="0">
-                        <a:buNone/>
-                      </a:pPr>
-                      <a:r>
-                        <a:rPr lang="en-US" sz="1200" b="1" dirty="0">
-                          <a:solidFill>
-                            <a:srgbClr val="FFFFFF"/>
-                          </a:solidFill>
-                          <a:latin typeface="Calibri" pitchFamily="34" charset="0"/>
-                          <a:ea typeface="Calibri" pitchFamily="34" charset="-122"/>
-                          <a:cs typeface="Calibri" pitchFamily="34" charset="-120"/>
-                        </a:rPr>
-                        <a:t>Кол-во</a:t>
-                      </a:r>
-                      <a:endParaRPr lang="en-US" sz="1200" dirty="0">
-                        <a:latin typeface="Calibri" charset="0"/>
-                        <a:ea typeface="Calibri" charset="0"/>
-                        <a:cs typeface="Calibri" charset="0"/>
-                      </a:endParaRPr>
-                    </a:p>
-                  </a:txBody>
-                  <a:tcPr marL="91440" marR="91440" marT="45720" marB="45720" anchor="ctr">
-                    <a:lnL w="9525" cap="flat" cmpd="sng" algn="ctr">
-                      <a:solidFill>
-                        <a:srgbClr val="C9D3E0"/>
-                      </a:solidFill>
-                      <a:prstDash val="solid"/>
-                      <a:round/>
-                      <a:headEnd type="none" w="med" len="med"/>
-                      <a:tailEnd type="none" w="med" len="med"/>
-                    </a:lnL>
-                    <a:lnR w="9525" cap="flat" cmpd="sng" algn="ctr">
-                      <a:solidFill>
-                        <a:srgbClr val="C9D3E0"/>
-                      </a:solidFill>
-                      <a:prstDash val="solid"/>
-                      <a:round/>
-                      <a:headEnd type="none" w="med" len="med"/>
-                      <a:tailEnd type="none" w="med" len="med"/>
-                    </a:lnR>
-                    <a:lnT w="9525" cap="flat" cmpd="sng" algn="ctr">
-                      <a:solidFill>
-                        <a:srgbClr val="C9D3E0"/>
-                      </a:solidFill>
-                      <a:prstDash val="solid"/>
-                      <a:round/>
-                      <a:headEnd type="none" w="med" len="med"/>
-                      <a:tailEnd type="none" w="med" len="med"/>
-                    </a:lnT>
-                    <a:lnB w="9525" cap="flat" cmpd="sng" algn="ctr">
-                      <a:solidFill>
-                        <a:srgbClr val="C9D3E0"/>
-                      </a:solidFill>
-                      <a:prstDash val="solid"/>
-                      <a:round/>
-                      <a:headEnd type="none" w="med" len="med"/>
-                      <a:tailEnd type="none" w="med" len="med"/>
-                    </a:lnB>
-                    <a:solidFill>
-                      <a:srgbClr val="0B1F3A"/>
-                    </a:solidFill>
-                  </a:tcPr>
-                </a:tc>
-                <a:tc>
-                  <a:txBody>
-                    <a:bodyPr/>
-                    <a:lstStyle/>
-                    <a:p>
-                      <a:pPr algn="r" indent="0" marL="0">
-                        <a:buNone/>
-                      </a:pPr>
-                      <a:r>
-                        <a:rPr lang="en-US" sz="1200" b="1" dirty="0">
-                          <a:solidFill>
-                            <a:srgbClr val="FFFFFF"/>
-                          </a:solidFill>
-                          <a:latin typeface="Calibri" pitchFamily="34" charset="0"/>
-                          <a:ea typeface="Calibri" pitchFamily="34" charset="-122"/>
-                          <a:cs typeface="Calibri" pitchFamily="34" charset="-120"/>
-                        </a:rPr>
-                        <a:t>Цена</a:t>
-                      </a:r>
-                      <a:endParaRPr lang="en-US" sz="1200" dirty="0">
-                        <a:latin typeface="Calibri" charset="0"/>
-                        <a:ea typeface="Calibri" charset="0"/>
-                        <a:cs typeface="Calibri" charset="0"/>
-                      </a:endParaRPr>
-                    </a:p>
-                  </a:txBody>
-                  <a:tcPr marL="91440" marR="91440" marT="45720" marB="45720" anchor="ctr">
-                    <a:lnL w="9525" cap="flat" cmpd="sng" algn="ctr">
-                      <a:solidFill>
-                        <a:srgbClr val="C9D3E0"/>
-                      </a:solidFill>
-                      <a:prstDash val="solid"/>
-                      <a:round/>
-                      <a:headEnd type="none" w="med" len="med"/>
-                      <a:tailEnd type="none" w="med" len="med"/>
-                    </a:lnL>
-                    <a:lnR w="9525" cap="flat" cmpd="sng" algn="ctr">
-                      <a:solidFill>
-                        <a:srgbClr val="C9D3E0"/>
-                      </a:solidFill>
-                      <a:prstDash val="solid"/>
-                      <a:round/>
-                      <a:headEnd type="none" w="med" len="med"/>
-                      <a:tailEnd type="none" w="med" len="med"/>
-                    </a:lnR>
-                    <a:lnT w="9525" cap="flat" cmpd="sng" algn="ctr">
-                      <a:solidFill>
-                        <a:srgbClr val="C9D3E0"/>
-                      </a:solidFill>
-                      <a:prstDash val="solid"/>
-                      <a:round/>
-                      <a:headEnd type="none" w="med" len="med"/>
-                      <a:tailEnd type="none" w="med" len="med"/>
-                    </a:lnT>
-                    <a:lnB w="9525" cap="flat" cmpd="sng" algn="ctr">
-                      <a:solidFill>
-                        <a:srgbClr val="C9D3E0"/>
-                      </a:solidFill>
-                      <a:prstDash val="solid"/>
-                      <a:round/>
-                      <a:headEnd type="none" w="med" len="med"/>
-                      <a:tailEnd type="none" w="med" len="med"/>
-                    </a:lnB>
-                    <a:solidFill>
-                      <a:srgbClr val="0B1F3A"/>
-                    </a:solidFill>
-                  </a:tcPr>
-                </a:tc>
-                <a:tc>
-                  <a:txBody>
-                    <a:bodyPr/>
-                    <a:lstStyle/>
-                    <a:p>
-                      <a:pPr algn="r" indent="0" marL="0">
-                        <a:buNone/>
-                      </a:pPr>
-                      <a:r>
-                        <a:rPr lang="en-US" sz="1200" b="1" dirty="0">
-                          <a:solidFill>
-                            <a:srgbClr val="FFFFFF"/>
-                          </a:solidFill>
-                          <a:latin typeface="Calibri" pitchFamily="34" charset="0"/>
-                          <a:ea typeface="Calibri" pitchFamily="34" charset="-122"/>
-                          <a:cs typeface="Calibri" pitchFamily="34" charset="-120"/>
-                        </a:rPr>
-                        <a:t>Сумма</a:t>
-                      </a:r>
-                      <a:endParaRPr lang="en-US" sz="1200" dirty="0">
-                        <a:latin typeface="Calibri" charset="0"/>
-                        <a:ea typeface="Calibri" charset="0"/>
-                        <a:cs typeface="Calibri" charset="0"/>
-                      </a:endParaRPr>
-                    </a:p>
-                  </a:txBody>
-                  <a:tcPr marL="91440" marR="91440" marT="45720" marB="45720" anchor="ctr">
-                    <a:lnL w="9525" cap="flat" cmpd="sng" algn="ctr">
-                      <a:solidFill>
-                        <a:srgbClr val="C9D3E0"/>
-                      </a:solidFill>
-                      <a:prstDash val="solid"/>
-                      <a:round/>
-                      <a:headEnd type="none" w="med" len="med"/>
-                      <a:tailEnd type="none" w="med" len="med"/>
-                    </a:lnL>
-                    <a:lnR w="9525" cap="flat" cmpd="sng" algn="ctr">
-                      <a:solidFill>
-                        <a:srgbClr val="C9D3E0"/>
-                      </a:solidFill>
-                      <a:prstDash val="solid"/>
-                      <a:round/>
-                      <a:headEnd type="none" w="med" len="med"/>
-                      <a:tailEnd type="none" w="med" len="med"/>
-                    </a:lnR>
-                    <a:lnT w="9525" cap="flat" cmpd="sng" algn="ctr">
-                      <a:solidFill>
-                        <a:srgbClr val="C9D3E0"/>
-                      </a:solidFill>
-                      <a:prstDash val="solid"/>
-                      <a:round/>
-                      <a:headEnd type="none" w="med" len="med"/>
-                      <a:tailEnd type="none" w="med" len="med"/>
-                    </a:lnT>
-                    <a:lnB w="9525" cap="flat" cmpd="sng" algn="ctr">
-                      <a:solidFill>
-                        <a:srgbClr val="C9D3E0"/>
-                      </a:solidFill>
-                      <a:prstDash val="solid"/>
-                      <a:round/>
-                      <a:headEnd type="none" w="med" len="med"/>
-                      <a:tailEnd type="none" w="med" len="med"/>
-                    </a:lnB>
-                    <a:solidFill>
-                      <a:srgbClr val="0B1F3A"/>
-                    </a:solidFill>
-                  </a:tcPr>
-                </a:tc>
-              </a:tr>
-              <a:tr h="365760">
-                <a:tc>
-                  <a:txBody>
-                    <a:bodyPr/>
-                    <a:lstStyle/>
-                    <a:p>
-                      <a:pPr indent="0" marL="0">
-                        <a:buNone/>
-                      </a:pPr>
-                      <a:r>
-                        <a:rPr lang="en-US" sz="1200" b="1" dirty="0">
-                          <a:solidFill>
-                            <a:srgbClr val="0B1F3A"/>
-                          </a:solidFill>
-                          <a:latin typeface="Calibri" pitchFamily="34" charset="0"/>
-                          <a:ea typeface="Calibri" pitchFamily="34" charset="-122"/>
-                          <a:cs typeface="Calibri" pitchFamily="34" charset="-120"/>
-                        </a:rPr>
-                        <a:t>Маршрутизатор Cisco ISR 2911/K9</a:t>
-                      </a:r>
-                      <a:endParaRPr lang="en-US" sz="1200" dirty="0">
-                        <a:latin typeface="Calibri" charset="0"/>
-                        <a:ea typeface="Calibri" charset="0"/>
-                        <a:cs typeface="Calibri" charset="0"/>
-                      </a:endParaRPr>
-                    </a:p>
-                  </a:txBody>
-                  <a:tcPr marL="91440" marR="91440" marT="45720" marB="45720" anchor="ctr">
-                    <a:lnL w="9525" cap="flat" cmpd="sng" algn="ctr">
-                      <a:solidFill>
-                        <a:srgbClr val="C9D3E0"/>
-                      </a:solidFill>
-                      <a:prstDash val="solid"/>
-                      <a:round/>
-                      <a:headEnd type="none" w="med" len="med"/>
-                      <a:tailEnd type="none" w="med" len="med"/>
-                    </a:lnL>
-                    <a:lnR w="9525" cap="flat" cmpd="sng" algn="ctr">
-                      <a:solidFill>
-                        <a:srgbClr val="C9D3E0"/>
-                      </a:solidFill>
-                      <a:prstDash val="solid"/>
-                      <a:round/>
-                      <a:headEnd type="none" w="med" len="med"/>
-                      <a:tailEnd type="none" w="med" len="med"/>
-                    </a:lnR>
-                    <a:lnT w="9525" cap="flat" cmpd="sng" algn="ctr">
-                      <a:solidFill>
-                        <a:srgbClr val="C9D3E0"/>
-                      </a:solidFill>
-                      <a:prstDash val="solid"/>
-                      <a:round/>
-                      <a:headEnd type="none" w="med" len="med"/>
-                      <a:tailEnd type="none" w="med" len="med"/>
-                    </a:lnT>
-                    <a:lnB w="9525" cap="flat" cmpd="sng" algn="ctr">
-                      <a:solidFill>
-                        <a:srgbClr val="C9D3E0"/>
-                      </a:solidFill>
-                      <a:prstDash val="solid"/>
-                      <a:round/>
-                      <a:headEnd type="none" w="med" len="med"/>
-                      <a:tailEnd type="none" w="med" len="med"/>
-                    </a:lnB>
-                    <a:solidFill>
-                      <a:srgbClr val="FFFFFF"/>
-                    </a:solidFill>
-                  </a:tcPr>
-                </a:tc>
-                <a:tc>
-                  <a:txBody>
-                    <a:bodyPr/>
-                    <a:lstStyle/>
-                    <a:p>
-                      <a:pPr algn="r" indent="0" marL="0">
-                        <a:buNone/>
-                      </a:pPr>
-                      <a:r>
-                        <a:rPr lang="en-US" sz="1200" dirty="0">
-                          <a:solidFill>
-                            <a:srgbClr val="1B2430"/>
-                          </a:solidFill>
-                          <a:latin typeface="Calibri" pitchFamily="34" charset="0"/>
-                          <a:ea typeface="Calibri" pitchFamily="34" charset="-122"/>
-                          <a:cs typeface="Calibri" pitchFamily="34" charset="-120"/>
-                        </a:rPr>
-                        <a:t>1</a:t>
-                      </a:r>
-                      <a:endParaRPr lang="en-US" sz="1200" dirty="0">
-                        <a:latin typeface="Calibri" charset="0"/>
-                        <a:ea typeface="Calibri" charset="0"/>
-                        <a:cs typeface="Calibri" charset="0"/>
-                      </a:endParaRPr>
-                    </a:p>
-                  </a:txBody>
-                  <a:tcPr marL="91440" marR="91440" marT="45720" marB="45720" anchor="ctr">
-                    <a:lnL w="9525" cap="flat" cmpd="sng" algn="ctr">
-                      <a:solidFill>
-                        <a:srgbClr val="C9D3E0"/>
-                      </a:solidFill>
-                      <a:prstDash val="solid"/>
-                      <a:round/>
-                      <a:headEnd type="none" w="med" len="med"/>
-                      <a:tailEnd type="none" w="med" len="med"/>
-                    </a:lnL>
-                    <a:lnR w="9525" cap="flat" cmpd="sng" algn="ctr">
-                      <a:solidFill>
-                        <a:srgbClr val="C9D3E0"/>
-                      </a:solidFill>
-                      <a:prstDash val="solid"/>
-                      <a:round/>
-                      <a:headEnd type="none" w="med" len="med"/>
-                      <a:tailEnd type="none" w="med" len="med"/>
-                    </a:lnR>
-                    <a:lnT w="9525" cap="flat" cmpd="sng" algn="ctr">
-                      <a:solidFill>
-                        <a:srgbClr val="C9D3E0"/>
-                      </a:solidFill>
-                      <a:prstDash val="solid"/>
-                      <a:round/>
-                      <a:headEnd type="none" w="med" len="med"/>
-                      <a:tailEnd type="none" w="med" len="med"/>
-                    </a:lnT>
-                    <a:lnB w="9525" cap="flat" cmpd="sng" algn="ctr">
-                      <a:solidFill>
-                        <a:srgbClr val="C9D3E0"/>
-                      </a:solidFill>
-                      <a:prstDash val="solid"/>
-                      <a:round/>
-                      <a:headEnd type="none" w="med" len="med"/>
-                      <a:tailEnd type="none" w="med" len="med"/>
-                    </a:lnB>
-                    <a:solidFill>
-                      <a:srgbClr val="FFFFFF"/>
-                    </a:solidFill>
-                  </a:tcPr>
-                </a:tc>
-                <a:tc>
-                  <a:txBody>
-                    <a:bodyPr/>
-                    <a:lstStyle/>
-                    <a:p>
-                      <a:pPr algn="r" indent="0" marL="0">
-                        <a:buNone/>
-                      </a:pPr>
-                      <a:r>
-                        <a:rPr lang="en-US" sz="1200" dirty="0">
-                          <a:solidFill>
-                            <a:srgbClr val="1B2430"/>
-                          </a:solidFill>
-                          <a:latin typeface="Calibri" pitchFamily="34" charset="0"/>
-                          <a:ea typeface="Calibri" pitchFamily="34" charset="-122"/>
-                          <a:cs typeface="Calibri" pitchFamily="34" charset="-120"/>
-                        </a:rPr>
-                        <a:t>65 000 ₽</a:t>
-                      </a:r>
-                      <a:endParaRPr lang="en-US" sz="1200" dirty="0">
-                        <a:latin typeface="Calibri" charset="0"/>
-                        <a:ea typeface="Calibri" charset="0"/>
-                        <a:cs typeface="Calibri" charset="0"/>
-                      </a:endParaRPr>
-                    </a:p>
-                  </a:txBody>
-                  <a:tcPr marL="91440" marR="91440" marT="45720" marB="45720" anchor="ctr">
-                    <a:lnL w="9525" cap="flat" cmpd="sng" algn="ctr">
-                      <a:solidFill>
-                        <a:srgbClr val="C9D3E0"/>
-                      </a:solidFill>
-                      <a:prstDash val="solid"/>
-                      <a:round/>
-                      <a:headEnd type="none" w="med" len="med"/>
-                      <a:tailEnd type="none" w="med" len="med"/>
-                    </a:lnL>
-                    <a:lnR w="9525" cap="flat" cmpd="sng" algn="ctr">
-                      <a:solidFill>
-                        <a:srgbClr val="C9D3E0"/>
-                      </a:solidFill>
-                      <a:prstDash val="solid"/>
-                      <a:round/>
-                      <a:headEnd type="none" w="med" len="med"/>
-                      <a:tailEnd type="none" w="med" len="med"/>
-                    </a:lnR>
-                    <a:lnT w="9525" cap="flat" cmpd="sng" algn="ctr">
-                      <a:solidFill>
-                        <a:srgbClr val="C9D3E0"/>
-                      </a:solidFill>
-                      <a:prstDash val="solid"/>
-                      <a:round/>
-                      <a:headEnd type="none" w="med" len="med"/>
-                      <a:tailEnd type="none" w="med" len="med"/>
-                    </a:lnT>
-                    <a:lnB w="9525" cap="flat" cmpd="sng" algn="ctr">
-                      <a:solidFill>
-                        <a:srgbClr val="C9D3E0"/>
-                      </a:solidFill>
-                      <a:prstDash val="solid"/>
-                      <a:round/>
-                      <a:headEnd type="none" w="med" len="med"/>
-                      <a:tailEnd type="none" w="med" len="med"/>
-                    </a:lnB>
-                    <a:solidFill>
-                      <a:srgbClr val="FFFFFF"/>
-                    </a:solidFill>
-                  </a:tcPr>
-                </a:tc>
-                <a:tc>
-                  <a:txBody>
-                    <a:bodyPr/>
-                    <a:lstStyle/>
-                    <a:p>
-                      <a:pPr algn="r" indent="0" marL="0">
-                        <a:buNone/>
-                      </a:pPr>
-                      <a:r>
-                        <a:rPr lang="en-US" sz="1200" b="1" dirty="0">
-                          <a:solidFill>
-                            <a:srgbClr val="1B2430"/>
-                          </a:solidFill>
-                          <a:latin typeface="Calibri" pitchFamily="34" charset="0"/>
-                          <a:ea typeface="Calibri" pitchFamily="34" charset="-122"/>
-                          <a:cs typeface="Calibri" pitchFamily="34" charset="-120"/>
-                        </a:rPr>
-                        <a:t>65 000 ₽</a:t>
-                      </a:r>
-                      <a:endParaRPr lang="en-US" sz="1200" dirty="0">
-                        <a:latin typeface="Calibri" charset="0"/>
-                        <a:ea typeface="Calibri" charset="0"/>
-                        <a:cs typeface="Calibri" charset="0"/>
-                      </a:endParaRPr>
-                    </a:p>
-                  </a:txBody>
-                  <a:tcPr marL="91440" marR="91440" marT="45720" marB="45720" anchor="ctr">
-                    <a:lnL w="9525" cap="flat" cmpd="sng" algn="ctr">
-                      <a:solidFill>
-                        <a:srgbClr val="C9D3E0"/>
-                      </a:solidFill>
-                      <a:prstDash val="solid"/>
-                      <a:round/>
-                      <a:headEnd type="none" w="med" len="med"/>
-                      <a:tailEnd type="none" w="med" len="med"/>
-                    </a:lnL>
-                    <a:lnR w="9525" cap="flat" cmpd="sng" algn="ctr">
-                      <a:solidFill>
-                        <a:srgbClr val="C9D3E0"/>
-                      </a:solidFill>
-                      <a:prstDash val="solid"/>
-                      <a:round/>
-                      <a:headEnd type="none" w="med" len="med"/>
-                      <a:tailEnd type="none" w="med" len="med"/>
-                    </a:lnR>
-                    <a:lnT w="9525" cap="flat" cmpd="sng" algn="ctr">
-                      <a:solidFill>
-                        <a:srgbClr val="C9D3E0"/>
-                      </a:solidFill>
-                      <a:prstDash val="solid"/>
-                      <a:round/>
-                      <a:headEnd type="none" w="med" len="med"/>
-                      <a:tailEnd type="none" w="med" len="med"/>
-                    </a:lnT>
-                    <a:lnB w="9525" cap="flat" cmpd="sng" algn="ctr">
-                      <a:solidFill>
-                        <a:srgbClr val="C9D3E0"/>
-                      </a:solidFill>
-                      <a:prstDash val="solid"/>
-                      <a:round/>
-                      <a:headEnd type="none" w="med" len="med"/>
-                      <a:tailEnd type="none" w="med" len="med"/>
-                    </a:lnB>
-                    <a:solidFill>
-                      <a:srgbClr val="FFFFFF"/>
-                    </a:solidFill>
-                  </a:tcPr>
-                </a:tc>
-              </a:tr>
-              <a:tr h="365760">
-                <a:tc>
-                  <a:txBody>
-                    <a:bodyPr/>
-                    <a:lstStyle/>
-                    <a:p>
-                      <a:pPr indent="0" marL="0">
-                        <a:buNone/>
-                      </a:pPr>
-                      <a:r>
-                        <a:rPr lang="en-US" sz="1200" b="1" dirty="0">
-                          <a:solidFill>
-                            <a:srgbClr val="E63E62"/>
-                          </a:solidFill>
-                          <a:latin typeface="Calibri" pitchFamily="34" charset="0"/>
-                          <a:ea typeface="Calibri" pitchFamily="34" charset="-122"/>
-                          <a:cs typeface="Calibri" pitchFamily="34" charset="-120"/>
-                        </a:rPr>
-                        <a:t>Коммутатор Cisco Catalyst 2960-24TT-L</a:t>
-                      </a:r>
-                      <a:endParaRPr lang="en-US" sz="1200" dirty="0">
-                        <a:latin typeface="Calibri" charset="0"/>
-                        <a:ea typeface="Calibri" charset="0"/>
-                        <a:cs typeface="Calibri" charset="0"/>
-                      </a:endParaRPr>
-                    </a:p>
-                  </a:txBody>
-                  <a:tcPr marL="91440" marR="91440" marT="45720" marB="45720" anchor="ctr">
-                    <a:lnL w="9525" cap="flat" cmpd="sng" algn="ctr">
-                      <a:solidFill>
-                        <a:srgbClr val="C9D3E0"/>
-                      </a:solidFill>
-                      <a:prstDash val="solid"/>
-                      <a:round/>
-                      <a:headEnd type="none" w="med" len="med"/>
-                      <a:tailEnd type="none" w="med" len="med"/>
-                    </a:lnL>
-                    <a:lnR w="9525" cap="flat" cmpd="sng" algn="ctr">
-                      <a:solidFill>
-                        <a:srgbClr val="C9D3E0"/>
-                      </a:solidFill>
-                      <a:prstDash val="solid"/>
-                      <a:round/>
-                      <a:headEnd type="none" w="med" len="med"/>
-                      <a:tailEnd type="none" w="med" len="med"/>
-                    </a:lnR>
-                    <a:lnT w="9525" cap="flat" cmpd="sng" algn="ctr">
-                      <a:solidFill>
-                        <a:srgbClr val="C9D3E0"/>
-                      </a:solidFill>
-                      <a:prstDash val="solid"/>
-                      <a:round/>
-                      <a:headEnd type="none" w="med" len="med"/>
-                      <a:tailEnd type="none" w="med" len="med"/>
-                    </a:lnT>
-                    <a:lnB w="9525" cap="flat" cmpd="sng" algn="ctr">
-                      <a:solidFill>
-                        <a:srgbClr val="C9D3E0"/>
-                      </a:solidFill>
-                      <a:prstDash val="solid"/>
-                      <a:round/>
-                      <a:headEnd type="none" w="med" len="med"/>
-                      <a:tailEnd type="none" w="med" len="med"/>
-                    </a:lnB>
-                    <a:solidFill>
-                      <a:srgbClr val="FFFFFF"/>
-                    </a:solidFill>
-                  </a:tcPr>
-                </a:tc>
-                <a:tc>
-                  <a:txBody>
-                    <a:bodyPr/>
-                    <a:lstStyle/>
-                    <a:p>
-                      <a:pPr algn="r" indent="0" marL="0">
-                        <a:buNone/>
-                      </a:pPr>
-                      <a:r>
-                        <a:rPr lang="en-US" sz="1200" dirty="0">
-                          <a:solidFill>
-                            <a:srgbClr val="1B2430"/>
-                          </a:solidFill>
-                          <a:latin typeface="Calibri" pitchFamily="34" charset="0"/>
-                          <a:ea typeface="Calibri" pitchFamily="34" charset="-122"/>
-                          <a:cs typeface="Calibri" pitchFamily="34" charset="-120"/>
-                        </a:rPr>
-                        <a:t>4</a:t>
-                      </a:r>
-                      <a:endParaRPr lang="en-US" sz="1200" dirty="0">
-                        <a:latin typeface="Calibri" charset="0"/>
-                        <a:ea typeface="Calibri" charset="0"/>
-                        <a:cs typeface="Calibri" charset="0"/>
-                      </a:endParaRPr>
-                    </a:p>
-                  </a:txBody>
-                  <a:tcPr marL="91440" marR="91440" marT="45720" marB="45720" anchor="ctr">
-                    <a:lnL w="9525" cap="flat" cmpd="sng" algn="ctr">
-                      <a:solidFill>
-                        <a:srgbClr val="C9D3E0"/>
-                      </a:solidFill>
-                      <a:prstDash val="solid"/>
-                      <a:round/>
-                      <a:headEnd type="none" w="med" len="med"/>
-                      <a:tailEnd type="none" w="med" len="med"/>
-                    </a:lnL>
-                    <a:lnR w="9525" cap="flat" cmpd="sng" algn="ctr">
-                      <a:solidFill>
-                        <a:srgbClr val="C9D3E0"/>
-                      </a:solidFill>
-                      <a:prstDash val="solid"/>
-                      <a:round/>
-                      <a:headEnd type="none" w="med" len="med"/>
-                      <a:tailEnd type="none" w="med" len="med"/>
-                    </a:lnR>
-                    <a:lnT w="9525" cap="flat" cmpd="sng" algn="ctr">
-                      <a:solidFill>
-                        <a:srgbClr val="C9D3E0"/>
-                      </a:solidFill>
-                      <a:prstDash val="solid"/>
-                      <a:round/>
-                      <a:headEnd type="none" w="med" len="med"/>
-                      <a:tailEnd type="none" w="med" len="med"/>
-                    </a:lnT>
-                    <a:lnB w="9525" cap="flat" cmpd="sng" algn="ctr">
-                      <a:solidFill>
-                        <a:srgbClr val="C9D3E0"/>
-                      </a:solidFill>
-                      <a:prstDash val="solid"/>
-                      <a:round/>
-                      <a:headEnd type="none" w="med" len="med"/>
-                      <a:tailEnd type="none" w="med" len="med"/>
-                    </a:lnB>
-                    <a:solidFill>
-                      <a:srgbClr val="FFFFFF"/>
-                    </a:solidFill>
-                  </a:tcPr>
-                </a:tc>
-                <a:tc>
-                  <a:txBody>
-                    <a:bodyPr/>
-                    <a:lstStyle/>
-                    <a:p>
-                      <a:pPr algn="r" indent="0" marL="0">
-                        <a:buNone/>
-                      </a:pPr>
-                      <a:r>
-                        <a:rPr lang="en-US" sz="1200" dirty="0">
-                          <a:solidFill>
-                            <a:srgbClr val="1B2430"/>
-                          </a:solidFill>
-                          <a:latin typeface="Calibri" pitchFamily="34" charset="0"/>
-                          <a:ea typeface="Calibri" pitchFamily="34" charset="-122"/>
-                          <a:cs typeface="Calibri" pitchFamily="34" charset="-120"/>
-                        </a:rPr>
-                        <a:t>28 000 ₽</a:t>
-                      </a:r>
-                      <a:endParaRPr lang="en-US" sz="1200" dirty="0">
-                        <a:latin typeface="Calibri" charset="0"/>
-                        <a:ea typeface="Calibri" charset="0"/>
-                        <a:cs typeface="Calibri" charset="0"/>
-                      </a:endParaRPr>
-                    </a:p>
-                  </a:txBody>
-                  <a:tcPr marL="91440" marR="91440" marT="45720" marB="45720" anchor="ctr">
-                    <a:lnL w="9525" cap="flat" cmpd="sng" algn="ctr">
-                      <a:solidFill>
-                        <a:srgbClr val="C9D3E0"/>
-                      </a:solidFill>
-                      <a:prstDash val="solid"/>
-                      <a:round/>
-                      <a:headEnd type="none" w="med" len="med"/>
-                      <a:tailEnd type="none" w="med" len="med"/>
-                    </a:lnL>
-                    <a:lnR w="9525" cap="flat" cmpd="sng" algn="ctr">
-                      <a:solidFill>
-                        <a:srgbClr val="C9D3E0"/>
-                      </a:solidFill>
-                      <a:prstDash val="solid"/>
-                      <a:round/>
-                      <a:headEnd type="none" w="med" len="med"/>
-                      <a:tailEnd type="none" w="med" len="med"/>
-                    </a:lnR>
-                    <a:lnT w="9525" cap="flat" cmpd="sng" algn="ctr">
-                      <a:solidFill>
-                        <a:srgbClr val="C9D3E0"/>
-                      </a:solidFill>
-                      <a:prstDash val="solid"/>
-                      <a:round/>
-                      <a:headEnd type="none" w="med" len="med"/>
-                      <a:tailEnd type="none" w="med" len="med"/>
-                    </a:lnT>
-                    <a:lnB w="9525" cap="flat" cmpd="sng" algn="ctr">
-                      <a:solidFill>
-                        <a:srgbClr val="C9D3E0"/>
-                      </a:solidFill>
-                      <a:prstDash val="solid"/>
-                      <a:round/>
-                      <a:headEnd type="none" w="med" len="med"/>
-                      <a:tailEnd type="none" w="med" len="med"/>
-                    </a:lnB>
-                    <a:solidFill>
-                      <a:srgbClr val="FFFFFF"/>
-                    </a:solidFill>
-                  </a:tcPr>
-                </a:tc>
-                <a:tc>
-                  <a:txBody>
-                    <a:bodyPr/>
-                    <a:lstStyle/>
-                    <a:p>
-                      <a:pPr algn="r" indent="0" marL="0">
-                        <a:buNone/>
-                      </a:pPr>
-                      <a:r>
-                        <a:rPr lang="en-US" sz="1200" b="1" dirty="0">
-                          <a:solidFill>
-                            <a:srgbClr val="1B2430"/>
-                          </a:solidFill>
-                          <a:latin typeface="Calibri" pitchFamily="34" charset="0"/>
-                          <a:ea typeface="Calibri" pitchFamily="34" charset="-122"/>
-                          <a:cs typeface="Calibri" pitchFamily="34" charset="-120"/>
-                        </a:rPr>
-                        <a:t>112 000 ₽</a:t>
-                      </a:r>
-                      <a:endParaRPr lang="en-US" sz="1200" dirty="0">
-                        <a:latin typeface="Calibri" charset="0"/>
-                        <a:ea typeface="Calibri" charset="0"/>
-                        <a:cs typeface="Calibri" charset="0"/>
-                      </a:endParaRPr>
-                    </a:p>
-                  </a:txBody>
-                  <a:tcPr marL="91440" marR="91440" marT="45720" marB="45720" anchor="ctr">
-                    <a:lnL w="9525" cap="flat" cmpd="sng" algn="ctr">
-                      <a:solidFill>
-                        <a:srgbClr val="C9D3E0"/>
-                      </a:solidFill>
-                      <a:prstDash val="solid"/>
-                      <a:round/>
-                      <a:headEnd type="none" w="med" len="med"/>
-                      <a:tailEnd type="none" w="med" len="med"/>
-                    </a:lnL>
-                    <a:lnR w="9525" cap="flat" cmpd="sng" algn="ctr">
-                      <a:solidFill>
-                        <a:srgbClr val="C9D3E0"/>
-                      </a:solidFill>
-                      <a:prstDash val="solid"/>
-                      <a:round/>
-                      <a:headEnd type="none" w="med" len="med"/>
-                      <a:tailEnd type="none" w="med" len="med"/>
-                    </a:lnR>
-                    <a:lnT w="9525" cap="flat" cmpd="sng" algn="ctr">
-                      <a:solidFill>
-                        <a:srgbClr val="C9D3E0"/>
-                      </a:solidFill>
-                      <a:prstDash val="solid"/>
-                      <a:round/>
-                      <a:headEnd type="none" w="med" len="med"/>
-                      <a:tailEnd type="none" w="med" len="med"/>
-                    </a:lnT>
-                    <a:lnB w="9525" cap="flat" cmpd="sng" algn="ctr">
-                      <a:solidFill>
-                        <a:srgbClr val="C9D3E0"/>
-                      </a:solidFill>
-                      <a:prstDash val="solid"/>
-                      <a:round/>
-                      <a:headEnd type="none" w="med" len="med"/>
-                      <a:tailEnd type="none" w="med" len="med"/>
-                    </a:lnB>
-                    <a:solidFill>
-                      <a:srgbClr val="FFFFFF"/>
-                    </a:solidFill>
-                  </a:tcPr>
-                </a:tc>
-              </a:tr>
-              <a:tr h="365760">
-                <a:tc>
-                  <a:txBody>
-                    <a:bodyPr/>
-                    <a:lstStyle/>
-                    <a:p>
-                      <a:pPr indent="0" marL="0">
-                        <a:buNone/>
-                      </a:pPr>
-                      <a:r>
-                        <a:rPr lang="en-US" sz="1200" b="1" dirty="0">
-                          <a:solidFill>
-                            <a:srgbClr val="FF8A00"/>
-                          </a:solidFill>
-                          <a:latin typeface="Calibri" pitchFamily="34" charset="0"/>
-                          <a:ea typeface="Calibri" pitchFamily="34" charset="-122"/>
-                          <a:cs typeface="Calibri" pitchFamily="34" charset="-120"/>
-                        </a:rPr>
-                        <a:t>Рабочая станция (Core i5, 16 ГБ, SSD 512 ГБ) + монитор 24"</a:t>
-                      </a:r>
-                      <a:endParaRPr lang="en-US" sz="1200" dirty="0">
-                        <a:latin typeface="Calibri" charset="0"/>
-                        <a:ea typeface="Calibri" charset="0"/>
-                        <a:cs typeface="Calibri" charset="0"/>
-                      </a:endParaRPr>
-                    </a:p>
-                  </a:txBody>
-                  <a:tcPr marL="91440" marR="91440" marT="45720" marB="45720" anchor="ctr">
-                    <a:lnL w="9525" cap="flat" cmpd="sng" algn="ctr">
-                      <a:solidFill>
-                        <a:srgbClr val="C9D3E0"/>
-                      </a:solidFill>
-                      <a:prstDash val="solid"/>
-                      <a:round/>
-                      <a:headEnd type="none" w="med" len="med"/>
-                      <a:tailEnd type="none" w="med" len="med"/>
-                    </a:lnL>
-                    <a:lnR w="9525" cap="flat" cmpd="sng" algn="ctr">
-                      <a:solidFill>
-                        <a:srgbClr val="C9D3E0"/>
-                      </a:solidFill>
-                      <a:prstDash val="solid"/>
-                      <a:round/>
-                      <a:headEnd type="none" w="med" len="med"/>
-                      <a:tailEnd type="none" w="med" len="med"/>
-                    </a:lnR>
-                    <a:lnT w="9525" cap="flat" cmpd="sng" algn="ctr">
-                      <a:solidFill>
-                        <a:srgbClr val="C9D3E0"/>
-                      </a:solidFill>
-                      <a:prstDash val="solid"/>
-                      <a:round/>
-                      <a:headEnd type="none" w="med" len="med"/>
-                      <a:tailEnd type="none" w="med" len="med"/>
-                    </a:lnT>
-                    <a:lnB w="9525" cap="flat" cmpd="sng" algn="ctr">
-                      <a:solidFill>
-                        <a:srgbClr val="C9D3E0"/>
-                      </a:solidFill>
-                      <a:prstDash val="solid"/>
-                      <a:round/>
-                      <a:headEnd type="none" w="med" len="med"/>
-                      <a:tailEnd type="none" w="med" len="med"/>
-                    </a:lnB>
-                    <a:solidFill>
-                      <a:srgbClr val="FFFFFF"/>
-                    </a:solidFill>
-                  </a:tcPr>
-                </a:tc>
-                <a:tc>
-                  <a:txBody>
-                    <a:bodyPr/>
-                    <a:lstStyle/>
-                    <a:p>
-                      <a:pPr algn="r" indent="0" marL="0">
-                        <a:buNone/>
-                      </a:pPr>
-                      <a:r>
-                        <a:rPr lang="en-US" sz="1200" dirty="0">
-                          <a:solidFill>
-                            <a:srgbClr val="1B2430"/>
-                          </a:solidFill>
-                          <a:latin typeface="Calibri" pitchFamily="34" charset="0"/>
-                          <a:ea typeface="Calibri" pitchFamily="34" charset="-122"/>
-                          <a:cs typeface="Calibri" pitchFamily="34" charset="-120"/>
-                        </a:rPr>
-                        <a:t>9</a:t>
-                      </a:r>
-                      <a:endParaRPr lang="en-US" sz="1200" dirty="0">
-                        <a:latin typeface="Calibri" charset="0"/>
-                        <a:ea typeface="Calibri" charset="0"/>
-                        <a:cs typeface="Calibri" charset="0"/>
-                      </a:endParaRPr>
-                    </a:p>
-                  </a:txBody>
-                  <a:tcPr marL="91440" marR="91440" marT="45720" marB="45720" anchor="ctr">
-                    <a:lnL w="9525" cap="flat" cmpd="sng" algn="ctr">
-                      <a:solidFill>
-                        <a:srgbClr val="C9D3E0"/>
-                      </a:solidFill>
-                      <a:prstDash val="solid"/>
-                      <a:round/>
-                      <a:headEnd type="none" w="med" len="med"/>
-                      <a:tailEnd type="none" w="med" len="med"/>
-                    </a:lnL>
-                    <a:lnR w="9525" cap="flat" cmpd="sng" algn="ctr">
-                      <a:solidFill>
-                        <a:srgbClr val="C9D3E0"/>
-                      </a:solidFill>
-                      <a:prstDash val="solid"/>
-                      <a:round/>
-                      <a:headEnd type="none" w="med" len="med"/>
-                      <a:tailEnd type="none" w="med" len="med"/>
-                    </a:lnR>
-                    <a:lnT w="9525" cap="flat" cmpd="sng" algn="ctr">
-                      <a:solidFill>
-                        <a:srgbClr val="C9D3E0"/>
-                      </a:solidFill>
-                      <a:prstDash val="solid"/>
-                      <a:round/>
-                      <a:headEnd type="none" w="med" len="med"/>
-                      <a:tailEnd type="none" w="med" len="med"/>
-                    </a:lnT>
-                    <a:lnB w="9525" cap="flat" cmpd="sng" algn="ctr">
-                      <a:solidFill>
-                        <a:srgbClr val="C9D3E0"/>
-                      </a:solidFill>
-                      <a:prstDash val="solid"/>
-                      <a:round/>
-                      <a:headEnd type="none" w="med" len="med"/>
-                      <a:tailEnd type="none" w="med" len="med"/>
-                    </a:lnB>
-                    <a:solidFill>
-                      <a:srgbClr val="FFFFFF"/>
-                    </a:solidFill>
-                  </a:tcPr>
-                </a:tc>
-                <a:tc>
-                  <a:txBody>
-                    <a:bodyPr/>
-                    <a:lstStyle/>
-                    <a:p>
-                      <a:pPr algn="r" indent="0" marL="0">
-                        <a:buNone/>
-                      </a:pPr>
-                      <a:r>
-                        <a:rPr lang="en-US" sz="1200" dirty="0">
-                          <a:solidFill>
-                            <a:srgbClr val="1B2430"/>
-                          </a:solidFill>
-                          <a:latin typeface="Calibri" pitchFamily="34" charset="0"/>
-                          <a:ea typeface="Calibri" pitchFamily="34" charset="-122"/>
-                          <a:cs typeface="Calibri" pitchFamily="34" charset="-120"/>
-                        </a:rPr>
-                        <a:t>62 000 ₽</a:t>
-                      </a:r>
-                      <a:endParaRPr lang="en-US" sz="1200" dirty="0">
-                        <a:latin typeface="Calibri" charset="0"/>
-                        <a:ea typeface="Calibri" charset="0"/>
-                        <a:cs typeface="Calibri" charset="0"/>
-                      </a:endParaRPr>
-                    </a:p>
-                  </a:txBody>
-                  <a:tcPr marL="91440" marR="91440" marT="45720" marB="45720" anchor="ctr">
-                    <a:lnL w="9525" cap="flat" cmpd="sng" algn="ctr">
-                      <a:solidFill>
-                        <a:srgbClr val="C9D3E0"/>
-                      </a:solidFill>
-                      <a:prstDash val="solid"/>
-                      <a:round/>
-                      <a:headEnd type="none" w="med" len="med"/>
-                      <a:tailEnd type="none" w="med" len="med"/>
-                    </a:lnL>
-                    <a:lnR w="9525" cap="flat" cmpd="sng" algn="ctr">
-                      <a:solidFill>
-                        <a:srgbClr val="C9D3E0"/>
-                      </a:solidFill>
-                      <a:prstDash val="solid"/>
-                      <a:round/>
-                      <a:headEnd type="none" w="med" len="med"/>
-                      <a:tailEnd type="none" w="med" len="med"/>
-                    </a:lnR>
-                    <a:lnT w="9525" cap="flat" cmpd="sng" algn="ctr">
-                      <a:solidFill>
-                        <a:srgbClr val="C9D3E0"/>
-                      </a:solidFill>
-                      <a:prstDash val="solid"/>
-                      <a:round/>
-                      <a:headEnd type="none" w="med" len="med"/>
-                      <a:tailEnd type="none" w="med" len="med"/>
-                    </a:lnT>
-                    <a:lnB w="9525" cap="flat" cmpd="sng" algn="ctr">
-                      <a:solidFill>
-                        <a:srgbClr val="C9D3E0"/>
-                      </a:solidFill>
-                      <a:prstDash val="solid"/>
-                      <a:round/>
-                      <a:headEnd type="none" w="med" len="med"/>
-                      <a:tailEnd type="none" w="med" len="med"/>
-                    </a:lnB>
-                    <a:solidFill>
-                      <a:srgbClr val="FFFFFF"/>
-                    </a:solidFill>
-                  </a:tcPr>
-                </a:tc>
-                <a:tc>
-                  <a:txBody>
-                    <a:bodyPr/>
-                    <a:lstStyle/>
-                    <a:p>
-                      <a:pPr algn="r" indent="0" marL="0">
-                        <a:buNone/>
-                      </a:pPr>
-                      <a:r>
-                        <a:rPr lang="en-US" sz="1200" b="1" dirty="0">
-                          <a:solidFill>
-                            <a:srgbClr val="1B2430"/>
-                          </a:solidFill>
-                          <a:latin typeface="Calibri" pitchFamily="34" charset="0"/>
-                          <a:ea typeface="Calibri" pitchFamily="34" charset="-122"/>
-                          <a:cs typeface="Calibri" pitchFamily="34" charset="-120"/>
-                        </a:rPr>
-                        <a:t>558 000 ₽</a:t>
-                      </a:r>
-                      <a:endParaRPr lang="en-US" sz="1200" dirty="0">
-                        <a:latin typeface="Calibri" charset="0"/>
-                        <a:ea typeface="Calibri" charset="0"/>
-                        <a:cs typeface="Calibri" charset="0"/>
-                      </a:endParaRPr>
-                    </a:p>
-                  </a:txBody>
-                  <a:tcPr marL="91440" marR="91440" marT="45720" marB="45720" anchor="ctr">
-                    <a:lnL w="9525" cap="flat" cmpd="sng" algn="ctr">
-                      <a:solidFill>
-                        <a:srgbClr val="C9D3E0"/>
-                      </a:solidFill>
-                      <a:prstDash val="solid"/>
-                      <a:round/>
-                      <a:headEnd type="none" w="med" len="med"/>
-                      <a:tailEnd type="none" w="med" len="med"/>
-                    </a:lnL>
-                    <a:lnR w="9525" cap="flat" cmpd="sng" algn="ctr">
-                      <a:solidFill>
-                        <a:srgbClr val="C9D3E0"/>
-                      </a:solidFill>
-                      <a:prstDash val="solid"/>
-                      <a:round/>
-                      <a:headEnd type="none" w="med" len="med"/>
-                      <a:tailEnd type="none" w="med" len="med"/>
-                    </a:lnR>
-                    <a:lnT w="9525" cap="flat" cmpd="sng" algn="ctr">
-                      <a:solidFill>
-                        <a:srgbClr val="C9D3E0"/>
-                      </a:solidFill>
-                      <a:prstDash val="solid"/>
-                      <a:round/>
-                      <a:headEnd type="none" w="med" len="med"/>
-                      <a:tailEnd type="none" w="med" len="med"/>
-                    </a:lnT>
-                    <a:lnB w="9525" cap="flat" cmpd="sng" algn="ctr">
-                      <a:solidFill>
-                        <a:srgbClr val="C9D3E0"/>
-                      </a:solidFill>
-                      <a:prstDash val="solid"/>
-                      <a:round/>
-                      <a:headEnd type="none" w="med" len="med"/>
-                      <a:tailEnd type="none" w="med" len="med"/>
-                    </a:lnB>
-                    <a:solidFill>
-                      <a:srgbClr val="FFFFFF"/>
-                    </a:solidFill>
-                  </a:tcPr>
-                </a:tc>
-              </a:tr>
-              <a:tr h="365760">
-                <a:tc>
-                  <a:txBody>
-                    <a:bodyPr/>
-                    <a:lstStyle/>
-                    <a:p>
-                      <a:pPr indent="0" marL="0">
-                        <a:buNone/>
-                      </a:pPr>
-                      <a:r>
-                        <a:rPr lang="en-US" sz="1200" b="1" dirty="0">
-                          <a:solidFill>
-                            <a:srgbClr val="00B4D8"/>
-                          </a:solidFill>
-                          <a:latin typeface="Calibri" pitchFamily="34" charset="0"/>
-                          <a:ea typeface="Calibri" pitchFamily="34" charset="-122"/>
-                          <a:cs typeface="Calibri" pitchFamily="34" charset="-120"/>
-                        </a:rPr>
-                        <a:t>Сервер HPE ProLiant DL20 Gen10 Plus</a:t>
-                      </a:r>
-                      <a:endParaRPr lang="en-US" sz="1200" dirty="0">
-                        <a:latin typeface="Calibri" charset="0"/>
-                        <a:ea typeface="Calibri" charset="0"/>
-                        <a:cs typeface="Calibri" charset="0"/>
-                      </a:endParaRPr>
-                    </a:p>
-                  </a:txBody>
-                  <a:tcPr marL="91440" marR="91440" marT="45720" marB="45720" anchor="ctr">
-                    <a:lnL w="9525" cap="flat" cmpd="sng" algn="ctr">
-                      <a:solidFill>
-                        <a:srgbClr val="C9D3E0"/>
-                      </a:solidFill>
-                      <a:prstDash val="solid"/>
-                      <a:round/>
-                      <a:headEnd type="none" w="med" len="med"/>
-                      <a:tailEnd type="none" w="med" len="med"/>
-                    </a:lnL>
-                    <a:lnR w="9525" cap="flat" cmpd="sng" algn="ctr">
-                      <a:solidFill>
-                        <a:srgbClr val="C9D3E0"/>
-                      </a:solidFill>
-                      <a:prstDash val="solid"/>
-                      <a:round/>
-                      <a:headEnd type="none" w="med" len="med"/>
-                      <a:tailEnd type="none" w="med" len="med"/>
-                    </a:lnR>
-                    <a:lnT w="9525" cap="flat" cmpd="sng" algn="ctr">
-                      <a:solidFill>
-                        <a:srgbClr val="C9D3E0"/>
-                      </a:solidFill>
-                      <a:prstDash val="solid"/>
-                      <a:round/>
-                      <a:headEnd type="none" w="med" len="med"/>
-                      <a:tailEnd type="none" w="med" len="med"/>
-                    </a:lnT>
-                    <a:lnB w="9525" cap="flat" cmpd="sng" algn="ctr">
-                      <a:solidFill>
-                        <a:srgbClr val="C9D3E0"/>
-                      </a:solidFill>
-                      <a:prstDash val="solid"/>
-                      <a:round/>
-                      <a:headEnd type="none" w="med" len="med"/>
-                      <a:tailEnd type="none" w="med" len="med"/>
-                    </a:lnB>
-                    <a:solidFill>
-                      <a:srgbClr val="FFFFFF"/>
-                    </a:solidFill>
-                  </a:tcPr>
-                </a:tc>
-                <a:tc>
-                  <a:txBody>
-                    <a:bodyPr/>
-                    <a:lstStyle/>
-                    <a:p>
-                      <a:pPr algn="r" indent="0" marL="0">
-                        <a:buNone/>
-                      </a:pPr>
-                      <a:r>
-                        <a:rPr lang="en-US" sz="1200" dirty="0">
-                          <a:solidFill>
-                            <a:srgbClr val="1B2430"/>
-                          </a:solidFill>
-                          <a:latin typeface="Calibri" pitchFamily="34" charset="0"/>
-                          <a:ea typeface="Calibri" pitchFamily="34" charset="-122"/>
-                          <a:cs typeface="Calibri" pitchFamily="34" charset="-120"/>
-                        </a:rPr>
-                        <a:t>1</a:t>
-                      </a:r>
-                      <a:endParaRPr lang="en-US" sz="1200" dirty="0">
-                        <a:latin typeface="Calibri" charset="0"/>
-                        <a:ea typeface="Calibri" charset="0"/>
-                        <a:cs typeface="Calibri" charset="0"/>
-                      </a:endParaRPr>
-                    </a:p>
-                  </a:txBody>
-                  <a:tcPr marL="91440" marR="91440" marT="45720" marB="45720" anchor="ctr">
-                    <a:lnL w="9525" cap="flat" cmpd="sng" algn="ctr">
-                      <a:solidFill>
-                        <a:srgbClr val="C9D3E0"/>
-                      </a:solidFill>
-                      <a:prstDash val="solid"/>
-                      <a:round/>
-                      <a:headEnd type="none" w="med" len="med"/>
-                      <a:tailEnd type="none" w="med" len="med"/>
-                    </a:lnL>
-                    <a:lnR w="9525" cap="flat" cmpd="sng" algn="ctr">
-                      <a:solidFill>
-                        <a:srgbClr val="C9D3E0"/>
-                      </a:solidFill>
-                      <a:prstDash val="solid"/>
-                      <a:round/>
-                      <a:headEnd type="none" w="med" len="med"/>
-                      <a:tailEnd type="none" w="med" len="med"/>
-                    </a:lnR>
-                    <a:lnT w="9525" cap="flat" cmpd="sng" algn="ctr">
-                      <a:solidFill>
-                        <a:srgbClr val="C9D3E0"/>
-                      </a:solidFill>
-                      <a:prstDash val="solid"/>
-                      <a:round/>
-                      <a:headEnd type="none" w="med" len="med"/>
-                      <a:tailEnd type="none" w="med" len="med"/>
-                    </a:lnT>
-                    <a:lnB w="9525" cap="flat" cmpd="sng" algn="ctr">
-                      <a:solidFill>
-                        <a:srgbClr val="C9D3E0"/>
-                      </a:solidFill>
-                      <a:prstDash val="solid"/>
-                      <a:round/>
-                      <a:headEnd type="none" w="med" len="med"/>
-                      <a:tailEnd type="none" w="med" len="med"/>
-                    </a:lnB>
-                    <a:solidFill>
-                      <a:srgbClr val="FFFFFF"/>
-                    </a:solidFill>
-                  </a:tcPr>
-                </a:tc>
-                <a:tc>
-                  <a:txBody>
-                    <a:bodyPr/>
-                    <a:lstStyle/>
-                    <a:p>
-                      <a:pPr algn="r" indent="0" marL="0">
-                        <a:buNone/>
-                      </a:pPr>
-                      <a:r>
-                        <a:rPr lang="en-US" sz="1200" dirty="0">
-                          <a:solidFill>
-                            <a:srgbClr val="1B2430"/>
-                          </a:solidFill>
-                          <a:latin typeface="Calibri" pitchFamily="34" charset="0"/>
-                          <a:ea typeface="Calibri" pitchFamily="34" charset="-122"/>
-                          <a:cs typeface="Calibri" pitchFamily="34" charset="-120"/>
-                        </a:rPr>
-                        <a:t>210 000 ₽</a:t>
-                      </a:r>
-                      <a:endParaRPr lang="en-US" sz="1200" dirty="0">
-                        <a:latin typeface="Calibri" charset="0"/>
-                        <a:ea typeface="Calibri" charset="0"/>
-                        <a:cs typeface="Calibri" charset="0"/>
-                      </a:endParaRPr>
-                    </a:p>
-                  </a:txBody>
-                  <a:tcPr marL="91440" marR="91440" marT="45720" marB="45720" anchor="ctr">
-                    <a:lnL w="9525" cap="flat" cmpd="sng" algn="ctr">
-                      <a:solidFill>
-                        <a:srgbClr val="C9D3E0"/>
-                      </a:solidFill>
-                      <a:prstDash val="solid"/>
-                      <a:round/>
-                      <a:headEnd type="none" w="med" len="med"/>
-                      <a:tailEnd type="none" w="med" len="med"/>
-                    </a:lnL>
-                    <a:lnR w="9525" cap="flat" cmpd="sng" algn="ctr">
-                      <a:solidFill>
-                        <a:srgbClr val="C9D3E0"/>
-                      </a:solidFill>
-                      <a:prstDash val="solid"/>
-                      <a:round/>
-                      <a:headEnd type="none" w="med" len="med"/>
-                      <a:tailEnd type="none" w="med" len="med"/>
-                    </a:lnR>
-                    <a:lnT w="9525" cap="flat" cmpd="sng" algn="ctr">
-                      <a:solidFill>
-                        <a:srgbClr val="C9D3E0"/>
-                      </a:solidFill>
-                      <a:prstDash val="solid"/>
-                      <a:round/>
-                      <a:headEnd type="none" w="med" len="med"/>
-                      <a:tailEnd type="none" w="med" len="med"/>
-                    </a:lnT>
-                    <a:lnB w="9525" cap="flat" cmpd="sng" algn="ctr">
-                      <a:solidFill>
-                        <a:srgbClr val="C9D3E0"/>
-                      </a:solidFill>
-                      <a:prstDash val="solid"/>
-                      <a:round/>
-                      <a:headEnd type="none" w="med" len="med"/>
-                      <a:tailEnd type="none" w="med" len="med"/>
-                    </a:lnB>
-                    <a:solidFill>
-                      <a:srgbClr val="FFFFFF"/>
-                    </a:solidFill>
-                  </a:tcPr>
-                </a:tc>
-                <a:tc>
-                  <a:txBody>
-                    <a:bodyPr/>
-                    <a:lstStyle/>
-                    <a:p>
-                      <a:pPr algn="r" indent="0" marL="0">
-                        <a:buNone/>
-                      </a:pPr>
-                      <a:r>
-                        <a:rPr lang="en-US" sz="1200" b="1" dirty="0">
-                          <a:solidFill>
-                            <a:srgbClr val="1B2430"/>
-                          </a:solidFill>
-                          <a:latin typeface="Calibri" pitchFamily="34" charset="0"/>
-                          <a:ea typeface="Calibri" pitchFamily="34" charset="-122"/>
-                          <a:cs typeface="Calibri" pitchFamily="34" charset="-120"/>
-                        </a:rPr>
-                        <a:t>210 000 ₽</a:t>
-                      </a:r>
-                      <a:endParaRPr lang="en-US" sz="1200" dirty="0">
-                        <a:latin typeface="Calibri" charset="0"/>
-                        <a:ea typeface="Calibri" charset="0"/>
-                        <a:cs typeface="Calibri" charset="0"/>
-                      </a:endParaRPr>
-                    </a:p>
-                  </a:txBody>
-                  <a:tcPr marL="91440" marR="91440" marT="45720" marB="45720" anchor="ctr">
-                    <a:lnL w="9525" cap="flat" cmpd="sng" algn="ctr">
-                      <a:solidFill>
-                        <a:srgbClr val="C9D3E0"/>
-                      </a:solidFill>
-                      <a:prstDash val="solid"/>
-                      <a:round/>
-                      <a:headEnd type="none" w="med" len="med"/>
-                      <a:tailEnd type="none" w="med" len="med"/>
-                    </a:lnL>
-                    <a:lnR w="9525" cap="flat" cmpd="sng" algn="ctr">
-                      <a:solidFill>
-                        <a:srgbClr val="C9D3E0"/>
-                      </a:solidFill>
-                      <a:prstDash val="solid"/>
-                      <a:round/>
-                      <a:headEnd type="none" w="med" len="med"/>
-                      <a:tailEnd type="none" w="med" len="med"/>
-                    </a:lnR>
-                    <a:lnT w="9525" cap="flat" cmpd="sng" algn="ctr">
-                      <a:solidFill>
-                        <a:srgbClr val="C9D3E0"/>
-                      </a:solidFill>
-                      <a:prstDash val="solid"/>
-                      <a:round/>
-                      <a:headEnd type="none" w="med" len="med"/>
-                      <a:tailEnd type="none" w="med" len="med"/>
-                    </a:lnT>
-                    <a:lnB w="9525" cap="flat" cmpd="sng" algn="ctr">
-                      <a:solidFill>
-                        <a:srgbClr val="C9D3E0"/>
-                      </a:solidFill>
-                      <a:prstDash val="solid"/>
-                      <a:round/>
-                      <a:headEnd type="none" w="med" len="med"/>
-                      <a:tailEnd type="none" w="med" len="med"/>
-                    </a:lnB>
-                    <a:solidFill>
-                      <a:srgbClr val="FFFFFF"/>
-                    </a:solidFill>
-                  </a:tcPr>
-                </a:tc>
-              </a:tr>
-              <a:tr h="365760">
-                <a:tc>
-                  <a:txBody>
-                    <a:bodyPr/>
-                    <a:lstStyle/>
-                    <a:p>
-                      <a:pPr indent="0" marL="0">
-                        <a:buNone/>
-                      </a:pPr>
-                      <a:r>
-                        <a:rPr lang="en-US" sz="1200" b="1" dirty="0">
-                          <a:solidFill>
-                            <a:srgbClr val="8B5CF6"/>
-                          </a:solidFill>
-                          <a:latin typeface="Calibri" pitchFamily="34" charset="0"/>
-                          <a:ea typeface="Calibri" pitchFamily="34" charset="-122"/>
-                          <a:cs typeface="Calibri" pitchFamily="34" charset="-120"/>
-                        </a:rPr>
-                        <a:t>МФУ лазерное сетевое</a:t>
-                      </a:r>
-                      <a:endParaRPr lang="en-US" sz="1200" dirty="0">
-                        <a:latin typeface="Calibri" charset="0"/>
-                        <a:ea typeface="Calibri" charset="0"/>
-                        <a:cs typeface="Calibri" charset="0"/>
-                      </a:endParaRPr>
-                    </a:p>
-                  </a:txBody>
-                  <a:tcPr marL="91440" marR="91440" marT="45720" marB="45720" anchor="ctr">
-                    <a:lnL w="9525" cap="flat" cmpd="sng" algn="ctr">
-                      <a:solidFill>
-                        <a:srgbClr val="C9D3E0"/>
-                      </a:solidFill>
-                      <a:prstDash val="solid"/>
-                      <a:round/>
-                      <a:headEnd type="none" w="med" len="med"/>
-                      <a:tailEnd type="none" w="med" len="med"/>
-                    </a:lnL>
-                    <a:lnR w="9525" cap="flat" cmpd="sng" algn="ctr">
-                      <a:solidFill>
-                        <a:srgbClr val="C9D3E0"/>
-                      </a:solidFill>
-                      <a:prstDash val="solid"/>
-                      <a:round/>
-                      <a:headEnd type="none" w="med" len="med"/>
-                      <a:tailEnd type="none" w="med" len="med"/>
-                    </a:lnR>
-                    <a:lnT w="9525" cap="flat" cmpd="sng" algn="ctr">
-                      <a:solidFill>
-                        <a:srgbClr val="C9D3E0"/>
-                      </a:solidFill>
-                      <a:prstDash val="solid"/>
-                      <a:round/>
-                      <a:headEnd type="none" w="med" len="med"/>
-                      <a:tailEnd type="none" w="med" len="med"/>
-                    </a:lnT>
-                    <a:lnB w="9525" cap="flat" cmpd="sng" algn="ctr">
-                      <a:solidFill>
-                        <a:srgbClr val="C9D3E0"/>
-                      </a:solidFill>
-                      <a:prstDash val="solid"/>
-                      <a:round/>
-                      <a:headEnd type="none" w="med" len="med"/>
-                      <a:tailEnd type="none" w="med" len="med"/>
-                    </a:lnB>
-                    <a:solidFill>
-                      <a:srgbClr val="FFFFFF"/>
-                    </a:solidFill>
-                  </a:tcPr>
-                </a:tc>
-                <a:tc>
-                  <a:txBody>
-                    <a:bodyPr/>
-                    <a:lstStyle/>
-                    <a:p>
-                      <a:pPr algn="r" indent="0" marL="0">
-                        <a:buNone/>
-                      </a:pPr>
-                      <a:r>
-                        <a:rPr lang="en-US" sz="1200" dirty="0">
-                          <a:solidFill>
-                            <a:srgbClr val="1B2430"/>
-                          </a:solidFill>
-                          <a:latin typeface="Calibri" pitchFamily="34" charset="0"/>
-                          <a:ea typeface="Calibri" pitchFamily="34" charset="-122"/>
-                          <a:cs typeface="Calibri" pitchFamily="34" charset="-120"/>
-                        </a:rPr>
-                        <a:t>3</a:t>
-                      </a:r>
-                      <a:endParaRPr lang="en-US" sz="1200" dirty="0">
-                        <a:latin typeface="Calibri" charset="0"/>
-                        <a:ea typeface="Calibri" charset="0"/>
-                        <a:cs typeface="Calibri" charset="0"/>
-                      </a:endParaRPr>
-                    </a:p>
-                  </a:txBody>
-                  <a:tcPr marL="91440" marR="91440" marT="45720" marB="45720" anchor="ctr">
-                    <a:lnL w="9525" cap="flat" cmpd="sng" algn="ctr">
-                      <a:solidFill>
-                        <a:srgbClr val="C9D3E0"/>
-                      </a:solidFill>
-                      <a:prstDash val="solid"/>
-                      <a:round/>
-                      <a:headEnd type="none" w="med" len="med"/>
-                      <a:tailEnd type="none" w="med" len="med"/>
-                    </a:lnL>
-                    <a:lnR w="9525" cap="flat" cmpd="sng" algn="ctr">
-                      <a:solidFill>
-                        <a:srgbClr val="C9D3E0"/>
-                      </a:solidFill>
-                      <a:prstDash val="solid"/>
-                      <a:round/>
-                      <a:headEnd type="none" w="med" len="med"/>
-                      <a:tailEnd type="none" w="med" len="med"/>
-                    </a:lnR>
-                    <a:lnT w="9525" cap="flat" cmpd="sng" algn="ctr">
-                      <a:solidFill>
-                        <a:srgbClr val="C9D3E0"/>
-                      </a:solidFill>
-                      <a:prstDash val="solid"/>
-                      <a:round/>
-                      <a:headEnd type="none" w="med" len="med"/>
-                      <a:tailEnd type="none" w="med" len="med"/>
-                    </a:lnT>
-                    <a:lnB w="9525" cap="flat" cmpd="sng" algn="ctr">
-                      <a:solidFill>
-                        <a:srgbClr val="C9D3E0"/>
-                      </a:solidFill>
-                      <a:prstDash val="solid"/>
-                      <a:round/>
-                      <a:headEnd type="none" w="med" len="med"/>
-                      <a:tailEnd type="none" w="med" len="med"/>
-                    </a:lnB>
-                    <a:solidFill>
-                      <a:srgbClr val="FFFFFF"/>
-                    </a:solidFill>
-                  </a:tcPr>
-                </a:tc>
-                <a:tc>
-                  <a:txBody>
-                    <a:bodyPr/>
-                    <a:lstStyle/>
-                    <a:p>
-                      <a:pPr algn="r" indent="0" marL="0">
-                        <a:buNone/>
-                      </a:pPr>
-                      <a:r>
-                        <a:rPr lang="en-US" sz="1200" dirty="0">
-                          <a:solidFill>
-                            <a:srgbClr val="1B2430"/>
-                          </a:solidFill>
-                          <a:latin typeface="Calibri" pitchFamily="34" charset="0"/>
-                          <a:ea typeface="Calibri" pitchFamily="34" charset="-122"/>
-                          <a:cs typeface="Calibri" pitchFamily="34" charset="-120"/>
-                        </a:rPr>
-                        <a:t>24 000 ₽</a:t>
-                      </a:r>
-                      <a:endParaRPr lang="en-US" sz="1200" dirty="0">
-                        <a:latin typeface="Calibri" charset="0"/>
-                        <a:ea typeface="Calibri" charset="0"/>
-                        <a:cs typeface="Calibri" charset="0"/>
-                      </a:endParaRPr>
-                    </a:p>
-                  </a:txBody>
-                  <a:tcPr marL="91440" marR="91440" marT="45720" marB="45720" anchor="ctr">
-                    <a:lnL w="9525" cap="flat" cmpd="sng" algn="ctr">
-                      <a:solidFill>
-                        <a:srgbClr val="C9D3E0"/>
-                      </a:solidFill>
-                      <a:prstDash val="solid"/>
-                      <a:round/>
-                      <a:headEnd type="none" w="med" len="med"/>
-                      <a:tailEnd type="none" w="med" len="med"/>
-                    </a:lnL>
-                    <a:lnR w="9525" cap="flat" cmpd="sng" algn="ctr">
-                      <a:solidFill>
-                        <a:srgbClr val="C9D3E0"/>
-                      </a:solidFill>
-                      <a:prstDash val="solid"/>
-                      <a:round/>
-                      <a:headEnd type="none" w="med" len="med"/>
-                      <a:tailEnd type="none" w="med" len="med"/>
-                    </a:lnR>
-                    <a:lnT w="9525" cap="flat" cmpd="sng" algn="ctr">
-                      <a:solidFill>
-                        <a:srgbClr val="C9D3E0"/>
-                      </a:solidFill>
-                      <a:prstDash val="solid"/>
-                      <a:round/>
-                      <a:headEnd type="none" w="med" len="med"/>
-                      <a:tailEnd type="none" w="med" len="med"/>
-                    </a:lnT>
-                    <a:lnB w="9525" cap="flat" cmpd="sng" algn="ctr">
-                      <a:solidFill>
-                        <a:srgbClr val="C9D3E0"/>
-                      </a:solidFill>
-                      <a:prstDash val="solid"/>
-                      <a:round/>
-                      <a:headEnd type="none" w="med" len="med"/>
-                      <a:tailEnd type="none" w="med" len="med"/>
-                    </a:lnB>
-                    <a:solidFill>
-                      <a:srgbClr val="FFFFFF"/>
-                    </a:solidFill>
-                  </a:tcPr>
-                </a:tc>
-                <a:tc>
-                  <a:txBody>
-                    <a:bodyPr/>
-                    <a:lstStyle/>
-                    <a:p>
-                      <a:pPr algn="r" indent="0" marL="0">
-                        <a:buNone/>
-                      </a:pPr>
-                      <a:r>
-                        <a:rPr lang="en-US" sz="1200" b="1" dirty="0">
-                          <a:solidFill>
-                            <a:srgbClr val="1B2430"/>
-                          </a:solidFill>
-                          <a:latin typeface="Calibri" pitchFamily="34" charset="0"/>
-                          <a:ea typeface="Calibri" pitchFamily="34" charset="-122"/>
-                          <a:cs typeface="Calibri" pitchFamily="34" charset="-120"/>
-                        </a:rPr>
-                        <a:t>72 000 ₽</a:t>
-                      </a:r>
-                      <a:endParaRPr lang="en-US" sz="1200" dirty="0">
-                        <a:latin typeface="Calibri" charset="0"/>
-                        <a:ea typeface="Calibri" charset="0"/>
-                        <a:cs typeface="Calibri" charset="0"/>
-                      </a:endParaRPr>
-                    </a:p>
-                  </a:txBody>
-                  <a:tcPr marL="91440" marR="91440" marT="45720" marB="45720" anchor="ctr">
-                    <a:lnL w="9525" cap="flat" cmpd="sng" algn="ctr">
-                      <a:solidFill>
-                        <a:srgbClr val="C9D3E0"/>
-                      </a:solidFill>
-                      <a:prstDash val="solid"/>
-                      <a:round/>
-                      <a:headEnd type="none" w="med" len="med"/>
-                      <a:tailEnd type="none" w="med" len="med"/>
-                    </a:lnL>
-                    <a:lnR w="9525" cap="flat" cmpd="sng" algn="ctr">
-                      <a:solidFill>
-                        <a:srgbClr val="C9D3E0"/>
-                      </a:solidFill>
-                      <a:prstDash val="solid"/>
-                      <a:round/>
-                      <a:headEnd type="none" w="med" len="med"/>
-                      <a:tailEnd type="none" w="med" len="med"/>
-                    </a:lnR>
-                    <a:lnT w="9525" cap="flat" cmpd="sng" algn="ctr">
-                      <a:solidFill>
-                        <a:srgbClr val="C9D3E0"/>
-                      </a:solidFill>
-                      <a:prstDash val="solid"/>
-                      <a:round/>
-                      <a:headEnd type="none" w="med" len="med"/>
-                      <a:tailEnd type="none" w="med" len="med"/>
-                    </a:lnT>
-                    <a:lnB w="9525" cap="flat" cmpd="sng" algn="ctr">
-                      <a:solidFill>
-                        <a:srgbClr val="C9D3E0"/>
-                      </a:solidFill>
-                      <a:prstDash val="solid"/>
-                      <a:round/>
-                      <a:headEnd type="none" w="med" len="med"/>
-                      <a:tailEnd type="none" w="med" len="med"/>
-                    </a:lnB>
-                    <a:solidFill>
-                      <a:srgbClr val="FFFFFF"/>
-                    </a:solidFill>
-                  </a:tcPr>
-                </a:tc>
-              </a:tr>
-              <a:tr h="365760">
-                <a:tc>
-                  <a:txBody>
-                    <a:bodyPr/>
-                    <a:lstStyle/>
-                    <a:p>
-                      <a:pPr indent="0" marL="0">
-                        <a:buNone/>
-                      </a:pPr>
-                      <a:r>
-                        <a:rPr lang="en-US" sz="1200" b="1" dirty="0">
-                          <a:solidFill>
-                            <a:srgbClr val="22B573"/>
-                          </a:solidFill>
-                          <a:latin typeface="Calibri" pitchFamily="34" charset="0"/>
-                          <a:ea typeface="Calibri" pitchFamily="34" charset="-122"/>
-                          <a:cs typeface="Calibri" pitchFamily="34" charset="-120"/>
-                        </a:rPr>
-                        <a:t>Шкаф серверный 19" 18U</a:t>
-                      </a:r>
-                      <a:endParaRPr lang="en-US" sz="1200" dirty="0">
-                        <a:latin typeface="Calibri" charset="0"/>
-                        <a:ea typeface="Calibri" charset="0"/>
-                        <a:cs typeface="Calibri" charset="0"/>
-                      </a:endParaRPr>
-                    </a:p>
-                  </a:txBody>
-                  <a:tcPr marL="91440" marR="91440" marT="45720" marB="45720" anchor="ctr">
-                    <a:lnL w="9525" cap="flat" cmpd="sng" algn="ctr">
-                      <a:solidFill>
-                        <a:srgbClr val="C9D3E0"/>
-                      </a:solidFill>
-                      <a:prstDash val="solid"/>
-                      <a:round/>
-                      <a:headEnd type="none" w="med" len="med"/>
-                      <a:tailEnd type="none" w="med" len="med"/>
-                    </a:lnL>
-                    <a:lnR w="9525" cap="flat" cmpd="sng" algn="ctr">
-                      <a:solidFill>
-                        <a:srgbClr val="C9D3E0"/>
-                      </a:solidFill>
-                      <a:prstDash val="solid"/>
-                      <a:round/>
-                      <a:headEnd type="none" w="med" len="med"/>
-                      <a:tailEnd type="none" w="med" len="med"/>
-                    </a:lnR>
-                    <a:lnT w="9525" cap="flat" cmpd="sng" algn="ctr">
-                      <a:solidFill>
-                        <a:srgbClr val="C9D3E0"/>
-                      </a:solidFill>
-                      <a:prstDash val="solid"/>
-                      <a:round/>
-                      <a:headEnd type="none" w="med" len="med"/>
-                      <a:tailEnd type="none" w="med" len="med"/>
-                    </a:lnT>
-                    <a:lnB w="9525" cap="flat" cmpd="sng" algn="ctr">
-                      <a:solidFill>
-                        <a:srgbClr val="C9D3E0"/>
-                      </a:solidFill>
-                      <a:prstDash val="solid"/>
-                      <a:round/>
-                      <a:headEnd type="none" w="med" len="med"/>
-                      <a:tailEnd type="none" w="med" len="med"/>
-                    </a:lnB>
-                    <a:solidFill>
-                      <a:srgbClr val="FFFFFF"/>
-                    </a:solidFill>
-                  </a:tcPr>
-                </a:tc>
-                <a:tc>
-                  <a:txBody>
-                    <a:bodyPr/>
-                    <a:lstStyle/>
-                    <a:p>
-                      <a:pPr algn="r" indent="0" marL="0">
-                        <a:buNone/>
-                      </a:pPr>
-                      <a:r>
-                        <a:rPr lang="en-US" sz="1200" dirty="0">
-                          <a:solidFill>
-                            <a:srgbClr val="1B2430"/>
-                          </a:solidFill>
-                          <a:latin typeface="Calibri" pitchFamily="34" charset="0"/>
-                          <a:ea typeface="Calibri" pitchFamily="34" charset="-122"/>
-                          <a:cs typeface="Calibri" pitchFamily="34" charset="-120"/>
-                        </a:rPr>
-                        <a:t>1</a:t>
-                      </a:r>
-                      <a:endParaRPr lang="en-US" sz="1200" dirty="0">
-                        <a:latin typeface="Calibri" charset="0"/>
-                        <a:ea typeface="Calibri" charset="0"/>
-                        <a:cs typeface="Calibri" charset="0"/>
-                      </a:endParaRPr>
-                    </a:p>
-                  </a:txBody>
-                  <a:tcPr marL="91440" marR="91440" marT="45720" marB="45720" anchor="ctr">
-                    <a:lnL w="9525" cap="flat" cmpd="sng" algn="ctr">
-                      <a:solidFill>
-                        <a:srgbClr val="C9D3E0"/>
-                      </a:solidFill>
-                      <a:prstDash val="solid"/>
-                      <a:round/>
-                      <a:headEnd type="none" w="med" len="med"/>
-                      <a:tailEnd type="none" w="med" len="med"/>
-                    </a:lnL>
-                    <a:lnR w="9525" cap="flat" cmpd="sng" algn="ctr">
-                      <a:solidFill>
-                        <a:srgbClr val="C9D3E0"/>
-                      </a:solidFill>
-                      <a:prstDash val="solid"/>
-                      <a:round/>
-                      <a:headEnd type="none" w="med" len="med"/>
-                      <a:tailEnd type="none" w="med" len="med"/>
-                    </a:lnR>
-                    <a:lnT w="9525" cap="flat" cmpd="sng" algn="ctr">
-                      <a:solidFill>
-                        <a:srgbClr val="C9D3E0"/>
-                      </a:solidFill>
-                      <a:prstDash val="solid"/>
-                      <a:round/>
-                      <a:headEnd type="none" w="med" len="med"/>
-                      <a:tailEnd type="none" w="med" len="med"/>
-                    </a:lnT>
-                    <a:lnB w="9525" cap="flat" cmpd="sng" algn="ctr">
-                      <a:solidFill>
-                        <a:srgbClr val="C9D3E0"/>
-                      </a:solidFill>
-                      <a:prstDash val="solid"/>
-                      <a:round/>
-                      <a:headEnd type="none" w="med" len="med"/>
-                      <a:tailEnd type="none" w="med" len="med"/>
-                    </a:lnB>
-                    <a:solidFill>
-                      <a:srgbClr val="FFFFFF"/>
-                    </a:solidFill>
-                  </a:tcPr>
-                </a:tc>
-                <a:tc>
-                  <a:txBody>
-                    <a:bodyPr/>
-                    <a:lstStyle/>
-                    <a:p>
-                      <a:pPr algn="r" indent="0" marL="0">
-                        <a:buNone/>
-                      </a:pPr>
-                      <a:r>
-                        <a:rPr lang="en-US" sz="1200" dirty="0">
-                          <a:solidFill>
-                            <a:srgbClr val="1B2430"/>
-                          </a:solidFill>
-                          <a:latin typeface="Calibri" pitchFamily="34" charset="0"/>
-                          <a:ea typeface="Calibri" pitchFamily="34" charset="-122"/>
-                          <a:cs typeface="Calibri" pitchFamily="34" charset="-120"/>
-                        </a:rPr>
-                        <a:t>32 000 ₽</a:t>
-                      </a:r>
-                      <a:endParaRPr lang="en-US" sz="1200" dirty="0">
-                        <a:latin typeface="Calibri" charset="0"/>
-                        <a:ea typeface="Calibri" charset="0"/>
-                        <a:cs typeface="Calibri" charset="0"/>
-                      </a:endParaRPr>
-                    </a:p>
-                  </a:txBody>
-                  <a:tcPr marL="91440" marR="91440" marT="45720" marB="45720" anchor="ctr">
-                    <a:lnL w="9525" cap="flat" cmpd="sng" algn="ctr">
-                      <a:solidFill>
-                        <a:srgbClr val="C9D3E0"/>
-                      </a:solidFill>
-                      <a:prstDash val="solid"/>
-                      <a:round/>
-                      <a:headEnd type="none" w="med" len="med"/>
-                      <a:tailEnd type="none" w="med" len="med"/>
-                    </a:lnL>
-                    <a:lnR w="9525" cap="flat" cmpd="sng" algn="ctr">
-                      <a:solidFill>
-                        <a:srgbClr val="C9D3E0"/>
-                      </a:solidFill>
-                      <a:prstDash val="solid"/>
-                      <a:round/>
-                      <a:headEnd type="none" w="med" len="med"/>
-                      <a:tailEnd type="none" w="med" len="med"/>
-                    </a:lnR>
-                    <a:lnT w="9525" cap="flat" cmpd="sng" algn="ctr">
-                      <a:solidFill>
-                        <a:srgbClr val="C9D3E0"/>
-                      </a:solidFill>
-                      <a:prstDash val="solid"/>
-                      <a:round/>
-                      <a:headEnd type="none" w="med" len="med"/>
-                      <a:tailEnd type="none" w="med" len="med"/>
-                    </a:lnT>
-                    <a:lnB w="9525" cap="flat" cmpd="sng" algn="ctr">
-                      <a:solidFill>
-                        <a:srgbClr val="C9D3E0"/>
-                      </a:solidFill>
-                      <a:prstDash val="solid"/>
-                      <a:round/>
-                      <a:headEnd type="none" w="med" len="med"/>
-                      <a:tailEnd type="none" w="med" len="med"/>
-                    </a:lnB>
-                    <a:solidFill>
-                      <a:srgbClr val="FFFFFF"/>
-                    </a:solidFill>
-                  </a:tcPr>
-                </a:tc>
-                <a:tc>
-                  <a:txBody>
-                    <a:bodyPr/>
-                    <a:lstStyle/>
-                    <a:p>
-                      <a:pPr algn="r" indent="0" marL="0">
-                        <a:buNone/>
-                      </a:pPr>
-                      <a:r>
-                        <a:rPr lang="en-US" sz="1200" b="1" dirty="0">
-                          <a:solidFill>
-                            <a:srgbClr val="1B2430"/>
-                          </a:solidFill>
-                          <a:latin typeface="Calibri" pitchFamily="34" charset="0"/>
-                          <a:ea typeface="Calibri" pitchFamily="34" charset="-122"/>
-                          <a:cs typeface="Calibri" pitchFamily="34" charset="-120"/>
-                        </a:rPr>
-                        <a:t>32 000 ₽</a:t>
-                      </a:r>
-                      <a:endParaRPr lang="en-US" sz="1200" dirty="0">
-                        <a:latin typeface="Calibri" charset="0"/>
-                        <a:ea typeface="Calibri" charset="0"/>
-                        <a:cs typeface="Calibri" charset="0"/>
-                      </a:endParaRPr>
-                    </a:p>
-                  </a:txBody>
-                  <a:tcPr marL="91440" marR="91440" marT="45720" marB="45720" anchor="ctr">
-                    <a:lnL w="9525" cap="flat" cmpd="sng" algn="ctr">
-                      <a:solidFill>
-                        <a:srgbClr val="C9D3E0"/>
-                      </a:solidFill>
-                      <a:prstDash val="solid"/>
-                      <a:round/>
-                      <a:headEnd type="none" w="med" len="med"/>
-                      <a:tailEnd type="none" w="med" len="med"/>
-                    </a:lnL>
-                    <a:lnR w="9525" cap="flat" cmpd="sng" algn="ctr">
-                      <a:solidFill>
-                        <a:srgbClr val="C9D3E0"/>
-                      </a:solidFill>
-                      <a:prstDash val="solid"/>
-                      <a:round/>
-                      <a:headEnd type="none" w="med" len="med"/>
-                      <a:tailEnd type="none" w="med" len="med"/>
-                    </a:lnR>
-                    <a:lnT w="9525" cap="flat" cmpd="sng" algn="ctr">
-                      <a:solidFill>
-                        <a:srgbClr val="C9D3E0"/>
-                      </a:solidFill>
-                      <a:prstDash val="solid"/>
-                      <a:round/>
-                      <a:headEnd type="none" w="med" len="med"/>
-                      <a:tailEnd type="none" w="med" len="med"/>
-                    </a:lnT>
-                    <a:lnB w="9525" cap="flat" cmpd="sng" algn="ctr">
-                      <a:solidFill>
-                        <a:srgbClr val="C9D3E0"/>
-                      </a:solidFill>
-                      <a:prstDash val="solid"/>
-                      <a:round/>
-                      <a:headEnd type="none" w="med" len="med"/>
-                      <a:tailEnd type="none" w="med" len="med"/>
-                    </a:lnB>
-                    <a:solidFill>
-                      <a:srgbClr val="FFFFFF"/>
-                    </a:solidFill>
-                  </a:tcPr>
-                </a:tc>
-              </a:tr>
-              <a:tr h="365760">
-                <a:tc>
-                  <a:txBody>
-                    <a:bodyPr/>
-                    <a:lstStyle/>
-                    <a:p>
-                      <a:pPr indent="0" marL="0">
-                        <a:buNone/>
-                      </a:pPr>
-                      <a:r>
-                        <a:rPr lang="en-US" sz="1200" b="1" dirty="0">
-                          <a:solidFill>
-                            <a:srgbClr val="E63E62"/>
-                          </a:solidFill>
-                          <a:latin typeface="Calibri" pitchFamily="34" charset="0"/>
-                          <a:ea typeface="Calibri" pitchFamily="34" charset="-122"/>
-                          <a:cs typeface="Calibri" pitchFamily="34" charset="-120"/>
-                        </a:rPr>
-                        <a:t>ИБП APC Smart-UPS 1500 ВА</a:t>
-                      </a:r>
-                      <a:endParaRPr lang="en-US" sz="1200" dirty="0">
-                        <a:latin typeface="Calibri" charset="0"/>
-                        <a:ea typeface="Calibri" charset="0"/>
-                        <a:cs typeface="Calibri" charset="0"/>
-                      </a:endParaRPr>
-                    </a:p>
-                  </a:txBody>
-                  <a:tcPr marL="91440" marR="91440" marT="45720" marB="45720" anchor="ctr">
-                    <a:lnL w="9525" cap="flat" cmpd="sng" algn="ctr">
-                      <a:solidFill>
-                        <a:srgbClr val="C9D3E0"/>
-                      </a:solidFill>
-                      <a:prstDash val="solid"/>
-                      <a:round/>
-                      <a:headEnd type="none" w="med" len="med"/>
-                      <a:tailEnd type="none" w="med" len="med"/>
-                    </a:lnL>
-                    <a:lnR w="9525" cap="flat" cmpd="sng" algn="ctr">
-                      <a:solidFill>
-                        <a:srgbClr val="C9D3E0"/>
-                      </a:solidFill>
-                      <a:prstDash val="solid"/>
-                      <a:round/>
-                      <a:headEnd type="none" w="med" len="med"/>
-                      <a:tailEnd type="none" w="med" len="med"/>
-                    </a:lnR>
-                    <a:lnT w="9525" cap="flat" cmpd="sng" algn="ctr">
-                      <a:solidFill>
-                        <a:srgbClr val="C9D3E0"/>
-                      </a:solidFill>
-                      <a:prstDash val="solid"/>
-                      <a:round/>
-                      <a:headEnd type="none" w="med" len="med"/>
-                      <a:tailEnd type="none" w="med" len="med"/>
-                    </a:lnT>
-                    <a:lnB w="9525" cap="flat" cmpd="sng" algn="ctr">
-                      <a:solidFill>
-                        <a:srgbClr val="C9D3E0"/>
-                      </a:solidFill>
-                      <a:prstDash val="solid"/>
-                      <a:round/>
-                      <a:headEnd type="none" w="med" len="med"/>
-                      <a:tailEnd type="none" w="med" len="med"/>
-                    </a:lnB>
-                    <a:solidFill>
-                      <a:srgbClr val="FFFFFF"/>
-                    </a:solidFill>
-                  </a:tcPr>
-                </a:tc>
-                <a:tc>
-                  <a:txBody>
-                    <a:bodyPr/>
-                    <a:lstStyle/>
-                    <a:p>
-                      <a:pPr algn="r" indent="0" marL="0">
-                        <a:buNone/>
-                      </a:pPr>
-                      <a:r>
-                        <a:rPr lang="en-US" sz="1200" dirty="0">
-                          <a:solidFill>
-                            <a:srgbClr val="1B2430"/>
-                          </a:solidFill>
-                          <a:latin typeface="Calibri" pitchFamily="34" charset="0"/>
-                          <a:ea typeface="Calibri" pitchFamily="34" charset="-122"/>
-                          <a:cs typeface="Calibri" pitchFamily="34" charset="-120"/>
-                        </a:rPr>
-                        <a:t>1</a:t>
-                      </a:r>
-                      <a:endParaRPr lang="en-US" sz="1200" dirty="0">
-                        <a:latin typeface="Calibri" charset="0"/>
-                        <a:ea typeface="Calibri" charset="0"/>
-                        <a:cs typeface="Calibri" charset="0"/>
-                      </a:endParaRPr>
-                    </a:p>
-                  </a:txBody>
-                  <a:tcPr marL="91440" marR="91440" marT="45720" marB="45720" anchor="ctr">
-                    <a:lnL w="9525" cap="flat" cmpd="sng" algn="ctr">
-                      <a:solidFill>
-                        <a:srgbClr val="C9D3E0"/>
-                      </a:solidFill>
-                      <a:prstDash val="solid"/>
-                      <a:round/>
-                      <a:headEnd type="none" w="med" len="med"/>
-                      <a:tailEnd type="none" w="med" len="med"/>
-                    </a:lnL>
-                    <a:lnR w="9525" cap="flat" cmpd="sng" algn="ctr">
-                      <a:solidFill>
-                        <a:srgbClr val="C9D3E0"/>
-                      </a:solidFill>
-                      <a:prstDash val="solid"/>
-                      <a:round/>
-                      <a:headEnd type="none" w="med" len="med"/>
-                      <a:tailEnd type="none" w="med" len="med"/>
-                    </a:lnR>
-                    <a:lnT w="9525" cap="flat" cmpd="sng" algn="ctr">
-                      <a:solidFill>
-                        <a:srgbClr val="C9D3E0"/>
-                      </a:solidFill>
-                      <a:prstDash val="solid"/>
-                      <a:round/>
-                      <a:headEnd type="none" w="med" len="med"/>
-                      <a:tailEnd type="none" w="med" len="med"/>
-                    </a:lnT>
-                    <a:lnB w="9525" cap="flat" cmpd="sng" algn="ctr">
-                      <a:solidFill>
-                        <a:srgbClr val="C9D3E0"/>
-                      </a:solidFill>
-                      <a:prstDash val="solid"/>
-                      <a:round/>
-                      <a:headEnd type="none" w="med" len="med"/>
-                      <a:tailEnd type="none" w="med" len="med"/>
-                    </a:lnB>
-                    <a:solidFill>
-                      <a:srgbClr val="FFFFFF"/>
-                    </a:solidFill>
-                  </a:tcPr>
-                </a:tc>
-                <a:tc>
-                  <a:txBody>
-                    <a:bodyPr/>
-                    <a:lstStyle/>
-                    <a:p>
-                      <a:pPr algn="r" indent="0" marL="0">
-                        <a:buNone/>
-                      </a:pPr>
-                      <a:r>
-                        <a:rPr lang="en-US" sz="1200" dirty="0">
-                          <a:solidFill>
-                            <a:srgbClr val="1B2430"/>
-                          </a:solidFill>
-                          <a:latin typeface="Calibri" pitchFamily="34" charset="0"/>
-                          <a:ea typeface="Calibri" pitchFamily="34" charset="-122"/>
-                          <a:cs typeface="Calibri" pitchFamily="34" charset="-120"/>
-                        </a:rPr>
-                        <a:t>48 000 ₽</a:t>
-                      </a:r>
-                      <a:endParaRPr lang="en-US" sz="1200" dirty="0">
-                        <a:latin typeface="Calibri" charset="0"/>
-                        <a:ea typeface="Calibri" charset="0"/>
-                        <a:cs typeface="Calibri" charset="0"/>
-                      </a:endParaRPr>
-                    </a:p>
-                  </a:txBody>
-                  <a:tcPr marL="91440" marR="91440" marT="45720" marB="45720" anchor="ctr">
-                    <a:lnL w="9525" cap="flat" cmpd="sng" algn="ctr">
-                      <a:solidFill>
-                        <a:srgbClr val="C9D3E0"/>
-                      </a:solidFill>
-                      <a:prstDash val="solid"/>
-                      <a:round/>
-                      <a:headEnd type="none" w="med" len="med"/>
-                      <a:tailEnd type="none" w="med" len="med"/>
-                    </a:lnL>
-                    <a:lnR w="9525" cap="flat" cmpd="sng" algn="ctr">
-                      <a:solidFill>
-                        <a:srgbClr val="C9D3E0"/>
-                      </a:solidFill>
-                      <a:prstDash val="solid"/>
-                      <a:round/>
-                      <a:headEnd type="none" w="med" len="med"/>
-                      <a:tailEnd type="none" w="med" len="med"/>
-                    </a:lnR>
-                    <a:lnT w="9525" cap="flat" cmpd="sng" algn="ctr">
-                      <a:solidFill>
-                        <a:srgbClr val="C9D3E0"/>
-                      </a:solidFill>
-                      <a:prstDash val="solid"/>
-                      <a:round/>
-                      <a:headEnd type="none" w="med" len="med"/>
-                      <a:tailEnd type="none" w="med" len="med"/>
-                    </a:lnT>
-                    <a:lnB w="9525" cap="flat" cmpd="sng" algn="ctr">
-                      <a:solidFill>
-                        <a:srgbClr val="C9D3E0"/>
-                      </a:solidFill>
-                      <a:prstDash val="solid"/>
-                      <a:round/>
-                      <a:headEnd type="none" w="med" len="med"/>
-                      <a:tailEnd type="none" w="med" len="med"/>
-                    </a:lnB>
-                    <a:solidFill>
-                      <a:srgbClr val="FFFFFF"/>
-                    </a:solidFill>
-                  </a:tcPr>
-                </a:tc>
-                <a:tc>
-                  <a:txBody>
-                    <a:bodyPr/>
-                    <a:lstStyle/>
-                    <a:p>
-                      <a:pPr algn="r" indent="0" marL="0">
-                        <a:buNone/>
-                      </a:pPr>
-                      <a:r>
-                        <a:rPr lang="en-US" sz="1200" b="1" dirty="0">
-                          <a:solidFill>
-                            <a:srgbClr val="1B2430"/>
-                          </a:solidFill>
-                          <a:latin typeface="Calibri" pitchFamily="34" charset="0"/>
-                          <a:ea typeface="Calibri" pitchFamily="34" charset="-122"/>
-                          <a:cs typeface="Calibri" pitchFamily="34" charset="-120"/>
-                        </a:rPr>
-                        <a:t>48 000 ₽</a:t>
-                      </a:r>
-                      <a:endParaRPr lang="en-US" sz="1200" dirty="0">
-                        <a:latin typeface="Calibri" charset="0"/>
-                        <a:ea typeface="Calibri" charset="0"/>
-                        <a:cs typeface="Calibri" charset="0"/>
-                      </a:endParaRPr>
-                    </a:p>
-                  </a:txBody>
-                  <a:tcPr marL="91440" marR="91440" marT="45720" marB="45720" anchor="ctr">
-                    <a:lnL w="9525" cap="flat" cmpd="sng" algn="ctr">
-                      <a:solidFill>
-                        <a:srgbClr val="C9D3E0"/>
-                      </a:solidFill>
-                      <a:prstDash val="solid"/>
-                      <a:round/>
-                      <a:headEnd type="none" w="med" len="med"/>
-                      <a:tailEnd type="none" w="med" len="med"/>
-                    </a:lnL>
-                    <a:lnR w="9525" cap="flat" cmpd="sng" algn="ctr">
-                      <a:solidFill>
-                        <a:srgbClr val="C9D3E0"/>
-                      </a:solidFill>
-                      <a:prstDash val="solid"/>
-                      <a:round/>
-                      <a:headEnd type="none" w="med" len="med"/>
-                      <a:tailEnd type="none" w="med" len="med"/>
-                    </a:lnR>
-                    <a:lnT w="9525" cap="flat" cmpd="sng" algn="ctr">
-                      <a:solidFill>
-                        <a:srgbClr val="C9D3E0"/>
-                      </a:solidFill>
-                      <a:prstDash val="solid"/>
-                      <a:round/>
-                      <a:headEnd type="none" w="med" len="med"/>
-                      <a:tailEnd type="none" w="med" len="med"/>
-                    </a:lnT>
-                    <a:lnB w="9525" cap="flat" cmpd="sng" algn="ctr">
-                      <a:solidFill>
-                        <a:srgbClr val="C9D3E0"/>
-                      </a:solidFill>
-                      <a:prstDash val="solid"/>
-                      <a:round/>
-                      <a:headEnd type="none" w="med" len="med"/>
-                      <a:tailEnd type="none" w="med" len="med"/>
-                    </a:lnB>
-                    <a:solidFill>
-                      <a:srgbClr val="FFFFFF"/>
-                    </a:solidFill>
-                  </a:tcPr>
-                </a:tc>
-              </a:tr>
-              <a:tr h="365760">
-                <a:tc gridSpan="3">
-                  <a:txBody>
-                    <a:bodyPr/>
-                    <a:lstStyle/>
-                    <a:p>
-                      <a:pPr indent="0" marL="0">
-                        <a:buNone/>
-                      </a:pPr>
-                      <a:r>
-                        <a:rPr lang="en-US" sz="1200" b="1" dirty="0">
-                          <a:solidFill>
-                            <a:srgbClr val="FFFFFF"/>
-                          </a:solidFill>
-                          <a:latin typeface="Calibri" pitchFamily="34" charset="0"/>
-                          <a:ea typeface="Calibri" pitchFamily="34" charset="-122"/>
-                          <a:cs typeface="Calibri" pitchFamily="34" charset="-120"/>
-                        </a:rPr>
-                        <a:t>Итого оборудование</a:t>
-                      </a:r>
-                      <a:endParaRPr lang="en-US" sz="1200" dirty="0">
-                        <a:latin typeface="Calibri" charset="0"/>
-                        <a:ea typeface="Calibri" charset="0"/>
-                        <a:cs typeface="Calibri" charset="0"/>
-                      </a:endParaRPr>
-                    </a:p>
-                  </a:txBody>
-                  <a:tcPr marL="91440" marR="91440" marT="45720" marB="45720" anchor="ctr">
-                    <a:lnL w="9525" cap="flat" cmpd="sng" algn="ctr">
-                      <a:solidFill>
-                        <a:srgbClr val="C9D3E0"/>
-                      </a:solidFill>
-                      <a:prstDash val="solid"/>
-                      <a:round/>
-                      <a:headEnd type="none" w="med" len="med"/>
-                      <a:tailEnd type="none" w="med" len="med"/>
-                    </a:lnL>
-                    <a:lnR w="9525" cap="flat" cmpd="sng" algn="ctr">
-                      <a:solidFill>
-                        <a:srgbClr val="C9D3E0"/>
-                      </a:solidFill>
-                      <a:prstDash val="solid"/>
-                      <a:round/>
-                      <a:headEnd type="none" w="med" len="med"/>
-                      <a:tailEnd type="none" w="med" len="med"/>
-                    </a:lnR>
-                    <a:lnT w="9525" cap="flat" cmpd="sng" algn="ctr">
-                      <a:solidFill>
-                        <a:srgbClr val="C9D3E0"/>
-                      </a:solidFill>
-                      <a:prstDash val="solid"/>
-                      <a:round/>
-                      <a:headEnd type="none" w="med" len="med"/>
-                      <a:tailEnd type="none" w="med" len="med"/>
-                    </a:lnT>
-                    <a:lnB w="9525" cap="flat" cmpd="sng" algn="ctr">
-                      <a:solidFill>
-                        <a:srgbClr val="C9D3E0"/>
-                      </a:solidFill>
-                      <a:prstDash val="solid"/>
-                      <a:round/>
-                      <a:headEnd type="none" w="med" len="med"/>
-                      <a:tailEnd type="none" w="med" len="med"/>
-                    </a:lnB>
-                    <a:solidFill>
-                      <a:srgbClr val="E63E62"/>
-                    </a:solidFill>
-                  </a:tcPr>
-                </a:tc>
-                <a:tc hMerge="1">
-                  <a:tcPr/>
-                </a:tc>
-                <a:tc hMerge="1">
-                  <a:tcPr/>
-                </a:tc>
-                <a:tc>
-                  <a:txBody>
-                    <a:bodyPr/>
-                    <a:lstStyle/>
-                    <a:p>
-                      <a:pPr algn="r" indent="0" marL="0">
-                        <a:buNone/>
-                      </a:pPr>
-                      <a:r>
-                        <a:rPr lang="en-US" sz="1200" b="1" dirty="0">
-                          <a:solidFill>
-                            <a:srgbClr val="FFFFFF"/>
-                          </a:solidFill>
-                          <a:latin typeface="Calibri" pitchFamily="34" charset="0"/>
-                          <a:ea typeface="Calibri" pitchFamily="34" charset="-122"/>
-                          <a:cs typeface="Calibri" pitchFamily="34" charset="-120"/>
-                        </a:rPr>
-                        <a:t>1 097 000 ₽</a:t>
-                      </a:r>
-                      <a:endParaRPr lang="en-US" sz="1200" dirty="0">
-                        <a:latin typeface="Calibri" charset="0"/>
-                        <a:ea typeface="Calibri" charset="0"/>
-                        <a:cs typeface="Calibri" charset="0"/>
-                      </a:endParaRPr>
-                    </a:p>
-                  </a:txBody>
-                  <a:tcPr marL="91440" marR="91440" marT="45720" marB="45720" anchor="ctr">
-                    <a:lnL w="9525" cap="flat" cmpd="sng" algn="ctr">
-                      <a:solidFill>
-                        <a:srgbClr val="C9D3E0"/>
-                      </a:solidFill>
-                      <a:prstDash val="solid"/>
-                      <a:round/>
-                      <a:headEnd type="none" w="med" len="med"/>
-                      <a:tailEnd type="none" w="med" len="med"/>
-                    </a:lnL>
-                    <a:lnR w="9525" cap="flat" cmpd="sng" algn="ctr">
-                      <a:solidFill>
-                        <a:srgbClr val="C9D3E0"/>
-                      </a:solidFill>
-                      <a:prstDash val="solid"/>
-                      <a:round/>
-                      <a:headEnd type="none" w="med" len="med"/>
-                      <a:tailEnd type="none" w="med" len="med"/>
-                    </a:lnR>
-                    <a:lnT w="9525" cap="flat" cmpd="sng" algn="ctr">
-                      <a:solidFill>
-                        <a:srgbClr val="C9D3E0"/>
-                      </a:solidFill>
-                      <a:prstDash val="solid"/>
-                      <a:round/>
-                      <a:headEnd type="none" w="med" len="med"/>
-                      <a:tailEnd type="none" w="med" len="med"/>
-                    </a:lnT>
-                    <a:lnB w="9525" cap="flat" cmpd="sng" algn="ctr">
-                      <a:solidFill>
-                        <a:srgbClr val="C9D3E0"/>
-                      </a:solidFill>
-                      <a:prstDash val="solid"/>
-                      <a:round/>
-                      <a:headEnd type="none" w="med" len="med"/>
-                      <a:tailEnd type="none" w="med" len="med"/>
-                    </a:lnB>
-                    <a:solidFill>
-                      <a:srgbClr val="E63E62"/>
-                    </a:solidFill>
-                  </a:tcPr>
-                </a:tc>
-              </a:tr>
-            </a:tbl>
-          </a:graphicData>
-        </a:graphic>
-      </p:graphicFrame>
+      <p:sp>
+        <p:nvSpPr>
+          <p:cNvPr id="4" name="Shape 2"/>
+          <p:cNvSpPr/>
+          <p:nvPr/>
+        </p:nvSpPr>
+        <p:spPr>
+          <a:xfrm>
+            <a:off x="457200" y="1188720"/>
+            <a:ext cx="1920240" cy="1737360"/>
+          </a:xfrm>
+          <a:prstGeom prst="roundRect">
+            <a:avLst>
+              <a:gd name="adj" fmla="val 4211"/>
+            </a:avLst>
+          </a:prstGeom>
+          <a:solidFill>
+            <a:srgbClr val="F4F7FB"/>
+          </a:solidFill>
+          <a:ln w="12700">
+            <a:solidFill>
+              <a:srgbClr val="F4F7FB"/>
+            </a:solidFill>
+            <a:prstDash val="solid"/>
+          </a:ln>
+          <a:effectLst>
+            <a:outerShdw sx="100000" sy="100000" kx="0" ky="0" algn="bl" rotWithShape="0" blurRad="76200" dist="25400" dir="5400000">
+              <a:srgbClr val="000000">
+                <a:alpha val="12000"/>
+              </a:srgbClr>
+            </a:outerShdw>
+          </a:effectLst>
+        </p:spPr>
+      </p:sp>
+      <p:pic>
+        <p:nvPicPr>
+          <p:cNvPr id="5" name="Image 0" descr="/private/tmp/claude-501/-Users-sergei/2bb89287-c36d-4b6a-b8e3-e06097a589c7/scratchpad/t/presentation/images/router.jpg">    </p:cNvPr>
+          <p:cNvPicPr>
+            <a:picLocks noChangeAspect="1"/>
+          </p:cNvPicPr>
+          <p:nvPr/>
+        </p:nvPicPr>
+        <p:blipFill>
+          <a:blip r:embed="rId1"/>
+          <a:stretch>
+            <a:fillRect/>
+          </a:stretch>
+        </p:blipFill>
+        <p:spPr>
+          <a:xfrm>
+            <a:off x="899160" y="1261872"/>
+            <a:ext cx="1036320" cy="777240"/>
+          </a:xfrm>
+          <a:prstGeom prst="rect">
+            <a:avLst/>
+          </a:prstGeom>
+        </p:spPr>
+      </p:pic>
+      <p:sp>
+        <p:nvSpPr>
+          <p:cNvPr id="6" name="Text 3"/>
+          <p:cNvSpPr txBox="1"/>
+          <p:nvPr/>
+        </p:nvSpPr>
+        <p:spPr>
+          <a:xfrm>
+            <a:off x="548640" y="2075688"/>
+            <a:ext cx="1737360" cy="457200"/>
+          </a:xfrm>
+          <a:prstGeom prst="rect">
+            <a:avLst/>
+          </a:prstGeom>
+          <a:noFill/>
+          <a:ln/>
+        </p:spPr>
+        <p:txBody>
+          <a:bodyPr wrap="square" lIns="0" tIns="0" rIns="0" bIns="0" rtlCol="0" anchor="t"/>
+          <a:lstStyle/>
+          <a:p>
+            <a:pPr indent="0" marL="0">
+              <a:buNone/>
+            </a:pPr>
+            <a:r>
+              <a:rPr lang="en-US" sz="950" b="1" dirty="0">
+                <a:solidFill>
+                  <a:srgbClr val="0B1F3A"/>
+                </a:solidFill>
+                <a:latin typeface="Calibri" pitchFamily="34" charset="0"/>
+                <a:ea typeface="Calibri" pitchFamily="34" charset="-122"/>
+                <a:cs typeface="Calibri" pitchFamily="34" charset="-120"/>
+              </a:rPr>
+              <a:t>Маршрутизатор Cisco ISR 2911/K9</a:t>
+            </a:r>
+            <a:endParaRPr lang="en-US" sz="950" dirty="0"/>
+          </a:p>
+        </p:txBody>
+      </p:sp>
+      <p:sp>
+        <p:nvSpPr>
+          <p:cNvPr id="7" name="Text 4"/>
+          <p:cNvSpPr txBox="1"/>
+          <p:nvPr/>
+        </p:nvSpPr>
+        <p:spPr>
+          <a:xfrm>
+            <a:off x="548640" y="2560320"/>
+            <a:ext cx="1737360" cy="274320"/>
+          </a:xfrm>
+          <a:prstGeom prst="rect">
+            <a:avLst/>
+          </a:prstGeom>
+          <a:noFill/>
+          <a:ln/>
+        </p:spPr>
+        <p:txBody>
+          <a:bodyPr wrap="square" lIns="0" tIns="0" rIns="0" bIns="0" rtlCol="0" anchor="ctr"/>
+          <a:lstStyle/>
+          <a:p>
+            <a:pPr indent="0" marL="0">
+              <a:buNone/>
+            </a:pPr>
+            <a:r>
+              <a:rPr lang="en-US" sz="1000" dirty="0">
+                <a:solidFill>
+                  <a:srgbClr val="5B6675"/>
+                </a:solidFill>
+                <a:latin typeface="Calibri" pitchFamily="34" charset="0"/>
+                <a:ea typeface="Calibri" pitchFamily="34" charset="-122"/>
+                <a:cs typeface="Calibri" pitchFamily="34" charset="-120"/>
+              </a:rPr>
+              <a:t>1 × 65 000 ₽</a:t>
+            </a:r>
+            <a:pPr indent="0" marL="0">
+              <a:buNone/>
+            </a:pPr>
+            <a:r>
+              <a:rPr lang="en-US" sz="1000" b="1" dirty="0">
+                <a:solidFill>
+                  <a:srgbClr val="1B2430"/>
+                </a:solidFill>
+                <a:latin typeface="Calibri" pitchFamily="34" charset="0"/>
+                <a:ea typeface="Calibri" pitchFamily="34" charset="-122"/>
+                <a:cs typeface="Calibri" pitchFamily="34" charset="-120"/>
+              </a:rPr>
+              <a:t>   65 000 ₽</a:t>
+            </a:r>
+            <a:endParaRPr lang="en-US" sz="1000" dirty="0"/>
+          </a:p>
+        </p:txBody>
+      </p:sp>
+      <p:sp>
+        <p:nvSpPr>
+          <p:cNvPr id="8" name="Shape 5"/>
+          <p:cNvSpPr/>
+          <p:nvPr/>
+        </p:nvSpPr>
+        <p:spPr>
+          <a:xfrm>
+            <a:off x="2560320" y="1188720"/>
+            <a:ext cx="1920240" cy="1737360"/>
+          </a:xfrm>
+          <a:prstGeom prst="roundRect">
+            <a:avLst>
+              <a:gd name="adj" fmla="val 4211"/>
+            </a:avLst>
+          </a:prstGeom>
+          <a:solidFill>
+            <a:srgbClr val="F4F7FB"/>
+          </a:solidFill>
+          <a:ln w="12700">
+            <a:solidFill>
+              <a:srgbClr val="F4F7FB"/>
+            </a:solidFill>
+            <a:prstDash val="solid"/>
+          </a:ln>
+          <a:effectLst>
+            <a:outerShdw sx="100000" sy="100000" kx="0" ky="0" algn="bl" rotWithShape="0" blurRad="76200" dist="25400" dir="5400000">
+              <a:srgbClr val="000000">
+                <a:alpha val="12000"/>
+              </a:srgbClr>
+            </a:outerShdw>
+          </a:effectLst>
+        </p:spPr>
+      </p:sp>
+      <p:pic>
+        <p:nvPicPr>
+          <p:cNvPr id="9" name="Image 1" descr="/private/tmp/claude-501/-Users-sergei/2bb89287-c36d-4b6a-b8e3-e06097a589c7/scratchpad/t/presentation/images/switch.jpg">    </p:cNvPr>
+          <p:cNvPicPr>
+            <a:picLocks noChangeAspect="1"/>
+          </p:cNvPicPr>
+          <p:nvPr/>
+        </p:nvPicPr>
+        <p:blipFill>
+          <a:blip r:embed="rId2"/>
+          <a:stretch>
+            <a:fillRect/>
+          </a:stretch>
+        </p:blipFill>
+        <p:spPr>
+          <a:xfrm>
+            <a:off x="3002280" y="1261872"/>
+            <a:ext cx="1036320" cy="777240"/>
+          </a:xfrm>
+          <a:prstGeom prst="rect">
+            <a:avLst/>
+          </a:prstGeom>
+        </p:spPr>
+      </p:pic>
+      <p:sp>
+        <p:nvSpPr>
+          <p:cNvPr id="10" name="Text 6"/>
+          <p:cNvSpPr txBox="1"/>
+          <p:nvPr/>
+        </p:nvSpPr>
+        <p:spPr>
+          <a:xfrm>
+            <a:off x="2651760" y="2075688"/>
+            <a:ext cx="1737360" cy="457200"/>
+          </a:xfrm>
+          <a:prstGeom prst="rect">
+            <a:avLst/>
+          </a:prstGeom>
+          <a:noFill/>
+          <a:ln/>
+        </p:spPr>
+        <p:txBody>
+          <a:bodyPr wrap="square" lIns="0" tIns="0" rIns="0" bIns="0" rtlCol="0" anchor="t"/>
+          <a:lstStyle/>
+          <a:p>
+            <a:pPr indent="0" marL="0">
+              <a:buNone/>
+            </a:pPr>
+            <a:r>
+              <a:rPr lang="en-US" sz="950" b="1" dirty="0">
+                <a:solidFill>
+                  <a:srgbClr val="E63E62"/>
+                </a:solidFill>
+                <a:latin typeface="Calibri" pitchFamily="34" charset="0"/>
+                <a:ea typeface="Calibri" pitchFamily="34" charset="-122"/>
+                <a:cs typeface="Calibri" pitchFamily="34" charset="-120"/>
+              </a:rPr>
+              <a:t>Коммутатор Cisco Catalyst 2960-24TT-L</a:t>
+            </a:r>
+            <a:endParaRPr lang="en-US" sz="950" dirty="0"/>
+          </a:p>
+        </p:txBody>
+      </p:sp>
+      <p:sp>
+        <p:nvSpPr>
+          <p:cNvPr id="11" name="Text 7"/>
+          <p:cNvSpPr txBox="1"/>
+          <p:nvPr/>
+        </p:nvSpPr>
+        <p:spPr>
+          <a:xfrm>
+            <a:off x="2651760" y="2560320"/>
+            <a:ext cx="1737360" cy="274320"/>
+          </a:xfrm>
+          <a:prstGeom prst="rect">
+            <a:avLst/>
+          </a:prstGeom>
+          <a:noFill/>
+          <a:ln/>
+        </p:spPr>
+        <p:txBody>
+          <a:bodyPr wrap="square" lIns="0" tIns="0" rIns="0" bIns="0" rtlCol="0" anchor="ctr"/>
+          <a:lstStyle/>
+          <a:p>
+            <a:pPr indent="0" marL="0">
+              <a:buNone/>
+            </a:pPr>
+            <a:r>
+              <a:rPr lang="en-US" sz="1000" dirty="0">
+                <a:solidFill>
+                  <a:srgbClr val="5B6675"/>
+                </a:solidFill>
+                <a:latin typeface="Calibri" pitchFamily="34" charset="0"/>
+                <a:ea typeface="Calibri" pitchFamily="34" charset="-122"/>
+                <a:cs typeface="Calibri" pitchFamily="34" charset="-120"/>
+              </a:rPr>
+              <a:t>4 × 28 000 ₽</a:t>
+            </a:r>
+            <a:pPr indent="0" marL="0">
+              <a:buNone/>
+            </a:pPr>
+            <a:r>
+              <a:rPr lang="en-US" sz="1000" b="1" dirty="0">
+                <a:solidFill>
+                  <a:srgbClr val="1B2430"/>
+                </a:solidFill>
+                <a:latin typeface="Calibri" pitchFamily="34" charset="0"/>
+                <a:ea typeface="Calibri" pitchFamily="34" charset="-122"/>
+                <a:cs typeface="Calibri" pitchFamily="34" charset="-120"/>
+              </a:rPr>
+              <a:t>   112 000 ₽</a:t>
+            </a:r>
+            <a:endParaRPr lang="en-US" sz="1000" dirty="0"/>
+          </a:p>
+        </p:txBody>
+      </p:sp>
+      <p:sp>
+        <p:nvSpPr>
+          <p:cNvPr id="12" name="Shape 8"/>
+          <p:cNvSpPr/>
+          <p:nvPr/>
+        </p:nvSpPr>
+        <p:spPr>
+          <a:xfrm>
+            <a:off x="4663440" y="1188720"/>
+            <a:ext cx="1920240" cy="1737360"/>
+          </a:xfrm>
+          <a:prstGeom prst="roundRect">
+            <a:avLst>
+              <a:gd name="adj" fmla="val 4211"/>
+            </a:avLst>
+          </a:prstGeom>
+          <a:solidFill>
+            <a:srgbClr val="F4F7FB"/>
+          </a:solidFill>
+          <a:ln w="12700">
+            <a:solidFill>
+              <a:srgbClr val="F4F7FB"/>
+            </a:solidFill>
+            <a:prstDash val="solid"/>
+          </a:ln>
+          <a:effectLst>
+            <a:outerShdw sx="100000" sy="100000" kx="0" ky="0" algn="bl" rotWithShape="0" blurRad="76200" dist="25400" dir="5400000">
+              <a:srgbClr val="000000">
+                <a:alpha val="12000"/>
+              </a:srgbClr>
+            </a:outerShdw>
+          </a:effectLst>
+        </p:spPr>
+      </p:sp>
+      <p:pic>
+        <p:nvPicPr>
+          <p:cNvPr id="13" name="Image 2" descr="/private/tmp/claude-501/-Users-sergei/2bb89287-c36d-4b6a-b8e3-e06097a589c7/scratchpad/t/presentation/images/pc.jpg">    </p:cNvPr>
+          <p:cNvPicPr>
+            <a:picLocks noChangeAspect="1"/>
+          </p:cNvPicPr>
+          <p:nvPr/>
+        </p:nvPicPr>
+        <p:blipFill>
+          <a:blip r:embed="rId3"/>
+          <a:stretch>
+            <a:fillRect/>
+          </a:stretch>
+        </p:blipFill>
+        <p:spPr>
+          <a:xfrm>
+            <a:off x="5040630" y="1261872"/>
+            <a:ext cx="1165860" cy="777240"/>
+          </a:xfrm>
+          <a:prstGeom prst="rect">
+            <a:avLst/>
+          </a:prstGeom>
+        </p:spPr>
+      </p:pic>
+      <p:sp>
+        <p:nvSpPr>
+          <p:cNvPr id="14" name="Text 9"/>
+          <p:cNvSpPr txBox="1"/>
+          <p:nvPr/>
+        </p:nvSpPr>
+        <p:spPr>
+          <a:xfrm>
+            <a:off x="4754880" y="2075688"/>
+            <a:ext cx="1737360" cy="457200"/>
+          </a:xfrm>
+          <a:prstGeom prst="rect">
+            <a:avLst/>
+          </a:prstGeom>
+          <a:noFill/>
+          <a:ln/>
+        </p:spPr>
+        <p:txBody>
+          <a:bodyPr wrap="square" lIns="0" tIns="0" rIns="0" bIns="0" rtlCol="0" anchor="t"/>
+          <a:lstStyle/>
+          <a:p>
+            <a:pPr indent="0" marL="0">
+              <a:buNone/>
+            </a:pPr>
+            <a:r>
+              <a:rPr lang="en-US" sz="950" b="1" dirty="0">
+                <a:solidFill>
+                  <a:srgbClr val="FF8A00"/>
+                </a:solidFill>
+                <a:latin typeface="Calibri" pitchFamily="34" charset="0"/>
+                <a:ea typeface="Calibri" pitchFamily="34" charset="-122"/>
+                <a:cs typeface="Calibri" pitchFamily="34" charset="-120"/>
+              </a:rPr>
+              <a:t>Рабочая станция (Core i5, 16 ГБ, SSD 512 ГБ) + монитор 24"</a:t>
+            </a:r>
+            <a:endParaRPr lang="en-US" sz="950" dirty="0"/>
+          </a:p>
+        </p:txBody>
+      </p:sp>
+      <p:sp>
+        <p:nvSpPr>
+          <p:cNvPr id="15" name="Text 10"/>
+          <p:cNvSpPr txBox="1"/>
+          <p:nvPr/>
+        </p:nvSpPr>
+        <p:spPr>
+          <a:xfrm>
+            <a:off x="4754880" y="2560320"/>
+            <a:ext cx="1737360" cy="274320"/>
+          </a:xfrm>
+          <a:prstGeom prst="rect">
+            <a:avLst/>
+          </a:prstGeom>
+          <a:noFill/>
+          <a:ln/>
+        </p:spPr>
+        <p:txBody>
+          <a:bodyPr wrap="square" lIns="0" tIns="0" rIns="0" bIns="0" rtlCol="0" anchor="ctr"/>
+          <a:lstStyle/>
+          <a:p>
+            <a:pPr indent="0" marL="0">
+              <a:buNone/>
+            </a:pPr>
+            <a:r>
+              <a:rPr lang="en-US" sz="1000" dirty="0">
+                <a:solidFill>
+                  <a:srgbClr val="5B6675"/>
+                </a:solidFill>
+                <a:latin typeface="Calibri" pitchFamily="34" charset="0"/>
+                <a:ea typeface="Calibri" pitchFamily="34" charset="-122"/>
+                <a:cs typeface="Calibri" pitchFamily="34" charset="-120"/>
+              </a:rPr>
+              <a:t>9 × 62 000 ₽</a:t>
+            </a:r>
+            <a:pPr indent="0" marL="0">
+              <a:buNone/>
+            </a:pPr>
+            <a:r>
+              <a:rPr lang="en-US" sz="1000" b="1" dirty="0">
+                <a:solidFill>
+                  <a:srgbClr val="1B2430"/>
+                </a:solidFill>
+                <a:latin typeface="Calibri" pitchFamily="34" charset="0"/>
+                <a:ea typeface="Calibri" pitchFamily="34" charset="-122"/>
+                <a:cs typeface="Calibri" pitchFamily="34" charset="-120"/>
+              </a:rPr>
+              <a:t>   558 000 ₽</a:t>
+            </a:r>
+            <a:endParaRPr lang="en-US" sz="1000" dirty="0"/>
+          </a:p>
+        </p:txBody>
+      </p:sp>
+      <p:sp>
+        <p:nvSpPr>
+          <p:cNvPr id="16" name="Shape 11"/>
+          <p:cNvSpPr/>
+          <p:nvPr/>
+        </p:nvSpPr>
+        <p:spPr>
+          <a:xfrm>
+            <a:off x="6766560" y="1188720"/>
+            <a:ext cx="1920240" cy="1737360"/>
+          </a:xfrm>
+          <a:prstGeom prst="roundRect">
+            <a:avLst>
+              <a:gd name="adj" fmla="val 4211"/>
+            </a:avLst>
+          </a:prstGeom>
+          <a:solidFill>
+            <a:srgbClr val="F4F7FB"/>
+          </a:solidFill>
+          <a:ln w="12700">
+            <a:solidFill>
+              <a:srgbClr val="F4F7FB"/>
+            </a:solidFill>
+            <a:prstDash val="solid"/>
+          </a:ln>
+          <a:effectLst>
+            <a:outerShdw sx="100000" sy="100000" kx="0" ky="0" algn="bl" rotWithShape="0" blurRad="76200" dist="25400" dir="5400000">
+              <a:srgbClr val="000000">
+                <a:alpha val="12000"/>
+              </a:srgbClr>
+            </a:outerShdw>
+          </a:effectLst>
+        </p:spPr>
+      </p:sp>
+      <p:pic>
+        <p:nvPicPr>
+          <p:cNvPr id="17" name="Image 3" descr="/private/tmp/claude-501/-Users-sergei/2bb89287-c36d-4b6a-b8e3-e06097a589c7/scratchpad/t/presentation/images/server.jpg">    </p:cNvPr>
+          <p:cNvPicPr>
+            <a:picLocks noChangeAspect="1"/>
+          </p:cNvPicPr>
+          <p:nvPr/>
+        </p:nvPicPr>
+        <p:blipFill>
+          <a:blip r:embed="rId4"/>
+          <a:stretch>
+            <a:fillRect/>
+          </a:stretch>
+        </p:blipFill>
+        <p:spPr>
+          <a:xfrm>
+            <a:off x="7035800" y="1261872"/>
+            <a:ext cx="1381760" cy="777240"/>
+          </a:xfrm>
+          <a:prstGeom prst="rect">
+            <a:avLst/>
+          </a:prstGeom>
+        </p:spPr>
+      </p:pic>
+      <p:sp>
+        <p:nvSpPr>
+          <p:cNvPr id="18" name="Text 12"/>
+          <p:cNvSpPr txBox="1"/>
+          <p:nvPr/>
+        </p:nvSpPr>
+        <p:spPr>
+          <a:xfrm>
+            <a:off x="6858000" y="2075688"/>
+            <a:ext cx="1737360" cy="457200"/>
+          </a:xfrm>
+          <a:prstGeom prst="rect">
+            <a:avLst/>
+          </a:prstGeom>
+          <a:noFill/>
+          <a:ln/>
+        </p:spPr>
+        <p:txBody>
+          <a:bodyPr wrap="square" lIns="0" tIns="0" rIns="0" bIns="0" rtlCol="0" anchor="t"/>
+          <a:lstStyle/>
+          <a:p>
+            <a:pPr indent="0" marL="0">
+              <a:buNone/>
+            </a:pPr>
+            <a:r>
+              <a:rPr lang="en-US" sz="950" b="1" dirty="0">
+                <a:solidFill>
+                  <a:srgbClr val="00B4D8"/>
+                </a:solidFill>
+                <a:latin typeface="Calibri" pitchFamily="34" charset="0"/>
+                <a:ea typeface="Calibri" pitchFamily="34" charset="-122"/>
+                <a:cs typeface="Calibri" pitchFamily="34" charset="-120"/>
+              </a:rPr>
+              <a:t>Сервер HPE ProLiant DL20 Gen10 Plus</a:t>
+            </a:r>
+            <a:endParaRPr lang="en-US" sz="950" dirty="0"/>
+          </a:p>
+        </p:txBody>
+      </p:sp>
+      <p:sp>
+        <p:nvSpPr>
+          <p:cNvPr id="19" name="Text 13"/>
+          <p:cNvSpPr txBox="1"/>
+          <p:nvPr/>
+        </p:nvSpPr>
+        <p:spPr>
+          <a:xfrm>
+            <a:off x="6858000" y="2560320"/>
+            <a:ext cx="1737360" cy="274320"/>
+          </a:xfrm>
+          <a:prstGeom prst="rect">
+            <a:avLst/>
+          </a:prstGeom>
+          <a:noFill/>
+          <a:ln/>
+        </p:spPr>
+        <p:txBody>
+          <a:bodyPr wrap="square" lIns="0" tIns="0" rIns="0" bIns="0" rtlCol="0" anchor="ctr"/>
+          <a:lstStyle/>
+          <a:p>
+            <a:pPr indent="0" marL="0">
+              <a:buNone/>
+            </a:pPr>
+            <a:r>
+              <a:rPr lang="en-US" sz="1000" dirty="0">
+                <a:solidFill>
+                  <a:srgbClr val="5B6675"/>
+                </a:solidFill>
+                <a:latin typeface="Calibri" pitchFamily="34" charset="0"/>
+                <a:ea typeface="Calibri" pitchFamily="34" charset="-122"/>
+                <a:cs typeface="Calibri" pitchFamily="34" charset="-120"/>
+              </a:rPr>
+              <a:t>1 × 210 000 ₽</a:t>
+            </a:r>
+            <a:pPr indent="0" marL="0">
+              <a:buNone/>
+            </a:pPr>
+            <a:r>
+              <a:rPr lang="en-US" sz="1000" b="1" dirty="0">
+                <a:solidFill>
+                  <a:srgbClr val="1B2430"/>
+                </a:solidFill>
+                <a:latin typeface="Calibri" pitchFamily="34" charset="0"/>
+                <a:ea typeface="Calibri" pitchFamily="34" charset="-122"/>
+                <a:cs typeface="Calibri" pitchFamily="34" charset="-120"/>
+              </a:rPr>
+              <a:t>   210 000 ₽</a:t>
+            </a:r>
+            <a:endParaRPr lang="en-US" sz="1000" dirty="0"/>
+          </a:p>
+        </p:txBody>
+      </p:sp>
+      <p:sp>
+        <p:nvSpPr>
+          <p:cNvPr id="20" name="Shape 14"/>
+          <p:cNvSpPr/>
+          <p:nvPr/>
+        </p:nvSpPr>
+        <p:spPr>
+          <a:xfrm>
+            <a:off x="457200" y="3063240"/>
+            <a:ext cx="1920240" cy="1737360"/>
+          </a:xfrm>
+          <a:prstGeom prst="roundRect">
+            <a:avLst>
+              <a:gd name="adj" fmla="val 4211"/>
+            </a:avLst>
+          </a:prstGeom>
+          <a:solidFill>
+            <a:srgbClr val="F4F7FB"/>
+          </a:solidFill>
+          <a:ln w="12700">
+            <a:solidFill>
+              <a:srgbClr val="F4F7FB"/>
+            </a:solidFill>
+            <a:prstDash val="solid"/>
+          </a:ln>
+          <a:effectLst>
+            <a:outerShdw sx="100000" sy="100000" kx="0" ky="0" algn="bl" rotWithShape="0" blurRad="76200" dist="25400" dir="5400000">
+              <a:srgbClr val="000000">
+                <a:alpha val="12000"/>
+              </a:srgbClr>
+            </a:outerShdw>
+          </a:effectLst>
+        </p:spPr>
+      </p:sp>
+      <p:pic>
+        <p:nvPicPr>
+          <p:cNvPr id="21" name="Image 4" descr="/private/tmp/claude-501/-Users-sergei/2bb89287-c36d-4b6a-b8e3-e06097a589c7/scratchpad/t/presentation/images/mfp.jpg">    </p:cNvPr>
+          <p:cNvPicPr>
+            <a:picLocks noChangeAspect="1"/>
+          </p:cNvPicPr>
+          <p:nvPr/>
+        </p:nvPicPr>
+        <p:blipFill>
+          <a:blip r:embed="rId5"/>
+          <a:stretch>
+            <a:fillRect/>
+          </a:stretch>
+        </p:blipFill>
+        <p:spPr>
+          <a:xfrm>
+            <a:off x="1152163" y="3136392"/>
+            <a:ext cx="530313" cy="777240"/>
+          </a:xfrm>
+          <a:prstGeom prst="rect">
+            <a:avLst/>
+          </a:prstGeom>
+        </p:spPr>
+      </p:pic>
+      <p:sp>
+        <p:nvSpPr>
+          <p:cNvPr id="22" name="Text 15"/>
+          <p:cNvSpPr txBox="1"/>
+          <p:nvPr/>
+        </p:nvSpPr>
+        <p:spPr>
+          <a:xfrm>
+            <a:off x="548640" y="3950208"/>
+            <a:ext cx="1737360" cy="457200"/>
+          </a:xfrm>
+          <a:prstGeom prst="rect">
+            <a:avLst/>
+          </a:prstGeom>
+          <a:noFill/>
+          <a:ln/>
+        </p:spPr>
+        <p:txBody>
+          <a:bodyPr wrap="square" lIns="0" tIns="0" rIns="0" bIns="0" rtlCol="0" anchor="t"/>
+          <a:lstStyle/>
+          <a:p>
+            <a:pPr indent="0" marL="0">
+              <a:buNone/>
+            </a:pPr>
+            <a:r>
+              <a:rPr lang="en-US" sz="950" b="1" dirty="0">
+                <a:solidFill>
+                  <a:srgbClr val="8B5CF6"/>
+                </a:solidFill>
+                <a:latin typeface="Calibri" pitchFamily="34" charset="0"/>
+                <a:ea typeface="Calibri" pitchFamily="34" charset="-122"/>
+                <a:cs typeface="Calibri" pitchFamily="34" charset="-120"/>
+              </a:rPr>
+              <a:t>МФУ лазерное сетевое</a:t>
+            </a:r>
+            <a:endParaRPr lang="en-US" sz="950" dirty="0"/>
+          </a:p>
+        </p:txBody>
+      </p:sp>
+      <p:sp>
+        <p:nvSpPr>
+          <p:cNvPr id="23" name="Text 16"/>
+          <p:cNvSpPr txBox="1"/>
+          <p:nvPr/>
+        </p:nvSpPr>
+        <p:spPr>
+          <a:xfrm>
+            <a:off x="548640" y="4434840"/>
+            <a:ext cx="1737360" cy="274320"/>
+          </a:xfrm>
+          <a:prstGeom prst="rect">
+            <a:avLst/>
+          </a:prstGeom>
+          <a:noFill/>
+          <a:ln/>
+        </p:spPr>
+        <p:txBody>
+          <a:bodyPr wrap="square" lIns="0" tIns="0" rIns="0" bIns="0" rtlCol="0" anchor="ctr"/>
+          <a:lstStyle/>
+          <a:p>
+            <a:pPr indent="0" marL="0">
+              <a:buNone/>
+            </a:pPr>
+            <a:r>
+              <a:rPr lang="en-US" sz="1000" dirty="0">
+                <a:solidFill>
+                  <a:srgbClr val="5B6675"/>
+                </a:solidFill>
+                <a:latin typeface="Calibri" pitchFamily="34" charset="0"/>
+                <a:ea typeface="Calibri" pitchFamily="34" charset="-122"/>
+                <a:cs typeface="Calibri" pitchFamily="34" charset="-120"/>
+              </a:rPr>
+              <a:t>3 × 24 000 ₽</a:t>
+            </a:r>
+            <a:pPr indent="0" marL="0">
+              <a:buNone/>
+            </a:pPr>
+            <a:r>
+              <a:rPr lang="en-US" sz="1000" b="1" dirty="0">
+                <a:solidFill>
+                  <a:srgbClr val="1B2430"/>
+                </a:solidFill>
+                <a:latin typeface="Calibri" pitchFamily="34" charset="0"/>
+                <a:ea typeface="Calibri" pitchFamily="34" charset="-122"/>
+                <a:cs typeface="Calibri" pitchFamily="34" charset="-120"/>
+              </a:rPr>
+              <a:t>   72 000 ₽</a:t>
+            </a:r>
+            <a:endParaRPr lang="en-US" sz="1000" dirty="0"/>
+          </a:p>
+        </p:txBody>
+      </p:sp>
+      <p:sp>
+        <p:nvSpPr>
+          <p:cNvPr id="24" name="Shape 17"/>
+          <p:cNvSpPr/>
+          <p:nvPr/>
+        </p:nvSpPr>
+        <p:spPr>
+          <a:xfrm>
+            <a:off x="2560320" y="3063240"/>
+            <a:ext cx="1920240" cy="1737360"/>
+          </a:xfrm>
+          <a:prstGeom prst="roundRect">
+            <a:avLst>
+              <a:gd name="adj" fmla="val 4211"/>
+            </a:avLst>
+          </a:prstGeom>
+          <a:solidFill>
+            <a:srgbClr val="F4F7FB"/>
+          </a:solidFill>
+          <a:ln w="12700">
+            <a:solidFill>
+              <a:srgbClr val="F4F7FB"/>
+            </a:solidFill>
+            <a:prstDash val="solid"/>
+          </a:ln>
+          <a:effectLst>
+            <a:outerShdw sx="100000" sy="100000" kx="0" ky="0" algn="bl" rotWithShape="0" blurRad="76200" dist="25400" dir="5400000">
+              <a:srgbClr val="000000">
+                <a:alpha val="12000"/>
+              </a:srgbClr>
+            </a:outerShdw>
+          </a:effectLst>
+        </p:spPr>
+      </p:sp>
+      <p:pic>
+        <p:nvPicPr>
+          <p:cNvPr id="25" name="Image 5" descr="/private/tmp/claude-501/-Users-sergei/2bb89287-c36d-4b6a-b8e3-e06097a589c7/scratchpad/t/presentation/images/rack.jpg">    </p:cNvPr>
+          <p:cNvPicPr>
+            <a:picLocks noChangeAspect="1"/>
+          </p:cNvPicPr>
+          <p:nvPr/>
+        </p:nvPicPr>
+        <p:blipFill>
+          <a:blip r:embed="rId6"/>
+          <a:stretch>
+            <a:fillRect/>
+          </a:stretch>
+        </p:blipFill>
+        <p:spPr>
+          <a:xfrm>
+            <a:off x="2928306" y="3136392"/>
+            <a:ext cx="1184268" cy="777240"/>
+          </a:xfrm>
+          <a:prstGeom prst="rect">
+            <a:avLst/>
+          </a:prstGeom>
+        </p:spPr>
+      </p:pic>
+      <p:sp>
+        <p:nvSpPr>
+          <p:cNvPr id="26" name="Text 18"/>
+          <p:cNvSpPr txBox="1"/>
+          <p:nvPr/>
+        </p:nvSpPr>
+        <p:spPr>
+          <a:xfrm>
+            <a:off x="2651760" y="3950208"/>
+            <a:ext cx="1737360" cy="457200"/>
+          </a:xfrm>
+          <a:prstGeom prst="rect">
+            <a:avLst/>
+          </a:prstGeom>
+          <a:noFill/>
+          <a:ln/>
+        </p:spPr>
+        <p:txBody>
+          <a:bodyPr wrap="square" lIns="0" tIns="0" rIns="0" bIns="0" rtlCol="0" anchor="t"/>
+          <a:lstStyle/>
+          <a:p>
+            <a:pPr indent="0" marL="0">
+              <a:buNone/>
+            </a:pPr>
+            <a:r>
+              <a:rPr lang="en-US" sz="950" b="1" dirty="0">
+                <a:solidFill>
+                  <a:srgbClr val="22B573"/>
+                </a:solidFill>
+                <a:latin typeface="Calibri" pitchFamily="34" charset="0"/>
+                <a:ea typeface="Calibri" pitchFamily="34" charset="-122"/>
+                <a:cs typeface="Calibri" pitchFamily="34" charset="-120"/>
+              </a:rPr>
+              <a:t>Шкаф серверный 19" 18U</a:t>
+            </a:r>
+            <a:endParaRPr lang="en-US" sz="950" dirty="0"/>
+          </a:p>
+        </p:txBody>
+      </p:sp>
+      <p:sp>
+        <p:nvSpPr>
+          <p:cNvPr id="27" name="Text 19"/>
+          <p:cNvSpPr txBox="1"/>
+          <p:nvPr/>
+        </p:nvSpPr>
+        <p:spPr>
+          <a:xfrm>
+            <a:off x="2651760" y="4434840"/>
+            <a:ext cx="1737360" cy="274320"/>
+          </a:xfrm>
+          <a:prstGeom prst="rect">
+            <a:avLst/>
+          </a:prstGeom>
+          <a:noFill/>
+          <a:ln/>
+        </p:spPr>
+        <p:txBody>
+          <a:bodyPr wrap="square" lIns="0" tIns="0" rIns="0" bIns="0" rtlCol="0" anchor="ctr"/>
+          <a:lstStyle/>
+          <a:p>
+            <a:pPr indent="0" marL="0">
+              <a:buNone/>
+            </a:pPr>
+            <a:r>
+              <a:rPr lang="en-US" sz="1000" dirty="0">
+                <a:solidFill>
+                  <a:srgbClr val="5B6675"/>
+                </a:solidFill>
+                <a:latin typeface="Calibri" pitchFamily="34" charset="0"/>
+                <a:ea typeface="Calibri" pitchFamily="34" charset="-122"/>
+                <a:cs typeface="Calibri" pitchFamily="34" charset="-120"/>
+              </a:rPr>
+              <a:t>1 × 32 000 ₽</a:t>
+            </a:r>
+            <a:pPr indent="0" marL="0">
+              <a:buNone/>
+            </a:pPr>
+            <a:r>
+              <a:rPr lang="en-US" sz="1000" b="1" dirty="0">
+                <a:solidFill>
+                  <a:srgbClr val="1B2430"/>
+                </a:solidFill>
+                <a:latin typeface="Calibri" pitchFamily="34" charset="0"/>
+                <a:ea typeface="Calibri" pitchFamily="34" charset="-122"/>
+                <a:cs typeface="Calibri" pitchFamily="34" charset="-120"/>
+              </a:rPr>
+              <a:t>   32 000 ₽</a:t>
+            </a:r>
+            <a:endParaRPr lang="en-US" sz="1000" dirty="0"/>
+          </a:p>
+        </p:txBody>
+      </p:sp>
+      <p:sp>
+        <p:nvSpPr>
+          <p:cNvPr id="28" name="Shape 20"/>
+          <p:cNvSpPr/>
+          <p:nvPr/>
+        </p:nvSpPr>
+        <p:spPr>
+          <a:xfrm>
+            <a:off x="4663440" y="3063240"/>
+            <a:ext cx="1920240" cy="1737360"/>
+          </a:xfrm>
+          <a:prstGeom prst="roundRect">
+            <a:avLst>
+              <a:gd name="adj" fmla="val 4211"/>
+            </a:avLst>
+          </a:prstGeom>
+          <a:solidFill>
+            <a:srgbClr val="F4F7FB"/>
+          </a:solidFill>
+          <a:ln w="12700">
+            <a:solidFill>
+              <a:srgbClr val="F4F7FB"/>
+            </a:solidFill>
+            <a:prstDash val="solid"/>
+          </a:ln>
+          <a:effectLst>
+            <a:outerShdw sx="100000" sy="100000" kx="0" ky="0" algn="bl" rotWithShape="0" blurRad="76200" dist="25400" dir="5400000">
+              <a:srgbClr val="000000">
+                <a:alpha val="12000"/>
+              </a:srgbClr>
+            </a:outerShdw>
+          </a:effectLst>
+        </p:spPr>
+      </p:sp>
+      <p:pic>
+        <p:nvPicPr>
+          <p:cNvPr id="29" name="Image 6" descr="/private/tmp/claude-501/-Users-sergei/2bb89287-c36d-4b6a-b8e3-e06097a589c7/scratchpad/t/presentation/images/ups.jpg">    </p:cNvPr>
+          <p:cNvPicPr>
+            <a:picLocks noChangeAspect="1"/>
+          </p:cNvPicPr>
+          <p:nvPr/>
+        </p:nvPicPr>
+        <p:blipFill>
+          <a:blip r:embed="rId7"/>
+          <a:stretch>
+            <a:fillRect/>
+          </a:stretch>
+        </p:blipFill>
+        <p:spPr>
+          <a:xfrm>
+            <a:off x="4952561" y="3136392"/>
+            <a:ext cx="1341997" cy="777240"/>
+          </a:xfrm>
+          <a:prstGeom prst="rect">
+            <a:avLst/>
+          </a:prstGeom>
+        </p:spPr>
+      </p:pic>
+      <p:sp>
+        <p:nvSpPr>
+          <p:cNvPr id="30" name="Text 21"/>
+          <p:cNvSpPr txBox="1"/>
+          <p:nvPr/>
+        </p:nvSpPr>
+        <p:spPr>
+          <a:xfrm>
+            <a:off x="4754880" y="3950208"/>
+            <a:ext cx="1737360" cy="457200"/>
+          </a:xfrm>
+          <a:prstGeom prst="rect">
+            <a:avLst/>
+          </a:prstGeom>
+          <a:noFill/>
+          <a:ln/>
+        </p:spPr>
+        <p:txBody>
+          <a:bodyPr wrap="square" lIns="0" tIns="0" rIns="0" bIns="0" rtlCol="0" anchor="t"/>
+          <a:lstStyle/>
+          <a:p>
+            <a:pPr indent="0" marL="0">
+              <a:buNone/>
+            </a:pPr>
+            <a:r>
+              <a:rPr lang="en-US" sz="950" b="1" dirty="0">
+                <a:solidFill>
+                  <a:srgbClr val="E63E62"/>
+                </a:solidFill>
+                <a:latin typeface="Calibri" pitchFamily="34" charset="0"/>
+                <a:ea typeface="Calibri" pitchFamily="34" charset="-122"/>
+                <a:cs typeface="Calibri" pitchFamily="34" charset="-120"/>
+              </a:rPr>
+              <a:t>ИБП APC Smart-UPS 1500 ВА</a:t>
+            </a:r>
+            <a:endParaRPr lang="en-US" sz="950" dirty="0"/>
+          </a:p>
+        </p:txBody>
+      </p:sp>
+      <p:sp>
+        <p:nvSpPr>
+          <p:cNvPr id="31" name="Text 22"/>
+          <p:cNvSpPr txBox="1"/>
+          <p:nvPr/>
+        </p:nvSpPr>
+        <p:spPr>
+          <a:xfrm>
+            <a:off x="4754880" y="4434840"/>
+            <a:ext cx="1737360" cy="274320"/>
+          </a:xfrm>
+          <a:prstGeom prst="rect">
+            <a:avLst/>
+          </a:prstGeom>
+          <a:noFill/>
+          <a:ln/>
+        </p:spPr>
+        <p:txBody>
+          <a:bodyPr wrap="square" lIns="0" tIns="0" rIns="0" bIns="0" rtlCol="0" anchor="ctr"/>
+          <a:lstStyle/>
+          <a:p>
+            <a:pPr indent="0" marL="0">
+              <a:buNone/>
+            </a:pPr>
+            <a:r>
+              <a:rPr lang="en-US" sz="1000" dirty="0">
+                <a:solidFill>
+                  <a:srgbClr val="5B6675"/>
+                </a:solidFill>
+                <a:latin typeface="Calibri" pitchFamily="34" charset="0"/>
+                <a:ea typeface="Calibri" pitchFamily="34" charset="-122"/>
+                <a:cs typeface="Calibri" pitchFamily="34" charset="-120"/>
+              </a:rPr>
+              <a:t>1 × 48 000 ₽</a:t>
+            </a:r>
+            <a:pPr indent="0" marL="0">
+              <a:buNone/>
+            </a:pPr>
+            <a:r>
+              <a:rPr lang="en-US" sz="1000" b="1" dirty="0">
+                <a:solidFill>
+                  <a:srgbClr val="1B2430"/>
+                </a:solidFill>
+                <a:latin typeface="Calibri" pitchFamily="34" charset="0"/>
+                <a:ea typeface="Calibri" pitchFamily="34" charset="-122"/>
+                <a:cs typeface="Calibri" pitchFamily="34" charset="-120"/>
+              </a:rPr>
+              <a:t>   48 000 ₽</a:t>
+            </a:r>
+            <a:endParaRPr lang="en-US" sz="1000" dirty="0"/>
+          </a:p>
+        </p:txBody>
+      </p:sp>
+      <p:sp>
+        <p:nvSpPr>
+          <p:cNvPr id="32" name="Shape 23"/>
+          <p:cNvSpPr/>
+          <p:nvPr/>
+        </p:nvSpPr>
+        <p:spPr>
+          <a:xfrm>
+            <a:off x="6766560" y="3063240"/>
+            <a:ext cx="1920240" cy="1737360"/>
+          </a:xfrm>
+          <a:prstGeom prst="roundRect">
+            <a:avLst>
+              <a:gd name="adj" fmla="val 4211"/>
+            </a:avLst>
+          </a:prstGeom>
+          <a:solidFill>
+            <a:srgbClr val="E63E62"/>
+          </a:solidFill>
+          <a:ln w="12700">
+            <a:solidFill>
+              <a:srgbClr val="E63E62"/>
+            </a:solidFill>
+            <a:prstDash val="solid"/>
+          </a:ln>
+        </p:spPr>
+      </p:sp>
+      <p:sp>
+        <p:nvSpPr>
+          <p:cNvPr id="33" name="Text 24"/>
+          <p:cNvSpPr txBox="1"/>
+          <p:nvPr/>
+        </p:nvSpPr>
+        <p:spPr>
+          <a:xfrm>
+            <a:off x="6903720" y="3246120"/>
+            <a:ext cx="1645920" cy="640080"/>
+          </a:xfrm>
+          <a:prstGeom prst="rect">
+            <a:avLst/>
+          </a:prstGeom>
+          <a:noFill/>
+          <a:ln/>
+        </p:spPr>
+        <p:txBody>
+          <a:bodyPr wrap="square" lIns="0" tIns="0" rIns="0" bIns="0" rtlCol="0" anchor="ctr"/>
+          <a:lstStyle/>
+          <a:p>
+            <a:pPr indent="0" marL="0">
+              <a:buNone/>
+            </a:pPr>
+            <a:r>
+              <a:rPr lang="en-US" sz="1400" dirty="0">
+                <a:solidFill>
+                  <a:srgbClr val="FFFFFF"/>
+                </a:solidFill>
+                <a:latin typeface="Calibri" pitchFamily="34" charset="0"/>
+                <a:ea typeface="Calibri" pitchFamily="34" charset="-122"/>
+                <a:cs typeface="Calibri" pitchFamily="34" charset="-120"/>
+              </a:rPr>
+              <a:t>Итого</a:t>
+            </a:r>
+            <a:endParaRPr lang="en-US" sz="1400" dirty="0"/>
+          </a:p>
+          <a:p>
+            <a:pPr indent="0" marL="0">
+              <a:buNone/>
+            </a:pPr>
+            <a:r>
+              <a:rPr lang="en-US" sz="1400" dirty="0">
+                <a:solidFill>
+                  <a:srgbClr val="FFFFFF"/>
+                </a:solidFill>
+                <a:latin typeface="Calibri" pitchFamily="34" charset="0"/>
+                <a:ea typeface="Calibri" pitchFamily="34" charset="-122"/>
+                <a:cs typeface="Calibri" pitchFamily="34" charset="-120"/>
+              </a:rPr>
+              <a:t>оборудование</a:t>
+            </a:r>
+            <a:endParaRPr lang="en-US" sz="1400" dirty="0"/>
+          </a:p>
+        </p:txBody>
+      </p:sp>
+      <p:sp>
+        <p:nvSpPr>
+          <p:cNvPr id="34" name="Text 25"/>
+          <p:cNvSpPr txBox="1"/>
+          <p:nvPr/>
+        </p:nvSpPr>
+        <p:spPr>
+          <a:xfrm>
+            <a:off x="6903720" y="3977640"/>
+            <a:ext cx="1645920" cy="548640"/>
+          </a:xfrm>
+          <a:prstGeom prst="rect">
+            <a:avLst/>
+          </a:prstGeom>
+          <a:noFill/>
+          <a:ln/>
+        </p:spPr>
+        <p:txBody>
+          <a:bodyPr wrap="square" lIns="0" tIns="0" rIns="0" bIns="0" rtlCol="0" anchor="ctr"/>
+          <a:lstStyle/>
+          <a:p>
+            <a:pPr indent="0" marL="0">
+              <a:buNone/>
+            </a:pPr>
+            <a:r>
+              <a:rPr lang="en-US" sz="2200" b="1" dirty="0">
+                <a:solidFill>
+                  <a:srgbClr val="FFFFFF"/>
+                </a:solidFill>
+                <a:latin typeface="Cambria" pitchFamily="34" charset="0"/>
+                <a:ea typeface="Cambria" pitchFamily="34" charset="-122"/>
+                <a:cs typeface="Cambria" pitchFamily="34" charset="-120"/>
+              </a:rPr>
+              <a:t>1 097 000 ₽</a:t>
+            </a:r>
+            <a:endParaRPr lang="en-US" sz="2200" dirty="0"/>
+          </a:p>
+        </p:txBody>
+      </p:sp>
     </p:spTree>
   </p:cSld>
   <p:clrMapOvr>
